--- a/output/wordlabs-rest-3day.pptx
+++ b/output/wordlabs-rest-3day.pptx
@@ -4240,7 +4240,7 @@
                 <a:ea typeface="Calibri" pitchFamily="34" charset="-122"/>
                 <a:cs typeface="Calibri" pitchFamily="34" charset="-120"/>
               </a:rPr>
-              <a:t>"stop, pause, remain still"</a:t>
+              <a:t>"stop, remain, be still"</a:t>
             </a:r>
             <a:endParaRPr lang="en-US" sz="2200" dirty="0"/>
           </a:p>
@@ -5288,7 +5288,7 @@
                 <a:ea typeface="Calibri" pitchFamily="34" charset="-122"/>
                 <a:cs typeface="Calibri" pitchFamily="34" charset="-120"/>
               </a:rPr>
-              <a:t>Word Labs  •  wordlabs.app  •  Root: 'rest' = stop, pause, remain still</a:t>
+              <a:t>Word Labs  •  wordlabs.app  •  Root: 'rest' = stop, remain, be still</a:t>
             </a:r>
             <a:endParaRPr lang="en-US" sz="800" dirty="0"/>
           </a:p>
@@ -5622,7 +5622,7 @@
                 <a:ea typeface="Trebuchet MS" pitchFamily="34" charset="-122"/>
                 <a:cs typeface="Trebuchet MS" pitchFamily="34" charset="-120"/>
               </a:rPr>
-              <a:t>0</a:t>
+              <a:t>1</a:t>
             </a:r>
             <a:pPr algn="ctr" indent="0" marL="0">
               <a:buNone/>
@@ -5928,7 +5928,7 @@
                 <a:ea typeface="Calibri" pitchFamily="34" charset="-122"/>
                 <a:cs typeface="Calibri" pitchFamily="34" charset="-120"/>
               </a:rPr>
-              <a:t>Word Labs  •  wordlabs.app  •  Root: 'rest' = stop, pause, remain still</a:t>
+              <a:t>Word Labs  •  wordlabs.app  •  Root: 'rest' = stop, remain, be still</a:t>
             </a:r>
             <a:endParaRPr lang="en-US" sz="800" dirty="0"/>
           </a:p>
@@ -6071,7 +6071,7 @@
                 <a:ea typeface="Calibri" pitchFamily="34" charset="-122"/>
                 <a:cs typeface="Calibri" pitchFamily="34" charset="-120"/>
               </a:rPr>
-              <a:t> crowd began to show signs of </a:t>
+              <a:t> puppy could not settle, so its owner found a </a:t>
             </a:r>
             <a:pPr algn="l" indent="0" marL="0">
               <a:buNone/>
@@ -6088,7 +6088,7 @@
                 <a:ea typeface="Calibri" pitchFamily="34" charset="-122"/>
                 <a:cs typeface="Calibri" pitchFamily="34" charset="-120"/>
               </a:rPr>
-              <a:t>unrest</a:t>
+              <a:t>restful</a:t>
             </a:r>
             <a:pPr algn="l" indent="0" marL="0">
               <a:buNone/>
@@ -6102,7 +6102,7 @@
                 <a:ea typeface="Calibri" pitchFamily="34" charset="-122"/>
                 <a:cs typeface="Calibri" pitchFamily="34" charset="-120"/>
               </a:rPr>
-              <a:t> as they waited for hours in the heat.</a:t>
+              <a:t> spot in the garden for them both.</a:t>
             </a:r>
             <a:endParaRPr lang="en-US" sz="1800" dirty="0"/>
           </a:p>
@@ -6385,7 +6385,7 @@
                 <a:ea typeface="Trebuchet MS" pitchFamily="34" charset="-122"/>
                 <a:cs typeface="Trebuchet MS" pitchFamily="34" charset="-120"/>
               </a:rPr>
-              <a:t>unrest</a:t>
+              <a:t>restful</a:t>
             </a:r>
             <a:endParaRPr lang="en-US" sz="1400" dirty="0"/>
           </a:p>
@@ -6716,7 +6716,7 @@
                 <a:ea typeface="Calibri" pitchFamily="34" charset="-122"/>
                 <a:cs typeface="Calibri" pitchFamily="34" charset="-120"/>
               </a:rPr>
-              <a:t>Word Labs  •  wordlabs.app  •  Root: 'rest' = stop, pause, remain still</a:t>
+              <a:t>Word Labs  •  wordlabs.app  •  Root: 'rest' = stop, remain, be still</a:t>
             </a:r>
             <a:endParaRPr lang="en-US" sz="800" dirty="0"/>
           </a:p>
@@ -7543,7 +7543,7 @@
                 <a:ea typeface="Calibri" pitchFamily="34" charset="-122"/>
                 <a:cs typeface="Calibri" pitchFamily="34" charset="-120"/>
               </a:rPr>
-              <a:t>Word Labs  •  wordlabs.app  •  Root: 'rest' = stop, pause, remain still</a:t>
+              <a:t>Word Labs  •  wordlabs.app  •  Root: 'rest' = stop, remain, be still</a:t>
             </a:r>
             <a:endParaRPr lang="en-US" sz="800" dirty="0"/>
           </a:p>
@@ -7860,7 +7860,7 @@
                 <a:ea typeface="Calibri" pitchFamily="34" charset="-122"/>
                 <a:cs typeface="Calibri" pitchFamily="34" charset="-120"/>
               </a:rPr>
-              <a:t>stop, be still</a:t>
+              <a:t>be still, stop</a:t>
             </a:r>
             <a:endParaRPr lang="en-US" sz="850" dirty="0"/>
           </a:p>
@@ -8528,7 +8528,7 @@
                 <a:ea typeface="Calibri" pitchFamily="34" charset="-122"/>
                 <a:cs typeface="Calibri" pitchFamily="34" charset="-120"/>
               </a:rPr>
-              <a:t>Word Labs  •  wordlabs.app  •  Root: 'rest' = stop, pause, remain still</a:t>
+              <a:t>Word Labs  •  wordlabs.app  •  Root: 'rest' = stop, remain, be still</a:t>
             </a:r>
             <a:endParaRPr lang="en-US" sz="800" dirty="0"/>
           </a:p>
@@ -8845,7 +8845,7 @@
                 <a:ea typeface="Calibri" pitchFamily="34" charset="-122"/>
                 <a:cs typeface="Calibri" pitchFamily="34" charset="-120"/>
               </a:rPr>
-              <a:t>stop, be still</a:t>
+              <a:t>be still, stop</a:t>
             </a:r>
             <a:endParaRPr lang="en-US" sz="850" dirty="0"/>
           </a:p>
@@ -9645,7 +9645,7 @@
                 <a:ea typeface="Calibri" pitchFamily="34" charset="-122"/>
                 <a:cs typeface="Calibri" pitchFamily="34" charset="-120"/>
               </a:rPr>
-              <a:t>Word Labs  •  wordlabs.app  •  Root: 'rest' = stop, pause, remain still</a:t>
+              <a:t>Word Labs  •  wordlabs.app  •  Root: 'rest' = stop, remain, be still</a:t>
             </a:r>
             <a:endParaRPr lang="en-US" sz="800" dirty="0"/>
           </a:p>
@@ -9962,7 +9962,7 @@
                 <a:ea typeface="Calibri" pitchFamily="34" charset="-122"/>
                 <a:cs typeface="Calibri" pitchFamily="34" charset="-120"/>
               </a:rPr>
-              <a:t>stop, be still</a:t>
+              <a:t>be still, stop</a:t>
             </a:r>
             <a:endParaRPr lang="en-US" sz="850" dirty="0"/>
           </a:p>
@@ -11185,7 +11185,7 @@
                 <a:ea typeface="Calibri" pitchFamily="34" charset="-122"/>
                 <a:cs typeface="Calibri" pitchFamily="34" charset="-120"/>
               </a:rPr>
-              <a:t>Word Labs  •  wordlabs.app  •  Root: 'rest' = stop, pause, remain still</a:t>
+              <a:t>Word Labs  •  wordlabs.app  •  Root: 'rest' = stop, remain, be still</a:t>
             </a:r>
             <a:endParaRPr lang="en-US" sz="800" dirty="0"/>
           </a:p>
@@ -11324,7 +11324,7 @@
                 <a:ea typeface="Trebuchet MS" pitchFamily="34" charset="-122"/>
                 <a:cs typeface="Trebuchet MS" pitchFamily="34" charset="-120"/>
               </a:rPr>
-              <a:t>unrest</a:t>
+              <a:t>restful</a:t>
             </a:r>
             <a:endParaRPr lang="en-US" sz="2800" dirty="0"/>
           </a:p>
@@ -12012,7 +12012,7 @@
                 <a:ea typeface="Calibri" pitchFamily="34" charset="-122"/>
                 <a:cs typeface="Calibri" pitchFamily="34" charset="-120"/>
               </a:rPr>
-              <a:t>Word Labs  •  wordlabs.app  •  Root: 'rest' = stop, pause, remain still</a:t>
+              <a:t>Word Labs  •  wordlabs.app  •  Root: 'rest' = stop, remain, be still</a:t>
             </a:r>
             <a:endParaRPr lang="en-US" sz="800" dirty="0"/>
           </a:p>
@@ -12151,7 +12151,7 @@
                 <a:ea typeface="Trebuchet MS" pitchFamily="34" charset="-122"/>
                 <a:cs typeface="Trebuchet MS" pitchFamily="34" charset="-120"/>
               </a:rPr>
-              <a:t>unrest</a:t>
+              <a:t>restful</a:t>
             </a:r>
             <a:endParaRPr lang="en-US" sz="2800" dirty="0"/>
           </a:p>
@@ -12240,11 +12240,11 @@
             </a:avLst>
           </a:prstGeom>
           <a:solidFill>
-            <a:srgbClr val="DDD6FE"/>
+            <a:srgbClr val="CCFBF1"/>
           </a:solidFill>
           <a:ln w="19050">
             <a:solidFill>
-              <a:srgbClr val="7C3AED"/>
+              <a:srgbClr val="0D9488"/>
             </a:solidFill>
             <a:prstDash val="solid"/>
           </a:ln>
@@ -12284,13 +12284,13 @@
             <a:r>
               <a:rPr lang="en-US" sz="1300" b="1" dirty="0">
                 <a:solidFill>
-                  <a:srgbClr val="4C1D95"/>
+                  <a:srgbClr val="0F766E"/>
                 </a:solidFill>
                 <a:latin typeface="Trebuchet MS" pitchFamily="34" charset="0"/>
                 <a:ea typeface="Trebuchet MS" pitchFamily="34" charset="-122"/>
                 <a:cs typeface="Trebuchet MS" pitchFamily="34" charset="-120"/>
               </a:rPr>
-              <a:t>un</a:t>
+              <a:t>rest</a:t>
             </a:r>
             <a:endParaRPr lang="en-US" sz="1300" dirty="0"/>
           </a:p>
@@ -12329,7 +12329,7 @@
                 <a:ea typeface="Calibri" pitchFamily="34" charset="-122"/>
                 <a:cs typeface="Calibri" pitchFamily="34" charset="-120"/>
               </a:rPr>
-              <a:t>not, opposite of</a:t>
+              <a:t>be still, stop</a:t>
             </a:r>
             <a:endParaRPr lang="en-US" sz="850" dirty="0"/>
           </a:p>
@@ -12352,11 +12352,11 @@
             </a:avLst>
           </a:prstGeom>
           <a:solidFill>
-            <a:srgbClr val="CCFBF1"/>
+            <a:srgbClr val="FCE7F3"/>
           </a:solidFill>
           <a:ln w="19050">
             <a:solidFill>
-              <a:srgbClr val="0D9488"/>
+              <a:srgbClr val="DB2777"/>
             </a:solidFill>
             <a:prstDash val="solid"/>
           </a:ln>
@@ -12396,13 +12396,13 @@
             <a:r>
               <a:rPr lang="en-US" sz="1300" b="1" dirty="0">
                 <a:solidFill>
-                  <a:srgbClr val="0F766E"/>
+                  <a:srgbClr val="9D174D"/>
                 </a:solidFill>
                 <a:latin typeface="Trebuchet MS" pitchFamily="34" charset="0"/>
                 <a:ea typeface="Trebuchet MS" pitchFamily="34" charset="-122"/>
                 <a:cs typeface="Trebuchet MS" pitchFamily="34" charset="-120"/>
               </a:rPr>
-              <a:t>rest</a:t>
+              <a:t>ful</a:t>
             </a:r>
             <a:endParaRPr lang="en-US" sz="1300" dirty="0"/>
           </a:p>
@@ -12441,7 +12441,7 @@
                 <a:ea typeface="Calibri" pitchFamily="34" charset="-122"/>
                 <a:cs typeface="Calibri" pitchFamily="34" charset="-120"/>
               </a:rPr>
-              <a:t>stop, be still</a:t>
+              <a:t>full of, having</a:t>
             </a:r>
             <a:endParaRPr lang="en-US" sz="850" dirty="0"/>
           </a:p>
@@ -12997,7 +12997,7 @@
                 <a:ea typeface="Calibri" pitchFamily="34" charset="-122"/>
                 <a:cs typeface="Calibri" pitchFamily="34" charset="-120"/>
               </a:rPr>
-              <a:t>Word Labs  •  wordlabs.app  •  Root: 'rest' = stop, pause, remain still</a:t>
+              <a:t>Word Labs  •  wordlabs.app  •  Root: 'rest' = stop, remain, be still</a:t>
             </a:r>
             <a:endParaRPr lang="en-US" sz="800" dirty="0"/>
           </a:p>
@@ -13136,7 +13136,7 @@
                 <a:ea typeface="Trebuchet MS" pitchFamily="34" charset="-122"/>
                 <a:cs typeface="Trebuchet MS" pitchFamily="34" charset="-120"/>
               </a:rPr>
-              <a:t>unrest</a:t>
+              <a:t>restful</a:t>
             </a:r>
             <a:endParaRPr lang="en-US" sz="2800" dirty="0"/>
           </a:p>
@@ -13225,11 +13225,11 @@
             </a:avLst>
           </a:prstGeom>
           <a:solidFill>
-            <a:srgbClr val="DDD6FE"/>
+            <a:srgbClr val="CCFBF1"/>
           </a:solidFill>
           <a:ln w="19050">
             <a:solidFill>
-              <a:srgbClr val="7C3AED"/>
+              <a:srgbClr val="0D9488"/>
             </a:solidFill>
             <a:prstDash val="solid"/>
           </a:ln>
@@ -13269,13 +13269,13 @@
             <a:r>
               <a:rPr lang="en-US" sz="1300" b="1" dirty="0">
                 <a:solidFill>
-                  <a:srgbClr val="4C1D95"/>
+                  <a:srgbClr val="0F766E"/>
                 </a:solidFill>
                 <a:latin typeface="Trebuchet MS" pitchFamily="34" charset="0"/>
                 <a:ea typeface="Trebuchet MS" pitchFamily="34" charset="-122"/>
                 <a:cs typeface="Trebuchet MS" pitchFamily="34" charset="-120"/>
               </a:rPr>
-              <a:t>un</a:t>
+              <a:t>rest</a:t>
             </a:r>
             <a:endParaRPr lang="en-US" sz="1300" dirty="0"/>
           </a:p>
@@ -13314,7 +13314,7 @@
                 <a:ea typeface="Calibri" pitchFamily="34" charset="-122"/>
                 <a:cs typeface="Calibri" pitchFamily="34" charset="-120"/>
               </a:rPr>
-              <a:t>not, opposite of</a:t>
+              <a:t>be still, stop</a:t>
             </a:r>
             <a:endParaRPr lang="en-US" sz="850" dirty="0"/>
           </a:p>
@@ -13337,11 +13337,11 @@
             </a:avLst>
           </a:prstGeom>
           <a:solidFill>
-            <a:srgbClr val="CCFBF1"/>
+            <a:srgbClr val="FCE7F3"/>
           </a:solidFill>
           <a:ln w="19050">
             <a:solidFill>
-              <a:srgbClr val="0D9488"/>
+              <a:srgbClr val="DB2777"/>
             </a:solidFill>
             <a:prstDash val="solid"/>
           </a:ln>
@@ -13381,13 +13381,13 @@
             <a:r>
               <a:rPr lang="en-US" sz="1300" b="1" dirty="0">
                 <a:solidFill>
-                  <a:srgbClr val="0F766E"/>
+                  <a:srgbClr val="9D174D"/>
                 </a:solidFill>
                 <a:latin typeface="Trebuchet MS" pitchFamily="34" charset="0"/>
                 <a:ea typeface="Trebuchet MS" pitchFamily="34" charset="-122"/>
                 <a:cs typeface="Trebuchet MS" pitchFamily="34" charset="-120"/>
               </a:rPr>
-              <a:t>rest</a:t>
+              <a:t>ful</a:t>
             </a:r>
             <a:endParaRPr lang="en-US" sz="1300" dirty="0"/>
           </a:p>
@@ -13426,7 +13426,7 @@
                 <a:ea typeface="Calibri" pitchFamily="34" charset="-122"/>
                 <a:cs typeface="Calibri" pitchFamily="34" charset="-120"/>
               </a:rPr>
-              <a:t>stop, be still</a:t>
+              <a:t>full of, having</a:t>
             </a:r>
             <a:endParaRPr lang="en-US" sz="850" dirty="0"/>
           </a:p>
@@ -13585,7 +13585,7 @@
                 <a:ea typeface="Trebuchet MS" pitchFamily="34" charset="-122"/>
                 <a:cs typeface="Trebuchet MS" pitchFamily="34" charset="-120"/>
               </a:rPr>
-              <a:t>un</a:t>
+              <a:t>rest</a:t>
             </a:r>
             <a:endParaRPr lang="en-US" sz="1400" dirty="0"/>
           </a:p>
@@ -13690,7 +13690,7 @@
                 <a:ea typeface="Trebuchet MS" pitchFamily="34" charset="-122"/>
                 <a:cs typeface="Trebuchet MS" pitchFamily="34" charset="-120"/>
               </a:rPr>
-              <a:t>rest</a:t>
+              <a:t>ful</a:t>
             </a:r>
             <a:endParaRPr lang="en-US" sz="1400" dirty="0"/>
           </a:p>
@@ -14023,7 +14023,7 @@
                 <a:ea typeface="Calibri" pitchFamily="34" charset="-122"/>
                 <a:cs typeface="Calibri" pitchFamily="34" charset="-120"/>
               </a:rPr>
-              <a:t>Root 'rest' — stop, pause, remain still</a:t>
+              <a:t>Root 'rest' — stop, remain, be still</a:t>
             </a:r>
             <a:endParaRPr lang="en-US" sz="1600" dirty="0"/>
           </a:p>
@@ -14379,7 +14379,7 @@
                 <a:ea typeface="Calibri" pitchFamily="34" charset="-122"/>
                 <a:cs typeface="Calibri" pitchFamily="34" charset="-120"/>
               </a:rPr>
-              <a:t>Word Labs  •  wordlabs.app  •  Root: 'rest' = stop, pause, remain still</a:t>
+              <a:t>Word Labs  •  wordlabs.app  •  Root: 'rest' = stop, remain, be still</a:t>
             </a:r>
             <a:endParaRPr lang="en-US" sz="800" dirty="0"/>
           </a:p>
@@ -14518,7 +14518,7 @@
                 <a:ea typeface="Trebuchet MS" pitchFamily="34" charset="-122"/>
                 <a:cs typeface="Trebuchet MS" pitchFamily="34" charset="-120"/>
               </a:rPr>
-              <a:t>unrest</a:t>
+              <a:t>restful</a:t>
             </a:r>
             <a:endParaRPr lang="en-US" sz="2800" dirty="0"/>
           </a:p>
@@ -14607,11 +14607,11 @@
             </a:avLst>
           </a:prstGeom>
           <a:solidFill>
-            <a:srgbClr val="DDD6FE"/>
+            <a:srgbClr val="CCFBF1"/>
           </a:solidFill>
           <a:ln w="19050">
             <a:solidFill>
-              <a:srgbClr val="7C3AED"/>
+              <a:srgbClr val="0D9488"/>
             </a:solidFill>
             <a:prstDash val="solid"/>
           </a:ln>
@@ -14651,13 +14651,13 @@
             <a:r>
               <a:rPr lang="en-US" sz="1300" b="1" dirty="0">
                 <a:solidFill>
-                  <a:srgbClr val="4C1D95"/>
+                  <a:srgbClr val="0F766E"/>
                 </a:solidFill>
                 <a:latin typeface="Trebuchet MS" pitchFamily="34" charset="0"/>
                 <a:ea typeface="Trebuchet MS" pitchFamily="34" charset="-122"/>
                 <a:cs typeface="Trebuchet MS" pitchFamily="34" charset="-120"/>
               </a:rPr>
-              <a:t>un</a:t>
+              <a:t>rest</a:t>
             </a:r>
             <a:endParaRPr lang="en-US" sz="1300" dirty="0"/>
           </a:p>
@@ -14696,7 +14696,7 @@
                 <a:ea typeface="Calibri" pitchFamily="34" charset="-122"/>
                 <a:cs typeface="Calibri" pitchFamily="34" charset="-120"/>
               </a:rPr>
-              <a:t>not, opposite of</a:t>
+              <a:t>be still, stop</a:t>
             </a:r>
             <a:endParaRPr lang="en-US" sz="850" dirty="0"/>
           </a:p>
@@ -14719,11 +14719,11 @@
             </a:avLst>
           </a:prstGeom>
           <a:solidFill>
-            <a:srgbClr val="CCFBF1"/>
+            <a:srgbClr val="FCE7F3"/>
           </a:solidFill>
           <a:ln w="19050">
             <a:solidFill>
-              <a:srgbClr val="0D9488"/>
+              <a:srgbClr val="DB2777"/>
             </a:solidFill>
             <a:prstDash val="solid"/>
           </a:ln>
@@ -14763,13 +14763,13 @@
             <a:r>
               <a:rPr lang="en-US" sz="1300" b="1" dirty="0">
                 <a:solidFill>
-                  <a:srgbClr val="0F766E"/>
+                  <a:srgbClr val="9D174D"/>
                 </a:solidFill>
                 <a:latin typeface="Trebuchet MS" pitchFamily="34" charset="0"/>
                 <a:ea typeface="Trebuchet MS" pitchFamily="34" charset="-122"/>
                 <a:cs typeface="Trebuchet MS" pitchFamily="34" charset="-120"/>
               </a:rPr>
-              <a:t>rest</a:t>
+              <a:t>ful</a:t>
             </a:r>
             <a:endParaRPr lang="en-US" sz="1300" dirty="0"/>
           </a:p>
@@ -14808,7 +14808,7 @@
                 <a:ea typeface="Calibri" pitchFamily="34" charset="-122"/>
                 <a:cs typeface="Calibri" pitchFamily="34" charset="-120"/>
               </a:rPr>
-              <a:t>stop, be still</a:t>
+              <a:t>full of, having</a:t>
             </a:r>
             <a:endParaRPr lang="en-US" sz="850" dirty="0"/>
           </a:p>
@@ -14967,7 +14967,7 @@
                 <a:ea typeface="Trebuchet MS" pitchFamily="34" charset="-122"/>
                 <a:cs typeface="Trebuchet MS" pitchFamily="34" charset="-120"/>
               </a:rPr>
-              <a:t>un</a:t>
+              <a:t>rest</a:t>
             </a:r>
             <a:endParaRPr lang="en-US" sz="1400" dirty="0"/>
           </a:p>
@@ -15072,7 +15072,7 @@
                 <a:ea typeface="Trebuchet MS" pitchFamily="34" charset="-122"/>
                 <a:cs typeface="Trebuchet MS" pitchFamily="34" charset="-120"/>
               </a:rPr>
-              <a:t>rest</a:t>
+              <a:t>ful</a:t>
             </a:r>
             <a:endParaRPr lang="en-US" sz="1400" dirty="0"/>
           </a:p>
@@ -15179,7 +15179,7 @@
         </p:nvSpPr>
         <p:spPr>
           <a:xfrm>
-            <a:off x="2254649" y="4169664"/>
+            <a:off x="2124837" y="4169664"/>
             <a:ext cx="685800" cy="475488"/>
           </a:xfrm>
           <a:prstGeom prst="rect">
@@ -15206,7 +15206,7 @@
         </p:nvSpPr>
         <p:spPr>
           <a:xfrm>
-            <a:off x="2254649" y="4169664"/>
+            <a:off x="2124837" y="4169664"/>
             <a:ext cx="685800" cy="475488"/>
           </a:xfrm>
           <a:prstGeom prst="rect">
@@ -15231,7 +15231,7 @@
                 <a:ea typeface="Trebuchet MS" pitchFamily="34" charset="-122"/>
                 <a:cs typeface="Trebuchet MS" pitchFamily="34" charset="-120"/>
               </a:rPr>
-              <a:t>u</a:t>
+              <a:t>r</a:t>
             </a:r>
             <a:endParaRPr lang="en-US" sz="900" dirty="0"/>
           </a:p>
@@ -15245,7 +15245,7 @@
         </p:nvSpPr>
         <p:spPr>
           <a:xfrm>
-            <a:off x="3293146" y="4169664"/>
+            <a:off x="3033522" y="4169664"/>
             <a:ext cx="685800" cy="475488"/>
           </a:xfrm>
           <a:prstGeom prst="rect">
@@ -15272,7 +15272,7 @@
         </p:nvSpPr>
         <p:spPr>
           <a:xfrm>
-            <a:off x="3293146" y="4169664"/>
+            <a:off x="3033522" y="4169664"/>
             <a:ext cx="685800" cy="475488"/>
           </a:xfrm>
           <a:prstGeom prst="rect">
@@ -15297,7 +15297,7 @@
                 <a:ea typeface="Trebuchet MS" pitchFamily="34" charset="-122"/>
                 <a:cs typeface="Trebuchet MS" pitchFamily="34" charset="-120"/>
               </a:rPr>
-              <a:t>n</a:t>
+              <a:t>e</a:t>
             </a:r>
             <a:endParaRPr lang="en-US" sz="900" dirty="0"/>
           </a:p>
@@ -15311,7 +15311,7 @@
         </p:nvSpPr>
         <p:spPr>
           <a:xfrm>
-            <a:off x="4331643" y="4169664"/>
+            <a:off x="3942207" y="4169664"/>
             <a:ext cx="685800" cy="475488"/>
           </a:xfrm>
           <a:prstGeom prst="rect">
@@ -15338,7 +15338,7 @@
         </p:nvSpPr>
         <p:spPr>
           <a:xfrm>
-            <a:off x="4331643" y="4169664"/>
+            <a:off x="3942207" y="4169664"/>
             <a:ext cx="685800" cy="475488"/>
           </a:xfrm>
           <a:prstGeom prst="rect">
@@ -15363,7 +15363,7 @@
                 <a:ea typeface="Trebuchet MS" pitchFamily="34" charset="-122"/>
                 <a:cs typeface="Trebuchet MS" pitchFamily="34" charset="-120"/>
               </a:rPr>
-              <a:t>r</a:t>
+              <a:t>s</a:t>
             </a:r>
             <a:endParaRPr lang="en-US" sz="900" dirty="0"/>
           </a:p>
@@ -15377,7 +15377,7 @@
         </p:nvSpPr>
         <p:spPr>
           <a:xfrm>
-            <a:off x="5370141" y="4169664"/>
+            <a:off x="4850892" y="4169664"/>
             <a:ext cx="685800" cy="475488"/>
           </a:xfrm>
           <a:prstGeom prst="rect">
@@ -15404,7 +15404,7 @@
         </p:nvSpPr>
         <p:spPr>
           <a:xfrm>
-            <a:off x="5370141" y="4169664"/>
+            <a:off x="4850892" y="4169664"/>
             <a:ext cx="685800" cy="475488"/>
           </a:xfrm>
           <a:prstGeom prst="rect">
@@ -15429,7 +15429,7 @@
                 <a:ea typeface="Trebuchet MS" pitchFamily="34" charset="-122"/>
                 <a:cs typeface="Trebuchet MS" pitchFamily="34" charset="-120"/>
               </a:rPr>
-              <a:t>e</a:t>
+              <a:t>t</a:t>
             </a:r>
             <a:endParaRPr lang="en-US" sz="900" dirty="0"/>
           </a:p>
@@ -15443,7 +15443,7 @@
         </p:nvSpPr>
         <p:spPr>
           <a:xfrm>
-            <a:off x="6408638" y="4169664"/>
+            <a:off x="5759577" y="4169664"/>
             <a:ext cx="685800" cy="475488"/>
           </a:xfrm>
           <a:prstGeom prst="rect">
@@ -15470,7 +15470,7 @@
         </p:nvSpPr>
         <p:spPr>
           <a:xfrm>
-            <a:off x="6408638" y="4169664"/>
+            <a:off x="5759577" y="4169664"/>
             <a:ext cx="685800" cy="475488"/>
           </a:xfrm>
           <a:prstGeom prst="rect">
@@ -15495,7 +15495,7 @@
                 <a:ea typeface="Trebuchet MS" pitchFamily="34" charset="-122"/>
                 <a:cs typeface="Trebuchet MS" pitchFamily="34" charset="-120"/>
               </a:rPr>
-              <a:t>s</a:t>
+              <a:t>f</a:t>
             </a:r>
             <a:endParaRPr lang="en-US" sz="900" dirty="0"/>
           </a:p>
@@ -15509,7 +15509,7 @@
         </p:nvSpPr>
         <p:spPr>
           <a:xfrm>
-            <a:off x="7447135" y="4169664"/>
+            <a:off x="6668262" y="4169664"/>
             <a:ext cx="685800" cy="475488"/>
           </a:xfrm>
           <a:prstGeom prst="rect">
@@ -15536,7 +15536,7 @@
         </p:nvSpPr>
         <p:spPr>
           <a:xfrm>
-            <a:off x="7447135" y="4169664"/>
+            <a:off x="6668262" y="4169664"/>
             <a:ext cx="685800" cy="475488"/>
           </a:xfrm>
           <a:prstGeom prst="rect">
@@ -15561,7 +15561,73 @@
                 <a:ea typeface="Trebuchet MS" pitchFamily="34" charset="-122"/>
                 <a:cs typeface="Trebuchet MS" pitchFamily="34" charset="-120"/>
               </a:rPr>
-              <a:t>t</a:t>
+              <a:t>u</a:t>
+            </a:r>
+            <a:endParaRPr lang="en-US" sz="900" dirty="0"/>
+          </a:p>
+        </p:txBody>
+      </p:sp>
+      <p:sp>
+        <p:nvSpPr>
+          <p:cNvPr id="45" name="Shape 43"/>
+          <p:cNvSpPr/>
+          <p:nvPr/>
+        </p:nvSpPr>
+        <p:spPr>
+          <a:xfrm>
+            <a:off x="7576947" y="4169664"/>
+            <a:ext cx="685800" cy="475488"/>
+          </a:xfrm>
+          <a:prstGeom prst="rect">
+            <a:avLst>
+              <a:gd name="adj" fmla="val 7692"/>
+            </a:avLst>
+          </a:prstGeom>
+          <a:solidFill>
+            <a:srgbClr val="FFFFFF"/>
+          </a:solidFill>
+          <a:ln w="12700">
+            <a:solidFill>
+              <a:srgbClr val="DB2777"/>
+            </a:solidFill>
+            <a:prstDash val="solid"/>
+          </a:ln>
+        </p:spPr>
+      </p:sp>
+      <p:sp>
+        <p:nvSpPr>
+          <p:cNvPr id="46" name="Text 44"/>
+          <p:cNvSpPr/>
+          <p:nvPr/>
+        </p:nvSpPr>
+        <p:spPr>
+          <a:xfrm>
+            <a:off x="7576947" y="4169664"/>
+            <a:ext cx="685800" cy="475488"/>
+          </a:xfrm>
+          <a:prstGeom prst="rect">
+            <a:avLst/>
+          </a:prstGeom>
+          <a:noFill/>
+          <a:ln/>
+        </p:spPr>
+        <p:txBody>
+          <a:bodyPr wrap="square" lIns="0" tIns="0" rIns="0" bIns="0" rtlCol="0" anchor="ctr"/>
+          <a:lstStyle/>
+          <a:p>
+            <a:pPr algn="ctr" indent="0" marL="0">
+              <a:buNone/>
+            </a:pPr>
+            <a:r>
+              <a:rPr lang="en-US" sz="900" b="1" dirty="0">
+                <a:solidFill>
+                  <a:srgbClr val="9D174D"/>
+                </a:solidFill>
+                <a:latin typeface="Trebuchet MS" pitchFamily="34" charset="0"/>
+                <a:ea typeface="Trebuchet MS" pitchFamily="34" charset="-122"/>
+                <a:cs typeface="Trebuchet MS" pitchFamily="34" charset="-120"/>
+              </a:rPr>
+              <a:t>l</a:t>
             </a:r>
             <a:endParaRPr lang="en-US" sz="900" dirty="0"/>
           </a:p>
@@ -16135,7 +16201,7 @@
                 <a:ea typeface="Calibri" pitchFamily="34" charset="-122"/>
                 <a:cs typeface="Calibri" pitchFamily="34" charset="-120"/>
               </a:rPr>
-              <a:t>Word Labs  •  wordlabs.app  •  Root: 'rest' = stop, pause, remain still</a:t>
+              <a:t>Word Labs  •  wordlabs.app  •  Root: 'rest' = stop, remain, be still</a:t>
             </a:r>
             <a:endParaRPr lang="en-US" sz="800" dirty="0"/>
           </a:p>
@@ -16775,7 +16841,7 @@
                 <a:ea typeface="Calibri" pitchFamily="34" charset="-122"/>
                 <a:cs typeface="Calibri" pitchFamily="34" charset="-120"/>
               </a:rPr>
-              <a:t>Word Labs  •  wordlabs.app  •  Root: 'rest' = stop, pause, remain still</a:t>
+              <a:t>Word Labs  •  wordlabs.app  •  Root: 'rest' = stop, remain, be still</a:t>
             </a:r>
             <a:endParaRPr lang="en-US" sz="800" dirty="0"/>
           </a:p>
@@ -16887,7 +16953,7 @@
                 <a:ea typeface="Calibri" pitchFamily="34" charset="-122"/>
                 <a:cs typeface="Calibri" pitchFamily="34" charset="-120"/>
               </a:rPr>
-              <a:t>After the </a:t>
+              <a:t>The news reported </a:t>
             </a:r>
             <a:pPr algn="l" indent="0" marL="0">
               <a:buNone/>
@@ -16904,7 +16970,7 @@
                 <a:ea typeface="Calibri" pitchFamily="34" charset="-122"/>
                 <a:cs typeface="Calibri" pitchFamily="34" charset="-120"/>
               </a:rPr>
-              <a:t>arrest</a:t>
+              <a:t>unrest</a:t>
             </a:r>
             <a:pPr algn="l" indent="0" marL="0">
               <a:buNone/>
@@ -16918,7 +16984,7 @@
                 <a:ea typeface="Calibri" pitchFamily="34" charset="-122"/>
                 <a:cs typeface="Calibri" pitchFamily="34" charset="-120"/>
               </a:rPr>
-              <a:t>, the </a:t>
+              <a:t> in the city; however, the </a:t>
             </a:r>
             <a:pPr algn="l" indent="0" marL="0">
               <a:buNone/>
@@ -16935,7 +17001,7 @@
                 <a:ea typeface="Calibri" pitchFamily="34" charset="-122"/>
                 <a:cs typeface="Calibri" pitchFamily="34" charset="-120"/>
               </a:rPr>
-              <a:t>restless</a:t>
+              <a:t>interesting</a:t>
             </a:r>
             <a:pPr algn="l" indent="0" marL="0">
               <a:buNone/>
@@ -16949,7 +17015,7 @@
                 <a:ea typeface="Calibri" pitchFamily="34" charset="-122"/>
                 <a:cs typeface="Calibri" pitchFamily="34" charset="-120"/>
               </a:rPr>
-              <a:t> town felt a sense of </a:t>
+              <a:t> festival continued and officers made one </a:t>
             </a:r>
             <a:pPr algn="l" indent="0" marL="0">
               <a:buNone/>
@@ -16966,7 +17032,7 @@
                 <a:ea typeface="Calibri" pitchFamily="34" charset="-122"/>
                 <a:cs typeface="Calibri" pitchFamily="34" charset="-120"/>
               </a:rPr>
-              <a:t>unrest</a:t>
+              <a:t>arrest</a:t>
             </a:r>
             <a:pPr algn="l" indent="0" marL="0">
               <a:buNone/>
@@ -16980,7 +17046,7 @@
                 <a:ea typeface="Calibri" pitchFamily="34" charset="-122"/>
                 <a:cs typeface="Calibri" pitchFamily="34" charset="-120"/>
               </a:rPr>
-              <a:t>, and people wondered if peace would return.</a:t>
+              <a:t>.</a:t>
             </a:r>
             <a:endParaRPr lang="en-US" sz="1800" dirty="0"/>
           </a:p>
@@ -17135,7 +17201,7 @@
                 <a:ea typeface="Trebuchet MS" pitchFamily="34" charset="-122"/>
                 <a:cs typeface="Trebuchet MS" pitchFamily="34" charset="-120"/>
               </a:rPr>
-              <a:t>arrest</a:t>
+              <a:t>unrest</a:t>
             </a:r>
             <a:endParaRPr lang="en-US" sz="1400" dirty="0"/>
           </a:p>
@@ -17263,7 +17329,7 @@
                 <a:ea typeface="Trebuchet MS" pitchFamily="34" charset="-122"/>
                 <a:cs typeface="Trebuchet MS" pitchFamily="34" charset="-120"/>
               </a:rPr>
-              <a:t>restless</a:t>
+              <a:t>interesting</a:t>
             </a:r>
             <a:endParaRPr lang="en-US" sz="1400" dirty="0"/>
           </a:p>
@@ -17391,7 +17457,7 @@
                 <a:ea typeface="Trebuchet MS" pitchFamily="34" charset="-122"/>
                 <a:cs typeface="Trebuchet MS" pitchFamily="34" charset="-120"/>
               </a:rPr>
-              <a:t>unrest</a:t>
+              <a:t>arrest</a:t>
             </a:r>
             <a:endParaRPr lang="en-US" sz="1400" dirty="0"/>
           </a:p>
@@ -17722,7 +17788,7 @@
                 <a:ea typeface="Calibri" pitchFamily="34" charset="-122"/>
                 <a:cs typeface="Calibri" pitchFamily="34" charset="-120"/>
               </a:rPr>
-              <a:t>Word Labs  •  wordlabs.app  •  Root: 'rest' = stop, pause, remain still</a:t>
+              <a:t>Word Labs  •  wordlabs.app  •  Root: 'rest' = stop, remain, be still</a:t>
             </a:r>
             <a:endParaRPr lang="en-US" sz="800" dirty="0"/>
           </a:p>
@@ -17861,7 +17927,7 @@
                 <a:ea typeface="Trebuchet MS" pitchFamily="34" charset="-122"/>
                 <a:cs typeface="Trebuchet MS" pitchFamily="34" charset="-120"/>
               </a:rPr>
-              <a:t>arrest</a:t>
+              <a:t>unrest</a:t>
             </a:r>
             <a:endParaRPr lang="en-US" sz="2800" dirty="0"/>
           </a:p>
@@ -18549,7 +18615,7 @@
                 <a:ea typeface="Calibri" pitchFamily="34" charset="-122"/>
                 <a:cs typeface="Calibri" pitchFamily="34" charset="-120"/>
               </a:rPr>
-              <a:t>Word Labs  •  wordlabs.app  •  Root: 'rest' = stop, pause, remain still</a:t>
+              <a:t>Word Labs  •  wordlabs.app  •  Root: 'rest' = stop, remain, be still</a:t>
             </a:r>
             <a:endParaRPr lang="en-US" sz="800" dirty="0"/>
           </a:p>
@@ -18688,7 +18754,7 @@
                 <a:ea typeface="Trebuchet MS" pitchFamily="34" charset="-122"/>
                 <a:cs typeface="Trebuchet MS" pitchFamily="34" charset="-120"/>
               </a:rPr>
-              <a:t>arrest</a:t>
+              <a:t>unrest</a:t>
             </a:r>
             <a:endParaRPr lang="en-US" sz="2800" dirty="0"/>
           </a:p>
@@ -18827,7 +18893,7 @@
                 <a:ea typeface="Trebuchet MS" pitchFamily="34" charset="-122"/>
                 <a:cs typeface="Trebuchet MS" pitchFamily="34" charset="-120"/>
               </a:rPr>
-              <a:t>ar</a:t>
+              <a:t>un</a:t>
             </a:r>
             <a:endParaRPr lang="en-US" sz="1300" dirty="0"/>
           </a:p>
@@ -18866,7 +18932,7 @@
                 <a:ea typeface="Calibri" pitchFamily="34" charset="-122"/>
                 <a:cs typeface="Calibri" pitchFamily="34" charset="-120"/>
               </a:rPr>
-              <a:t>to, toward</a:t>
+              <a:t>not, opposite of</a:t>
             </a:r>
             <a:endParaRPr lang="en-US" sz="850" dirty="0"/>
           </a:p>
@@ -18874,46 +18940,7 @@
       </p:sp>
       <p:sp>
         <p:nvSpPr>
-          <p:cNvPr id="19" name="Text 17"/>
-          <p:cNvSpPr/>
-          <p:nvPr/>
-        </p:nvSpPr>
-        <p:spPr>
-          <a:xfrm>
-            <a:off x="2938272" y="2752344"/>
-            <a:ext cx="1828800" cy="182880"/>
-          </a:xfrm>
-          <a:prstGeom prst="rect">
-            <a:avLst/>
-          </a:prstGeom>
-          <a:noFill/>
-          <a:ln/>
-        </p:spPr>
-        <p:txBody>
-          <a:bodyPr wrap="square" lIns="0" tIns="0" rIns="0" bIns="0" rtlCol="0" anchor="t"/>
-          <a:lstStyle/>
-          <a:p>
-            <a:pPr algn="ctr" indent="0" marL="0">
-              <a:buNone/>
-            </a:pPr>
-            <a:r>
-              <a:rPr lang="en-US" sz="700" i="1" dirty="0">
-                <a:solidFill>
-                  <a:srgbClr val="94A3B8"/>
-                </a:solidFill>
-                <a:latin typeface="Calibri" pitchFamily="34" charset="0"/>
-                <a:ea typeface="Calibri" pitchFamily="34" charset="-122"/>
-                <a:cs typeface="Calibri" pitchFamily="34" charset="-120"/>
-              </a:rPr>
-              <a:t>ad → ar before 'r'</a:t>
-            </a:r>
-            <a:endParaRPr lang="en-US" sz="700" dirty="0"/>
-          </a:p>
-        </p:txBody>
-      </p:sp>
-      <p:sp>
-        <p:nvSpPr>
-          <p:cNvPr id="20" name="Shape 18"/>
+          <p:cNvPr id="19" name="Shape 17"/>
           <p:cNvSpPr/>
           <p:nvPr/>
         </p:nvSpPr>
@@ -18947,7 +18974,7 @@
       </p:sp>
       <p:sp>
         <p:nvSpPr>
-          <p:cNvPr id="21" name="Text 19"/>
+          <p:cNvPr id="20" name="Text 18"/>
           <p:cNvSpPr/>
           <p:nvPr/>
         </p:nvSpPr>
@@ -18986,7 +19013,7 @@
       </p:sp>
       <p:sp>
         <p:nvSpPr>
-          <p:cNvPr id="22" name="Text 20"/>
+          <p:cNvPr id="21" name="Text 19"/>
           <p:cNvSpPr/>
           <p:nvPr/>
         </p:nvSpPr>
@@ -19017,7 +19044,7 @@
                 <a:ea typeface="Calibri" pitchFamily="34" charset="-122"/>
                 <a:cs typeface="Calibri" pitchFamily="34" charset="-120"/>
               </a:rPr>
-              <a:t>stop, hold still</a:t>
+              <a:t>be still, stop</a:t>
             </a:r>
             <a:endParaRPr lang="en-US" sz="850" dirty="0"/>
           </a:p>
@@ -19025,7 +19052,7 @@
       </p:sp>
       <p:sp>
         <p:nvSpPr>
-          <p:cNvPr id="23" name="Shape 21"/>
+          <p:cNvPr id="22" name="Shape 20"/>
           <p:cNvSpPr/>
           <p:nvPr/>
         </p:nvSpPr>
@@ -19052,7 +19079,7 @@
       </p:sp>
       <p:sp>
         <p:nvSpPr>
-          <p:cNvPr id="24" name="Text 22"/>
+          <p:cNvPr id="23" name="Text 21"/>
           <p:cNvSpPr/>
           <p:nvPr/>
         </p:nvSpPr>
@@ -19091,7 +19118,7 @@
       </p:sp>
       <p:sp>
         <p:nvSpPr>
-          <p:cNvPr id="25" name="Shape 23"/>
+          <p:cNvPr id="24" name="Shape 22"/>
           <p:cNvSpPr/>
           <p:nvPr/>
         </p:nvSpPr>
@@ -19118,7 +19145,7 @@
       </p:sp>
       <p:sp>
         <p:nvSpPr>
-          <p:cNvPr id="26" name="Text 24"/>
+          <p:cNvPr id="25" name="Text 23"/>
           <p:cNvSpPr/>
           <p:nvPr/>
         </p:nvSpPr>
@@ -19157,7 +19184,7 @@
       </p:sp>
       <p:sp>
         <p:nvSpPr>
-          <p:cNvPr id="27" name="Shape 25"/>
+          <p:cNvPr id="26" name="Shape 24"/>
           <p:cNvSpPr/>
           <p:nvPr/>
         </p:nvSpPr>
@@ -19184,7 +19211,7 @@
       </p:sp>
       <p:sp>
         <p:nvSpPr>
-          <p:cNvPr id="28" name="Text 26"/>
+          <p:cNvPr id="27" name="Text 25"/>
           <p:cNvSpPr/>
           <p:nvPr/>
         </p:nvSpPr>
@@ -19223,7 +19250,7 @@
       </p:sp>
       <p:sp>
         <p:nvSpPr>
-          <p:cNvPr id="29" name="Shape 27"/>
+          <p:cNvPr id="28" name="Shape 26"/>
           <p:cNvSpPr/>
           <p:nvPr/>
         </p:nvSpPr>
@@ -19250,7 +19277,7 @@
       </p:sp>
       <p:sp>
         <p:nvSpPr>
-          <p:cNvPr id="30" name="Text 28"/>
+          <p:cNvPr id="29" name="Text 27"/>
           <p:cNvSpPr/>
           <p:nvPr/>
         </p:nvSpPr>
@@ -19573,7 +19600,7 @@
                 <a:ea typeface="Calibri" pitchFamily="34" charset="-122"/>
                 <a:cs typeface="Calibri" pitchFamily="34" charset="-120"/>
               </a:rPr>
-              <a:t>Word Labs  •  wordlabs.app  •  Root: 'rest' = stop, pause, remain still</a:t>
+              <a:t>Word Labs  •  wordlabs.app  •  Root: 'rest' = stop, remain, be still</a:t>
             </a:r>
             <a:endParaRPr lang="en-US" sz="800" dirty="0"/>
           </a:p>
@@ -19712,7 +19739,7 @@
                 <a:ea typeface="Trebuchet MS" pitchFamily="34" charset="-122"/>
                 <a:cs typeface="Trebuchet MS" pitchFamily="34" charset="-120"/>
               </a:rPr>
-              <a:t>arrest</a:t>
+              <a:t>unrest</a:t>
             </a:r>
             <a:endParaRPr lang="en-US" sz="2800" dirty="0"/>
           </a:p>
@@ -19851,7 +19878,7 @@
                 <a:ea typeface="Trebuchet MS" pitchFamily="34" charset="-122"/>
                 <a:cs typeface="Trebuchet MS" pitchFamily="34" charset="-120"/>
               </a:rPr>
-              <a:t>ar</a:t>
+              <a:t>un</a:t>
             </a:r>
             <a:endParaRPr lang="en-US" sz="1300" dirty="0"/>
           </a:p>
@@ -19890,7 +19917,7 @@
                 <a:ea typeface="Calibri" pitchFamily="34" charset="-122"/>
                 <a:cs typeface="Calibri" pitchFamily="34" charset="-120"/>
               </a:rPr>
-              <a:t>to, toward</a:t>
+              <a:t>not, opposite of</a:t>
             </a:r>
             <a:endParaRPr lang="en-US" sz="850" dirty="0"/>
           </a:p>
@@ -19898,46 +19925,7 @@
       </p:sp>
       <p:sp>
         <p:nvSpPr>
-          <p:cNvPr id="19" name="Text 17"/>
-          <p:cNvSpPr/>
-          <p:nvPr/>
-        </p:nvSpPr>
-        <p:spPr>
-          <a:xfrm>
-            <a:off x="2938272" y="2752344"/>
-            <a:ext cx="1828800" cy="182880"/>
-          </a:xfrm>
-          <a:prstGeom prst="rect">
-            <a:avLst/>
-          </a:prstGeom>
-          <a:noFill/>
-          <a:ln/>
-        </p:spPr>
-        <p:txBody>
-          <a:bodyPr wrap="square" lIns="0" tIns="0" rIns="0" bIns="0" rtlCol="0" anchor="t"/>
-          <a:lstStyle/>
-          <a:p>
-            <a:pPr algn="ctr" indent="0" marL="0">
-              <a:buNone/>
-            </a:pPr>
-            <a:r>
-              <a:rPr lang="en-US" sz="700" i="1" dirty="0">
-                <a:solidFill>
-                  <a:srgbClr val="94A3B8"/>
-                </a:solidFill>
-                <a:latin typeface="Calibri" pitchFamily="34" charset="0"/>
-                <a:ea typeface="Calibri" pitchFamily="34" charset="-122"/>
-                <a:cs typeface="Calibri" pitchFamily="34" charset="-120"/>
-              </a:rPr>
-              <a:t>ad → ar before 'r'</a:t>
-            </a:r>
-            <a:endParaRPr lang="en-US" sz="700" dirty="0"/>
-          </a:p>
-        </p:txBody>
-      </p:sp>
-      <p:sp>
-        <p:nvSpPr>
-          <p:cNvPr id="20" name="Shape 18"/>
+          <p:cNvPr id="19" name="Shape 17"/>
           <p:cNvSpPr/>
           <p:nvPr/>
         </p:nvSpPr>
@@ -19971,7 +19959,7 @@
       </p:sp>
       <p:sp>
         <p:nvSpPr>
-          <p:cNvPr id="21" name="Text 19"/>
+          <p:cNvPr id="20" name="Text 18"/>
           <p:cNvSpPr/>
           <p:nvPr/>
         </p:nvSpPr>
@@ -20010,7 +19998,7 @@
       </p:sp>
       <p:sp>
         <p:nvSpPr>
-          <p:cNvPr id="22" name="Text 20"/>
+          <p:cNvPr id="21" name="Text 19"/>
           <p:cNvSpPr/>
           <p:nvPr/>
         </p:nvSpPr>
@@ -20041,7 +20029,7 @@
                 <a:ea typeface="Calibri" pitchFamily="34" charset="-122"/>
                 <a:cs typeface="Calibri" pitchFamily="34" charset="-120"/>
               </a:rPr>
-              <a:t>stop, hold still</a:t>
+              <a:t>be still, stop</a:t>
             </a:r>
             <a:endParaRPr lang="en-US" sz="850" dirty="0"/>
           </a:p>
@@ -20049,7 +20037,7 @@
       </p:sp>
       <p:sp>
         <p:nvSpPr>
-          <p:cNvPr id="23" name="Shape 21"/>
+          <p:cNvPr id="22" name="Shape 20"/>
           <p:cNvSpPr/>
           <p:nvPr/>
         </p:nvSpPr>
@@ -20076,7 +20064,7 @@
       </p:sp>
       <p:sp>
         <p:nvSpPr>
-          <p:cNvPr id="24" name="Text 22"/>
+          <p:cNvPr id="23" name="Text 21"/>
           <p:cNvSpPr/>
           <p:nvPr/>
         </p:nvSpPr>
@@ -20115,7 +20103,7 @@
       </p:sp>
       <p:sp>
         <p:nvSpPr>
-          <p:cNvPr id="25" name="Shape 23"/>
+          <p:cNvPr id="24" name="Shape 22"/>
           <p:cNvSpPr/>
           <p:nvPr/>
         </p:nvSpPr>
@@ -20142,7 +20130,7 @@
       </p:sp>
       <p:sp>
         <p:nvSpPr>
-          <p:cNvPr id="26" name="Shape 24"/>
+          <p:cNvPr id="25" name="Shape 23"/>
           <p:cNvSpPr/>
           <p:nvPr/>
         </p:nvSpPr>
@@ -20169,7 +20157,7 @@
       </p:sp>
       <p:sp>
         <p:nvSpPr>
-          <p:cNvPr id="27" name="Text 25"/>
+          <p:cNvPr id="26" name="Text 24"/>
           <p:cNvSpPr/>
           <p:nvPr/>
         </p:nvSpPr>
@@ -20200,7 +20188,7 @@
                 <a:ea typeface="Trebuchet MS" pitchFamily="34" charset="-122"/>
                 <a:cs typeface="Trebuchet MS" pitchFamily="34" charset="-120"/>
               </a:rPr>
-              <a:t>ar</a:t>
+              <a:t>un</a:t>
             </a:r>
             <a:endParaRPr lang="en-US" sz="1400" dirty="0"/>
           </a:p>
@@ -20208,7 +20196,7 @@
       </p:sp>
       <p:sp>
         <p:nvSpPr>
-          <p:cNvPr id="28" name="Text 26"/>
+          <p:cNvPr id="27" name="Text 25"/>
           <p:cNvSpPr/>
           <p:nvPr/>
         </p:nvSpPr>
@@ -20247,7 +20235,7 @@
       </p:sp>
       <p:sp>
         <p:nvSpPr>
-          <p:cNvPr id="29" name="Shape 27"/>
+          <p:cNvPr id="28" name="Shape 26"/>
           <p:cNvSpPr/>
           <p:nvPr/>
         </p:nvSpPr>
@@ -20274,7 +20262,7 @@
       </p:sp>
       <p:sp>
         <p:nvSpPr>
-          <p:cNvPr id="30" name="Text 28"/>
+          <p:cNvPr id="29" name="Text 27"/>
           <p:cNvSpPr/>
           <p:nvPr/>
         </p:nvSpPr>
@@ -20313,7 +20301,7 @@
       </p:sp>
       <p:sp>
         <p:nvSpPr>
-          <p:cNvPr id="31" name="Shape 29"/>
+          <p:cNvPr id="30" name="Shape 28"/>
           <p:cNvSpPr/>
           <p:nvPr/>
         </p:nvSpPr>
@@ -20340,7 +20328,7 @@
       </p:sp>
       <p:sp>
         <p:nvSpPr>
-          <p:cNvPr id="32" name="Text 30"/>
+          <p:cNvPr id="31" name="Text 29"/>
           <p:cNvSpPr/>
           <p:nvPr/>
         </p:nvSpPr>
@@ -20379,7 +20367,7 @@
       </p:sp>
       <p:sp>
         <p:nvSpPr>
-          <p:cNvPr id="33" name="Shape 31"/>
+          <p:cNvPr id="32" name="Shape 30"/>
           <p:cNvSpPr/>
           <p:nvPr/>
         </p:nvSpPr>
@@ -20406,7 +20394,7 @@
       </p:sp>
       <p:sp>
         <p:nvSpPr>
-          <p:cNvPr id="34" name="Text 32"/>
+          <p:cNvPr id="33" name="Text 31"/>
           <p:cNvSpPr/>
           <p:nvPr/>
         </p:nvSpPr>
@@ -20729,7 +20717,7 @@
                 <a:ea typeface="Calibri" pitchFamily="34" charset="-122"/>
                 <a:cs typeface="Calibri" pitchFamily="34" charset="-120"/>
               </a:rPr>
-              <a:t>Word Labs  •  wordlabs.app  •  Root: 'rest' = stop, pause, remain still</a:t>
+              <a:t>Word Labs  •  wordlabs.app  •  Root: 'rest' = stop, remain, be still</a:t>
             </a:r>
             <a:endParaRPr lang="en-US" sz="800" dirty="0"/>
           </a:p>
@@ -20868,7 +20856,7 @@
                 <a:ea typeface="Trebuchet MS" pitchFamily="34" charset="-122"/>
                 <a:cs typeface="Trebuchet MS" pitchFamily="34" charset="-120"/>
               </a:rPr>
-              <a:t>arrest</a:t>
+              <a:t>unrest</a:t>
             </a:r>
             <a:endParaRPr lang="en-US" sz="2800" dirty="0"/>
           </a:p>
@@ -21007,7 +20995,7 @@
                 <a:ea typeface="Trebuchet MS" pitchFamily="34" charset="-122"/>
                 <a:cs typeface="Trebuchet MS" pitchFamily="34" charset="-120"/>
               </a:rPr>
-              <a:t>ar</a:t>
+              <a:t>un</a:t>
             </a:r>
             <a:endParaRPr lang="en-US" sz="1300" dirty="0"/>
           </a:p>
@@ -21046,7 +21034,7 @@
                 <a:ea typeface="Calibri" pitchFamily="34" charset="-122"/>
                 <a:cs typeface="Calibri" pitchFamily="34" charset="-120"/>
               </a:rPr>
-              <a:t>to, toward</a:t>
+              <a:t>not, opposite of</a:t>
             </a:r>
             <a:endParaRPr lang="en-US" sz="850" dirty="0"/>
           </a:p>
@@ -21054,46 +21042,7 @@
       </p:sp>
       <p:sp>
         <p:nvSpPr>
-          <p:cNvPr id="19" name="Text 17"/>
-          <p:cNvSpPr/>
-          <p:nvPr/>
-        </p:nvSpPr>
-        <p:spPr>
-          <a:xfrm>
-            <a:off x="2938272" y="2752344"/>
-            <a:ext cx="1828800" cy="182880"/>
-          </a:xfrm>
-          <a:prstGeom prst="rect">
-            <a:avLst/>
-          </a:prstGeom>
-          <a:noFill/>
-          <a:ln/>
-        </p:spPr>
-        <p:txBody>
-          <a:bodyPr wrap="square" lIns="0" tIns="0" rIns="0" bIns="0" rtlCol="0" anchor="t"/>
-          <a:lstStyle/>
-          <a:p>
-            <a:pPr algn="ctr" indent="0" marL="0">
-              <a:buNone/>
-            </a:pPr>
-            <a:r>
-              <a:rPr lang="en-US" sz="700" i="1" dirty="0">
-                <a:solidFill>
-                  <a:srgbClr val="94A3B8"/>
-                </a:solidFill>
-                <a:latin typeface="Calibri" pitchFamily="34" charset="0"/>
-                <a:ea typeface="Calibri" pitchFamily="34" charset="-122"/>
-                <a:cs typeface="Calibri" pitchFamily="34" charset="-120"/>
-              </a:rPr>
-              <a:t>ad → ar before 'r'</a:t>
-            </a:r>
-            <a:endParaRPr lang="en-US" sz="700" dirty="0"/>
-          </a:p>
-        </p:txBody>
-      </p:sp>
-      <p:sp>
-        <p:nvSpPr>
-          <p:cNvPr id="20" name="Shape 18"/>
+          <p:cNvPr id="19" name="Shape 17"/>
           <p:cNvSpPr/>
           <p:nvPr/>
         </p:nvSpPr>
@@ -21127,7 +21076,7 @@
       </p:sp>
       <p:sp>
         <p:nvSpPr>
-          <p:cNvPr id="21" name="Text 19"/>
+          <p:cNvPr id="20" name="Text 18"/>
           <p:cNvSpPr/>
           <p:nvPr/>
         </p:nvSpPr>
@@ -21166,7 +21115,7 @@
       </p:sp>
       <p:sp>
         <p:nvSpPr>
-          <p:cNvPr id="22" name="Text 20"/>
+          <p:cNvPr id="21" name="Text 19"/>
           <p:cNvSpPr/>
           <p:nvPr/>
         </p:nvSpPr>
@@ -21197,7 +21146,7 @@
                 <a:ea typeface="Calibri" pitchFamily="34" charset="-122"/>
                 <a:cs typeface="Calibri" pitchFamily="34" charset="-120"/>
               </a:rPr>
-              <a:t>stop, hold still</a:t>
+              <a:t>be still, stop</a:t>
             </a:r>
             <a:endParaRPr lang="en-US" sz="850" dirty="0"/>
           </a:p>
@@ -21205,7 +21154,7 @@
       </p:sp>
       <p:sp>
         <p:nvSpPr>
-          <p:cNvPr id="23" name="Shape 21"/>
+          <p:cNvPr id="22" name="Shape 20"/>
           <p:cNvSpPr/>
           <p:nvPr/>
         </p:nvSpPr>
@@ -21232,7 +21181,7 @@
       </p:sp>
       <p:sp>
         <p:nvSpPr>
-          <p:cNvPr id="24" name="Text 22"/>
+          <p:cNvPr id="23" name="Text 21"/>
           <p:cNvSpPr/>
           <p:nvPr/>
         </p:nvSpPr>
@@ -21271,7 +21220,7 @@
       </p:sp>
       <p:sp>
         <p:nvSpPr>
-          <p:cNvPr id="25" name="Shape 23"/>
+          <p:cNvPr id="24" name="Shape 22"/>
           <p:cNvSpPr/>
           <p:nvPr/>
         </p:nvSpPr>
@@ -21298,7 +21247,7 @@
       </p:sp>
       <p:sp>
         <p:nvSpPr>
-          <p:cNvPr id="26" name="Shape 24"/>
+          <p:cNvPr id="25" name="Shape 23"/>
           <p:cNvSpPr/>
           <p:nvPr/>
         </p:nvSpPr>
@@ -21325,7 +21274,7 @@
       </p:sp>
       <p:sp>
         <p:nvSpPr>
-          <p:cNvPr id="27" name="Text 25"/>
+          <p:cNvPr id="26" name="Text 24"/>
           <p:cNvSpPr/>
           <p:nvPr/>
         </p:nvSpPr>
@@ -21356,7 +21305,7 @@
                 <a:ea typeface="Trebuchet MS" pitchFamily="34" charset="-122"/>
                 <a:cs typeface="Trebuchet MS" pitchFamily="34" charset="-120"/>
               </a:rPr>
-              <a:t>ar</a:t>
+              <a:t>un</a:t>
             </a:r>
             <a:endParaRPr lang="en-US" sz="1400" dirty="0"/>
           </a:p>
@@ -21364,7 +21313,7 @@
       </p:sp>
       <p:sp>
         <p:nvSpPr>
-          <p:cNvPr id="28" name="Text 26"/>
+          <p:cNvPr id="27" name="Text 25"/>
           <p:cNvSpPr/>
           <p:nvPr/>
         </p:nvSpPr>
@@ -21403,7 +21352,7 @@
       </p:sp>
       <p:sp>
         <p:nvSpPr>
-          <p:cNvPr id="29" name="Shape 27"/>
+          <p:cNvPr id="28" name="Shape 26"/>
           <p:cNvSpPr/>
           <p:nvPr/>
         </p:nvSpPr>
@@ -21430,7 +21379,7 @@
       </p:sp>
       <p:sp>
         <p:nvSpPr>
-          <p:cNvPr id="30" name="Text 28"/>
+          <p:cNvPr id="29" name="Text 27"/>
           <p:cNvSpPr/>
           <p:nvPr/>
         </p:nvSpPr>
@@ -21469,7 +21418,7 @@
       </p:sp>
       <p:sp>
         <p:nvSpPr>
-          <p:cNvPr id="31" name="Shape 29"/>
+          <p:cNvPr id="30" name="Shape 28"/>
           <p:cNvSpPr/>
           <p:nvPr/>
         </p:nvSpPr>
@@ -21496,7 +21445,7 @@
       </p:sp>
       <p:sp>
         <p:nvSpPr>
-          <p:cNvPr id="32" name="Text 30"/>
+          <p:cNvPr id="31" name="Text 29"/>
           <p:cNvSpPr/>
           <p:nvPr/>
         </p:nvSpPr>
@@ -21535,7 +21484,7 @@
       </p:sp>
       <p:sp>
         <p:nvSpPr>
-          <p:cNvPr id="33" name="Shape 31"/>
+          <p:cNvPr id="32" name="Shape 30"/>
           <p:cNvSpPr/>
           <p:nvPr/>
         </p:nvSpPr>
@@ -21562,13 +21511,13 @@
       </p:sp>
       <p:sp>
         <p:nvSpPr>
-          <p:cNvPr id="34" name="Shape 32"/>
-          <p:cNvSpPr/>
-          <p:nvPr/>
-        </p:nvSpPr>
-        <p:spPr>
-          <a:xfrm>
-            <a:off x="2427732" y="4169664"/>
+          <p:cNvPr id="33" name="Shape 31"/>
+          <p:cNvSpPr/>
+          <p:nvPr/>
+        </p:nvSpPr>
+        <p:spPr>
+          <a:xfrm>
+            <a:off x="2254649" y="4169664"/>
             <a:ext cx="685800" cy="475488"/>
           </a:xfrm>
           <a:prstGeom prst="rect">
@@ -21589,13 +21538,13 @@
       </p:sp>
       <p:sp>
         <p:nvSpPr>
-          <p:cNvPr id="35" name="Text 33"/>
-          <p:cNvSpPr/>
-          <p:nvPr/>
-        </p:nvSpPr>
-        <p:spPr>
-          <a:xfrm>
-            <a:off x="2427732" y="4169664"/>
+          <p:cNvPr id="34" name="Text 32"/>
+          <p:cNvSpPr/>
+          <p:nvPr/>
+        </p:nvSpPr>
+        <p:spPr>
+          <a:xfrm>
+            <a:off x="2254649" y="4169664"/>
             <a:ext cx="685800" cy="475488"/>
           </a:xfrm>
           <a:prstGeom prst="rect">
@@ -21620,7 +21569,7 @@
                 <a:ea typeface="Trebuchet MS" pitchFamily="34" charset="-122"/>
                 <a:cs typeface="Trebuchet MS" pitchFamily="34" charset="-120"/>
               </a:rPr>
-              <a:t>ar</a:t>
+              <a:t>u</a:t>
             </a:r>
             <a:endParaRPr lang="en-US" sz="900" dirty="0"/>
           </a:p>
@@ -21628,13 +21577,13 @@
       </p:sp>
       <p:sp>
         <p:nvSpPr>
-          <p:cNvPr id="36" name="Shape 34"/>
-          <p:cNvSpPr/>
-          <p:nvPr/>
-        </p:nvSpPr>
-        <p:spPr>
-          <a:xfrm>
-            <a:off x="3639312" y="4169664"/>
+          <p:cNvPr id="35" name="Shape 33"/>
+          <p:cNvSpPr/>
+          <p:nvPr/>
+        </p:nvSpPr>
+        <p:spPr>
+          <a:xfrm>
+            <a:off x="3293146" y="4169664"/>
             <a:ext cx="685800" cy="475488"/>
           </a:xfrm>
           <a:prstGeom prst="rect">
@@ -21655,13 +21604,13 @@
       </p:sp>
       <p:sp>
         <p:nvSpPr>
-          <p:cNvPr id="37" name="Text 35"/>
-          <p:cNvSpPr/>
-          <p:nvPr/>
-        </p:nvSpPr>
-        <p:spPr>
-          <a:xfrm>
-            <a:off x="3639312" y="4169664"/>
+          <p:cNvPr id="36" name="Text 34"/>
+          <p:cNvSpPr/>
+          <p:nvPr/>
+        </p:nvSpPr>
+        <p:spPr>
+          <a:xfrm>
+            <a:off x="3293146" y="4169664"/>
             <a:ext cx="685800" cy="475488"/>
           </a:xfrm>
           <a:prstGeom prst="rect">
@@ -21686,7 +21635,7 @@
                 <a:ea typeface="Trebuchet MS" pitchFamily="34" charset="-122"/>
                 <a:cs typeface="Trebuchet MS" pitchFamily="34" charset="-120"/>
               </a:rPr>
-              <a:t>r</a:t>
+              <a:t>n</a:t>
             </a:r>
             <a:endParaRPr lang="en-US" sz="900" dirty="0"/>
           </a:p>
@@ -21694,13 +21643,13 @@
       </p:sp>
       <p:sp>
         <p:nvSpPr>
-          <p:cNvPr id="38" name="Shape 36"/>
-          <p:cNvSpPr/>
-          <p:nvPr/>
-        </p:nvSpPr>
-        <p:spPr>
-          <a:xfrm>
-            <a:off x="4850892" y="4169664"/>
+          <p:cNvPr id="37" name="Shape 35"/>
+          <p:cNvSpPr/>
+          <p:nvPr/>
+        </p:nvSpPr>
+        <p:spPr>
+          <a:xfrm>
+            <a:off x="4331643" y="4169664"/>
             <a:ext cx="685800" cy="475488"/>
           </a:xfrm>
           <a:prstGeom prst="rect">
@@ -21721,13 +21670,13 @@
       </p:sp>
       <p:sp>
         <p:nvSpPr>
-          <p:cNvPr id="39" name="Text 37"/>
-          <p:cNvSpPr/>
-          <p:nvPr/>
-        </p:nvSpPr>
-        <p:spPr>
-          <a:xfrm>
-            <a:off x="4850892" y="4169664"/>
+          <p:cNvPr id="38" name="Text 36"/>
+          <p:cNvSpPr/>
+          <p:nvPr/>
+        </p:nvSpPr>
+        <p:spPr>
+          <a:xfrm>
+            <a:off x="4331643" y="4169664"/>
             <a:ext cx="685800" cy="475488"/>
           </a:xfrm>
           <a:prstGeom prst="rect">
@@ -21752,7 +21701,7 @@
                 <a:ea typeface="Trebuchet MS" pitchFamily="34" charset="-122"/>
                 <a:cs typeface="Trebuchet MS" pitchFamily="34" charset="-120"/>
               </a:rPr>
-              <a:t>e</a:t>
+              <a:t>r</a:t>
             </a:r>
             <a:endParaRPr lang="en-US" sz="900" dirty="0"/>
           </a:p>
@@ -21760,13 +21709,13 @@
       </p:sp>
       <p:sp>
         <p:nvSpPr>
-          <p:cNvPr id="40" name="Shape 38"/>
-          <p:cNvSpPr/>
-          <p:nvPr/>
-        </p:nvSpPr>
-        <p:spPr>
-          <a:xfrm>
-            <a:off x="6062472" y="4169664"/>
+          <p:cNvPr id="39" name="Shape 37"/>
+          <p:cNvSpPr/>
+          <p:nvPr/>
+        </p:nvSpPr>
+        <p:spPr>
+          <a:xfrm>
+            <a:off x="5370141" y="4169664"/>
             <a:ext cx="685800" cy="475488"/>
           </a:xfrm>
           <a:prstGeom prst="rect">
@@ -21787,13 +21736,13 @@
       </p:sp>
       <p:sp>
         <p:nvSpPr>
-          <p:cNvPr id="41" name="Text 39"/>
-          <p:cNvSpPr/>
-          <p:nvPr/>
-        </p:nvSpPr>
-        <p:spPr>
-          <a:xfrm>
-            <a:off x="6062472" y="4169664"/>
+          <p:cNvPr id="40" name="Text 38"/>
+          <p:cNvSpPr/>
+          <p:nvPr/>
+        </p:nvSpPr>
+        <p:spPr>
+          <a:xfrm>
+            <a:off x="5370141" y="4169664"/>
             <a:ext cx="685800" cy="475488"/>
           </a:xfrm>
           <a:prstGeom prst="rect">
@@ -21818,7 +21767,7 @@
                 <a:ea typeface="Trebuchet MS" pitchFamily="34" charset="-122"/>
                 <a:cs typeface="Trebuchet MS" pitchFamily="34" charset="-120"/>
               </a:rPr>
-              <a:t>s</a:t>
+              <a:t>e</a:t>
             </a:r>
             <a:endParaRPr lang="en-US" sz="900" dirty="0"/>
           </a:p>
@@ -21826,13 +21775,13 @@
       </p:sp>
       <p:sp>
         <p:nvSpPr>
-          <p:cNvPr id="42" name="Shape 40"/>
-          <p:cNvSpPr/>
-          <p:nvPr/>
-        </p:nvSpPr>
-        <p:spPr>
-          <a:xfrm>
-            <a:off x="7274052" y="4169664"/>
+          <p:cNvPr id="41" name="Shape 39"/>
+          <p:cNvSpPr/>
+          <p:nvPr/>
+        </p:nvSpPr>
+        <p:spPr>
+          <a:xfrm>
+            <a:off x="6408638" y="4169664"/>
             <a:ext cx="685800" cy="475488"/>
           </a:xfrm>
           <a:prstGeom prst="rect">
@@ -21853,13 +21802,79 @@
       </p:sp>
       <p:sp>
         <p:nvSpPr>
-          <p:cNvPr id="43" name="Text 41"/>
-          <p:cNvSpPr/>
-          <p:nvPr/>
-        </p:nvSpPr>
-        <p:spPr>
-          <a:xfrm>
-            <a:off x="7274052" y="4169664"/>
+          <p:cNvPr id="42" name="Text 40"/>
+          <p:cNvSpPr/>
+          <p:nvPr/>
+        </p:nvSpPr>
+        <p:spPr>
+          <a:xfrm>
+            <a:off x="6408638" y="4169664"/>
+            <a:ext cx="685800" cy="475488"/>
+          </a:xfrm>
+          <a:prstGeom prst="rect">
+            <a:avLst/>
+          </a:prstGeom>
+          <a:noFill/>
+          <a:ln/>
+        </p:spPr>
+        <p:txBody>
+          <a:bodyPr wrap="square" lIns="0" tIns="0" rIns="0" bIns="0" rtlCol="0" anchor="ctr"/>
+          <a:lstStyle/>
+          <a:p>
+            <a:pPr algn="ctr" indent="0" marL="0">
+              <a:buNone/>
+            </a:pPr>
+            <a:r>
+              <a:rPr lang="en-US" sz="900" b="1" dirty="0">
+                <a:solidFill>
+                  <a:srgbClr val="9D174D"/>
+                </a:solidFill>
+                <a:latin typeface="Trebuchet MS" pitchFamily="34" charset="0"/>
+                <a:ea typeface="Trebuchet MS" pitchFamily="34" charset="-122"/>
+                <a:cs typeface="Trebuchet MS" pitchFamily="34" charset="-120"/>
+              </a:rPr>
+              <a:t>s</a:t>
+            </a:r>
+            <a:endParaRPr lang="en-US" sz="900" dirty="0"/>
+          </a:p>
+        </p:txBody>
+      </p:sp>
+      <p:sp>
+        <p:nvSpPr>
+          <p:cNvPr id="43" name="Shape 41"/>
+          <p:cNvSpPr/>
+          <p:nvPr/>
+        </p:nvSpPr>
+        <p:spPr>
+          <a:xfrm>
+            <a:off x="7447135" y="4169664"/>
+            <a:ext cx="685800" cy="475488"/>
+          </a:xfrm>
+          <a:prstGeom prst="rect">
+            <a:avLst>
+              <a:gd name="adj" fmla="val 7692"/>
+            </a:avLst>
+          </a:prstGeom>
+          <a:solidFill>
+            <a:srgbClr val="FFFFFF"/>
+          </a:solidFill>
+          <a:ln w="12700">
+            <a:solidFill>
+              <a:srgbClr val="DB2777"/>
+            </a:solidFill>
+            <a:prstDash val="solid"/>
+          </a:ln>
+        </p:spPr>
+      </p:sp>
+      <p:sp>
+        <p:nvSpPr>
+          <p:cNvPr id="44" name="Text 42"/>
+          <p:cNvSpPr/>
+          <p:nvPr/>
+        </p:nvSpPr>
+        <p:spPr>
+          <a:xfrm>
+            <a:off x="7447135" y="4169664"/>
             <a:ext cx="685800" cy="475488"/>
           </a:xfrm>
           <a:prstGeom prst="rect">
@@ -22176,7 +22191,7 @@
                 <a:ea typeface="Calibri" pitchFamily="34" charset="-122"/>
                 <a:cs typeface="Calibri" pitchFamily="34" charset="-120"/>
               </a:rPr>
-              <a:t>Word Labs  •  wordlabs.app  •  Root: 'rest' = stop, pause, remain still</a:t>
+              <a:t>Word Labs  •  wordlabs.app  •  Root: 'rest' = stop, remain, be still</a:t>
             </a:r>
             <a:endParaRPr lang="en-US" sz="800" dirty="0"/>
           </a:p>
@@ -22315,7 +22330,7 @@
                 <a:ea typeface="Trebuchet MS" pitchFamily="34" charset="-122"/>
                 <a:cs typeface="Trebuchet MS" pitchFamily="34" charset="-120"/>
               </a:rPr>
-              <a:t>restless</a:t>
+              <a:t>interesting</a:t>
             </a:r>
             <a:endParaRPr lang="en-US" sz="2800" dirty="0"/>
           </a:p>
@@ -23003,7 +23018,7 @@
                 <a:ea typeface="Calibri" pitchFamily="34" charset="-122"/>
                 <a:cs typeface="Calibri" pitchFamily="34" charset="-120"/>
               </a:rPr>
-              <a:t>Word Labs  •  wordlabs.app  •  Root: 'rest' = stop, pause, remain still</a:t>
+              <a:t>Word Labs  •  wordlabs.app  •  Root: 'rest' = stop, remain, be still</a:t>
             </a:r>
             <a:endParaRPr lang="en-US" sz="800" dirty="0"/>
           </a:p>
@@ -23142,7 +23157,7 @@
                 <a:ea typeface="Trebuchet MS" pitchFamily="34" charset="-122"/>
                 <a:cs typeface="Trebuchet MS" pitchFamily="34" charset="-120"/>
               </a:rPr>
-              <a:t>restless</a:t>
+              <a:t>interesting</a:t>
             </a:r>
             <a:endParaRPr lang="en-US" sz="2800" dirty="0"/>
           </a:p>
@@ -23222,7 +23237,7 @@
         </p:nvSpPr>
         <p:spPr>
           <a:xfrm>
-            <a:off x="2938272" y="2258568"/>
+            <a:off x="2221992" y="2258568"/>
             <a:ext cx="1828800" cy="292608"/>
           </a:xfrm>
           <a:prstGeom prst="rect">
@@ -23231,11 +23246,11 @@
             </a:avLst>
           </a:prstGeom>
           <a:solidFill>
-            <a:srgbClr val="CCFBF1"/>
+            <a:srgbClr val="DDD6FE"/>
           </a:solidFill>
           <a:ln w="19050">
             <a:solidFill>
-              <a:srgbClr val="0D9488"/>
+              <a:srgbClr val="7C3AED"/>
             </a:solidFill>
             <a:prstDash val="solid"/>
           </a:ln>
@@ -23256,7 +23271,7 @@
         </p:nvSpPr>
         <p:spPr>
           <a:xfrm>
-            <a:off x="2938272" y="2258568"/>
+            <a:off x="2221992" y="2258568"/>
             <a:ext cx="1828800" cy="292608"/>
           </a:xfrm>
           <a:prstGeom prst="rect">
@@ -23275,13 +23290,13 @@
             <a:r>
               <a:rPr lang="en-US" sz="1300" b="1" dirty="0">
                 <a:solidFill>
-                  <a:srgbClr val="0F766E"/>
+                  <a:srgbClr val="4C1D95"/>
                 </a:solidFill>
                 <a:latin typeface="Trebuchet MS" pitchFamily="34" charset="0"/>
                 <a:ea typeface="Trebuchet MS" pitchFamily="34" charset="-122"/>
                 <a:cs typeface="Trebuchet MS" pitchFamily="34" charset="-120"/>
               </a:rPr>
-              <a:t>rest</a:t>
+              <a:t>inter</a:t>
             </a:r>
             <a:endParaRPr lang="en-US" sz="1300" dirty="0"/>
           </a:p>
@@ -23295,7 +23310,7 @@
         </p:nvSpPr>
         <p:spPr>
           <a:xfrm>
-            <a:off x="2938272" y="2569464"/>
+            <a:off x="2221992" y="2569464"/>
             <a:ext cx="1828800" cy="201168"/>
           </a:xfrm>
           <a:prstGeom prst="rect">
@@ -23320,7 +23335,7 @@
                 <a:ea typeface="Calibri" pitchFamily="34" charset="-122"/>
                 <a:cs typeface="Calibri" pitchFamily="34" charset="-120"/>
               </a:rPr>
-              <a:t>stop, be still</a:t>
+              <a:t>between, among</a:t>
             </a:r>
             <a:endParaRPr lang="en-US" sz="850" dirty="0"/>
           </a:p>
@@ -23334,7 +23349,7 @@
         </p:nvSpPr>
         <p:spPr>
           <a:xfrm>
-            <a:off x="5803392" y="2258568"/>
+            <a:off x="4370832" y="2258568"/>
             <a:ext cx="1828800" cy="292608"/>
           </a:xfrm>
           <a:prstGeom prst="rect">
@@ -23343,11 +23358,11 @@
             </a:avLst>
           </a:prstGeom>
           <a:solidFill>
-            <a:srgbClr val="DDD6FE"/>
+            <a:srgbClr val="CCFBF1"/>
           </a:solidFill>
           <a:ln w="19050">
             <a:solidFill>
-              <a:srgbClr val="7C3AED"/>
+              <a:srgbClr val="0D9488"/>
             </a:solidFill>
             <a:prstDash val="solid"/>
           </a:ln>
@@ -23368,7 +23383,7 @@
         </p:nvSpPr>
         <p:spPr>
           <a:xfrm>
-            <a:off x="5803392" y="2258568"/>
+            <a:off x="4370832" y="2258568"/>
             <a:ext cx="1828800" cy="292608"/>
           </a:xfrm>
           <a:prstGeom prst="rect">
@@ -23387,13 +23402,13 @@
             <a:r>
               <a:rPr lang="en-US" sz="1300" b="1" dirty="0">
                 <a:solidFill>
-                  <a:srgbClr val="4C1D95"/>
+                  <a:srgbClr val="0F766E"/>
                 </a:solidFill>
                 <a:latin typeface="Trebuchet MS" pitchFamily="34" charset="0"/>
                 <a:ea typeface="Trebuchet MS" pitchFamily="34" charset="-122"/>
                 <a:cs typeface="Trebuchet MS" pitchFamily="34" charset="-120"/>
               </a:rPr>
-              <a:t>less</a:t>
+              <a:t>rest</a:t>
             </a:r>
             <a:endParaRPr lang="en-US" sz="1300" dirty="0"/>
           </a:p>
@@ -23407,7 +23422,7 @@
         </p:nvSpPr>
         <p:spPr>
           <a:xfrm>
-            <a:off x="5803392" y="2569464"/>
+            <a:off x="4370832" y="2569464"/>
             <a:ext cx="1828800" cy="201168"/>
           </a:xfrm>
           <a:prstGeom prst="rect">
@@ -23432,7 +23447,7 @@
                 <a:ea typeface="Calibri" pitchFamily="34" charset="-122"/>
                 <a:cs typeface="Calibri" pitchFamily="34" charset="-120"/>
               </a:rPr>
-              <a:t>without</a:t>
+              <a:t>remain, stop</a:t>
             </a:r>
             <a:endParaRPr lang="en-US" sz="850" dirty="0"/>
           </a:p>
@@ -23441,6 +23456,118 @@
       <p:sp>
         <p:nvSpPr>
           <p:cNvPr id="22" name="Shape 20"/>
+          <p:cNvSpPr/>
+          <p:nvPr/>
+        </p:nvSpPr>
+        <p:spPr>
+          <a:xfrm>
+            <a:off x="6519672" y="2258568"/>
+            <a:ext cx="1828800" cy="292608"/>
+          </a:xfrm>
+          <a:prstGeom prst="rect">
+            <a:avLst>
+              <a:gd name="adj" fmla="val 25000"/>
+            </a:avLst>
+          </a:prstGeom>
+          <a:solidFill>
+            <a:srgbClr val="FCE7F3"/>
+          </a:solidFill>
+          <a:ln w="19050">
+            <a:solidFill>
+              <a:srgbClr val="DB2777"/>
+            </a:solidFill>
+            <a:prstDash val="solid"/>
+          </a:ln>
+          <a:effectLst>
+            <a:outerShdw sx="100000" sy="100000" kx="0" ky="0" algn="bl" rotWithShape="0" blurRad="101600" dist="38100" dir="8100000">
+              <a:srgbClr val="000000">
+                <a:alpha val="12000"/>
+              </a:srgbClr>
+            </a:outerShdw>
+          </a:effectLst>
+        </p:spPr>
+      </p:sp>
+      <p:sp>
+        <p:nvSpPr>
+          <p:cNvPr id="23" name="Text 21"/>
+          <p:cNvSpPr/>
+          <p:nvPr/>
+        </p:nvSpPr>
+        <p:spPr>
+          <a:xfrm>
+            <a:off x="6519672" y="2258568"/>
+            <a:ext cx="1828800" cy="292608"/>
+          </a:xfrm>
+          <a:prstGeom prst="rect">
+            <a:avLst/>
+          </a:prstGeom>
+          <a:noFill/>
+          <a:ln/>
+        </p:spPr>
+        <p:txBody>
+          <a:bodyPr wrap="square" lIns="0" tIns="0" rIns="0" bIns="0" rtlCol="0" anchor="ctr"/>
+          <a:lstStyle/>
+          <a:p>
+            <a:pPr algn="ctr" indent="0" marL="0">
+              <a:buNone/>
+            </a:pPr>
+            <a:r>
+              <a:rPr lang="en-US" sz="1300" b="1" dirty="0">
+                <a:solidFill>
+                  <a:srgbClr val="9D174D"/>
+                </a:solidFill>
+                <a:latin typeface="Trebuchet MS" pitchFamily="34" charset="0"/>
+                <a:ea typeface="Trebuchet MS" pitchFamily="34" charset="-122"/>
+                <a:cs typeface="Trebuchet MS" pitchFamily="34" charset="-120"/>
+              </a:rPr>
+              <a:t>ing</a:t>
+            </a:r>
+            <a:endParaRPr lang="en-US" sz="1300" dirty="0"/>
+          </a:p>
+        </p:txBody>
+      </p:sp>
+      <p:sp>
+        <p:nvSpPr>
+          <p:cNvPr id="24" name="Text 22"/>
+          <p:cNvSpPr/>
+          <p:nvPr/>
+        </p:nvSpPr>
+        <p:spPr>
+          <a:xfrm>
+            <a:off x="6519672" y="2569464"/>
+            <a:ext cx="1828800" cy="201168"/>
+          </a:xfrm>
+          <a:prstGeom prst="rect">
+            <a:avLst/>
+          </a:prstGeom>
+          <a:noFill/>
+          <a:ln/>
+        </p:spPr>
+        <p:txBody>
+          <a:bodyPr wrap="square" lIns="0" tIns="0" rIns="0" bIns="0" rtlCol="0" anchor="t"/>
+          <a:lstStyle/>
+          <a:p>
+            <a:pPr algn="ctr" indent="0" marL="0">
+              <a:buNone/>
+            </a:pPr>
+            <a:r>
+              <a:rPr lang="en-US" sz="850" dirty="0">
+                <a:solidFill>
+                  <a:srgbClr val="475569"/>
+                </a:solidFill>
+                <a:latin typeface="Calibri" pitchFamily="34" charset="0"/>
+                <a:ea typeface="Calibri" pitchFamily="34" charset="-122"/>
+                <a:cs typeface="Calibri" pitchFamily="34" charset="-120"/>
+              </a:rPr>
+              <a:t>action, state of</a:t>
+            </a:r>
+            <a:endParaRPr lang="en-US" sz="850" dirty="0"/>
+          </a:p>
+        </p:txBody>
+      </p:sp>
+      <p:sp>
+        <p:nvSpPr>
+          <p:cNvPr id="25" name="Shape 23"/>
           <p:cNvSpPr/>
           <p:nvPr/>
         </p:nvSpPr>
@@ -23467,7 +23594,7 @@
       </p:sp>
       <p:sp>
         <p:nvSpPr>
-          <p:cNvPr id="23" name="Text 21"/>
+          <p:cNvPr id="26" name="Text 24"/>
           <p:cNvSpPr/>
           <p:nvPr/>
         </p:nvSpPr>
@@ -23506,7 +23633,7 @@
       </p:sp>
       <p:sp>
         <p:nvSpPr>
-          <p:cNvPr id="24" name="Shape 22"/>
+          <p:cNvPr id="27" name="Shape 25"/>
           <p:cNvSpPr/>
           <p:nvPr/>
         </p:nvSpPr>
@@ -23533,7 +23660,7 @@
       </p:sp>
       <p:sp>
         <p:nvSpPr>
-          <p:cNvPr id="25" name="Text 23"/>
+          <p:cNvPr id="28" name="Text 26"/>
           <p:cNvSpPr/>
           <p:nvPr/>
         </p:nvSpPr>
@@ -23572,7 +23699,7 @@
       </p:sp>
       <p:sp>
         <p:nvSpPr>
-          <p:cNvPr id="26" name="Shape 24"/>
+          <p:cNvPr id="29" name="Shape 27"/>
           <p:cNvSpPr/>
           <p:nvPr/>
         </p:nvSpPr>
@@ -23599,7 +23726,7 @@
       </p:sp>
       <p:sp>
         <p:nvSpPr>
-          <p:cNvPr id="27" name="Text 25"/>
+          <p:cNvPr id="30" name="Text 28"/>
           <p:cNvSpPr/>
           <p:nvPr/>
         </p:nvSpPr>
@@ -23638,7 +23765,7 @@
       </p:sp>
       <p:sp>
         <p:nvSpPr>
-          <p:cNvPr id="28" name="Shape 26"/>
+          <p:cNvPr id="31" name="Shape 29"/>
           <p:cNvSpPr/>
           <p:nvPr/>
         </p:nvSpPr>
@@ -23665,7 +23792,7 @@
       </p:sp>
       <p:sp>
         <p:nvSpPr>
-          <p:cNvPr id="29" name="Text 27"/>
+          <p:cNvPr id="32" name="Text 30"/>
           <p:cNvSpPr/>
           <p:nvPr/>
         </p:nvSpPr>
@@ -23988,7 +24115,7 @@
                 <a:ea typeface="Calibri" pitchFamily="34" charset="-122"/>
                 <a:cs typeface="Calibri" pitchFamily="34" charset="-120"/>
               </a:rPr>
-              <a:t>Word Labs  •  wordlabs.app  •  Root: 'rest' = stop, pause, remain still</a:t>
+              <a:t>Word Labs  •  wordlabs.app  •  Root: 'rest' = stop, remain, be still</a:t>
             </a:r>
             <a:endParaRPr lang="en-US" sz="800" dirty="0"/>
           </a:p>
@@ -24061,7 +24188,7 @@
                 <a:ea typeface="Trebuchet MS" pitchFamily="34" charset="-122"/>
                 <a:cs typeface="Trebuchet MS" pitchFamily="34" charset="-120"/>
               </a:rPr>
-              <a:t>We are learning that the root 'rest' means 'stop, pause, remain still'.</a:t>
+              <a:t>We are learning that the root 'rest' means 'stop, remain, be still'.</a:t>
             </a:r>
             <a:endParaRPr lang="en-US" sz="2000" dirty="0"/>
           </a:p>
@@ -24707,7 +24834,7 @@
                 <a:ea typeface="Calibri" pitchFamily="34" charset="-122"/>
                 <a:cs typeface="Calibri" pitchFamily="34" charset="-120"/>
               </a:rPr>
-              <a:t>Word Labs  •  wordlabs.app  •  Root: 'rest' = stop, pause, remain still</a:t>
+              <a:t>Word Labs  •  wordlabs.app  •  Root: 'rest' = stop, remain, be still</a:t>
             </a:r>
             <a:endParaRPr lang="en-US" sz="800" dirty="0"/>
           </a:p>
@@ -24846,7 +24973,7 @@
                 <a:ea typeface="Trebuchet MS" pitchFamily="34" charset="-122"/>
                 <a:cs typeface="Trebuchet MS" pitchFamily="34" charset="-120"/>
               </a:rPr>
-              <a:t>restless</a:t>
+              <a:t>interesting</a:t>
             </a:r>
             <a:endParaRPr lang="en-US" sz="2800" dirty="0"/>
           </a:p>
@@ -24926,7 +25053,7 @@
         </p:nvSpPr>
         <p:spPr>
           <a:xfrm>
-            <a:off x="2938272" y="2258568"/>
+            <a:off x="2221992" y="2258568"/>
             <a:ext cx="1828800" cy="292608"/>
           </a:xfrm>
           <a:prstGeom prst="rect">
@@ -24935,11 +25062,11 @@
             </a:avLst>
           </a:prstGeom>
           <a:solidFill>
-            <a:srgbClr val="CCFBF1"/>
+            <a:srgbClr val="DDD6FE"/>
           </a:solidFill>
           <a:ln w="19050">
             <a:solidFill>
-              <a:srgbClr val="0D9488"/>
+              <a:srgbClr val="7C3AED"/>
             </a:solidFill>
             <a:prstDash val="solid"/>
           </a:ln>
@@ -24960,7 +25087,7 @@
         </p:nvSpPr>
         <p:spPr>
           <a:xfrm>
-            <a:off x="2938272" y="2258568"/>
+            <a:off x="2221992" y="2258568"/>
             <a:ext cx="1828800" cy="292608"/>
           </a:xfrm>
           <a:prstGeom prst="rect">
@@ -24979,13 +25106,13 @@
             <a:r>
               <a:rPr lang="en-US" sz="1300" b="1" dirty="0">
                 <a:solidFill>
-                  <a:srgbClr val="0F766E"/>
+                  <a:srgbClr val="4C1D95"/>
                 </a:solidFill>
                 <a:latin typeface="Trebuchet MS" pitchFamily="34" charset="0"/>
                 <a:ea typeface="Trebuchet MS" pitchFamily="34" charset="-122"/>
                 <a:cs typeface="Trebuchet MS" pitchFamily="34" charset="-120"/>
               </a:rPr>
-              <a:t>rest</a:t>
+              <a:t>inter</a:t>
             </a:r>
             <a:endParaRPr lang="en-US" sz="1300" dirty="0"/>
           </a:p>
@@ -24999,7 +25126,7 @@
         </p:nvSpPr>
         <p:spPr>
           <a:xfrm>
-            <a:off x="2938272" y="2569464"/>
+            <a:off x="2221992" y="2569464"/>
             <a:ext cx="1828800" cy="201168"/>
           </a:xfrm>
           <a:prstGeom prst="rect">
@@ -25024,7 +25151,7 @@
                 <a:ea typeface="Calibri" pitchFamily="34" charset="-122"/>
                 <a:cs typeface="Calibri" pitchFamily="34" charset="-120"/>
               </a:rPr>
-              <a:t>stop, be still</a:t>
+              <a:t>between, among</a:t>
             </a:r>
             <a:endParaRPr lang="en-US" sz="850" dirty="0"/>
           </a:p>
@@ -25038,7 +25165,7 @@
         </p:nvSpPr>
         <p:spPr>
           <a:xfrm>
-            <a:off x="5803392" y="2258568"/>
+            <a:off x="4370832" y="2258568"/>
             <a:ext cx="1828800" cy="292608"/>
           </a:xfrm>
           <a:prstGeom prst="rect">
@@ -25047,11 +25174,11 @@
             </a:avLst>
           </a:prstGeom>
           <a:solidFill>
-            <a:srgbClr val="DDD6FE"/>
+            <a:srgbClr val="CCFBF1"/>
           </a:solidFill>
           <a:ln w="19050">
             <a:solidFill>
-              <a:srgbClr val="7C3AED"/>
+              <a:srgbClr val="0D9488"/>
             </a:solidFill>
             <a:prstDash val="solid"/>
           </a:ln>
@@ -25072,7 +25199,7 @@
         </p:nvSpPr>
         <p:spPr>
           <a:xfrm>
-            <a:off x="5803392" y="2258568"/>
+            <a:off x="4370832" y="2258568"/>
             <a:ext cx="1828800" cy="292608"/>
           </a:xfrm>
           <a:prstGeom prst="rect">
@@ -25091,13 +25218,13 @@
             <a:r>
               <a:rPr lang="en-US" sz="1300" b="1" dirty="0">
                 <a:solidFill>
-                  <a:srgbClr val="4C1D95"/>
+                  <a:srgbClr val="0F766E"/>
                 </a:solidFill>
                 <a:latin typeface="Trebuchet MS" pitchFamily="34" charset="0"/>
                 <a:ea typeface="Trebuchet MS" pitchFamily="34" charset="-122"/>
                 <a:cs typeface="Trebuchet MS" pitchFamily="34" charset="-120"/>
               </a:rPr>
-              <a:t>less</a:t>
+              <a:t>rest</a:t>
             </a:r>
             <a:endParaRPr lang="en-US" sz="1300" dirty="0"/>
           </a:p>
@@ -25111,7 +25238,7 @@
         </p:nvSpPr>
         <p:spPr>
           <a:xfrm>
-            <a:off x="5803392" y="2569464"/>
+            <a:off x="4370832" y="2569464"/>
             <a:ext cx="1828800" cy="201168"/>
           </a:xfrm>
           <a:prstGeom prst="rect">
@@ -25136,7 +25263,7 @@
                 <a:ea typeface="Calibri" pitchFamily="34" charset="-122"/>
                 <a:cs typeface="Calibri" pitchFamily="34" charset="-120"/>
               </a:rPr>
-              <a:t>without</a:t>
+              <a:t>remain, stop</a:t>
             </a:r>
             <a:endParaRPr lang="en-US" sz="850" dirty="0"/>
           </a:p>
@@ -25145,6 +25272,118 @@
       <p:sp>
         <p:nvSpPr>
           <p:cNvPr id="22" name="Shape 20"/>
+          <p:cNvSpPr/>
+          <p:nvPr/>
+        </p:nvSpPr>
+        <p:spPr>
+          <a:xfrm>
+            <a:off x="6519672" y="2258568"/>
+            <a:ext cx="1828800" cy="292608"/>
+          </a:xfrm>
+          <a:prstGeom prst="rect">
+            <a:avLst>
+              <a:gd name="adj" fmla="val 25000"/>
+            </a:avLst>
+          </a:prstGeom>
+          <a:solidFill>
+            <a:srgbClr val="FCE7F3"/>
+          </a:solidFill>
+          <a:ln w="19050">
+            <a:solidFill>
+              <a:srgbClr val="DB2777"/>
+            </a:solidFill>
+            <a:prstDash val="solid"/>
+          </a:ln>
+          <a:effectLst>
+            <a:outerShdw sx="100000" sy="100000" kx="0" ky="0" algn="bl" rotWithShape="0" blurRad="101600" dist="38100" dir="8100000">
+              <a:srgbClr val="000000">
+                <a:alpha val="12000"/>
+              </a:srgbClr>
+            </a:outerShdw>
+          </a:effectLst>
+        </p:spPr>
+      </p:sp>
+      <p:sp>
+        <p:nvSpPr>
+          <p:cNvPr id="23" name="Text 21"/>
+          <p:cNvSpPr/>
+          <p:nvPr/>
+        </p:nvSpPr>
+        <p:spPr>
+          <a:xfrm>
+            <a:off x="6519672" y="2258568"/>
+            <a:ext cx="1828800" cy="292608"/>
+          </a:xfrm>
+          <a:prstGeom prst="rect">
+            <a:avLst/>
+          </a:prstGeom>
+          <a:noFill/>
+          <a:ln/>
+        </p:spPr>
+        <p:txBody>
+          <a:bodyPr wrap="square" lIns="0" tIns="0" rIns="0" bIns="0" rtlCol="0" anchor="ctr"/>
+          <a:lstStyle/>
+          <a:p>
+            <a:pPr algn="ctr" indent="0" marL="0">
+              <a:buNone/>
+            </a:pPr>
+            <a:r>
+              <a:rPr lang="en-US" sz="1300" b="1" dirty="0">
+                <a:solidFill>
+                  <a:srgbClr val="9D174D"/>
+                </a:solidFill>
+                <a:latin typeface="Trebuchet MS" pitchFamily="34" charset="0"/>
+                <a:ea typeface="Trebuchet MS" pitchFamily="34" charset="-122"/>
+                <a:cs typeface="Trebuchet MS" pitchFamily="34" charset="-120"/>
+              </a:rPr>
+              <a:t>ing</a:t>
+            </a:r>
+            <a:endParaRPr lang="en-US" sz="1300" dirty="0"/>
+          </a:p>
+        </p:txBody>
+      </p:sp>
+      <p:sp>
+        <p:nvSpPr>
+          <p:cNvPr id="24" name="Text 22"/>
+          <p:cNvSpPr/>
+          <p:nvPr/>
+        </p:nvSpPr>
+        <p:spPr>
+          <a:xfrm>
+            <a:off x="6519672" y="2569464"/>
+            <a:ext cx="1828800" cy="201168"/>
+          </a:xfrm>
+          <a:prstGeom prst="rect">
+            <a:avLst/>
+          </a:prstGeom>
+          <a:noFill/>
+          <a:ln/>
+        </p:spPr>
+        <p:txBody>
+          <a:bodyPr wrap="square" lIns="0" tIns="0" rIns="0" bIns="0" rtlCol="0" anchor="t"/>
+          <a:lstStyle/>
+          <a:p>
+            <a:pPr algn="ctr" indent="0" marL="0">
+              <a:buNone/>
+            </a:pPr>
+            <a:r>
+              <a:rPr lang="en-US" sz="850" dirty="0">
+                <a:solidFill>
+                  <a:srgbClr val="475569"/>
+                </a:solidFill>
+                <a:latin typeface="Calibri" pitchFamily="34" charset="0"/>
+                <a:ea typeface="Calibri" pitchFamily="34" charset="-122"/>
+                <a:cs typeface="Calibri" pitchFamily="34" charset="-120"/>
+              </a:rPr>
+              <a:t>action, state of</a:t>
+            </a:r>
+            <a:endParaRPr lang="en-US" sz="850" dirty="0"/>
+          </a:p>
+        </p:txBody>
+      </p:sp>
+      <p:sp>
+        <p:nvSpPr>
+          <p:cNvPr id="25" name="Shape 23"/>
           <p:cNvSpPr/>
           <p:nvPr/>
         </p:nvSpPr>
@@ -25171,7 +25410,7 @@
       </p:sp>
       <p:sp>
         <p:nvSpPr>
-          <p:cNvPr id="23" name="Text 21"/>
+          <p:cNvPr id="26" name="Text 24"/>
           <p:cNvSpPr/>
           <p:nvPr/>
         </p:nvSpPr>
@@ -25210,7 +25449,7 @@
       </p:sp>
       <p:sp>
         <p:nvSpPr>
-          <p:cNvPr id="24" name="Shape 22"/>
+          <p:cNvPr id="27" name="Shape 25"/>
           <p:cNvSpPr/>
           <p:nvPr/>
         </p:nvSpPr>
@@ -25237,14 +25476,14 @@
       </p:sp>
       <p:sp>
         <p:nvSpPr>
-          <p:cNvPr id="25" name="Shape 23"/>
-          <p:cNvSpPr/>
-          <p:nvPr/>
-        </p:nvSpPr>
-        <p:spPr>
-          <a:xfrm>
-            <a:off x="2999232" y="3364992"/>
-            <a:ext cx="1645920" cy="475488"/>
+          <p:cNvPr id="28" name="Shape 26"/>
+          <p:cNvSpPr/>
+          <p:nvPr/>
+        </p:nvSpPr>
+        <p:spPr>
+          <a:xfrm>
+            <a:off x="1975104" y="3364992"/>
+            <a:ext cx="1554480" cy="475488"/>
           </a:xfrm>
           <a:prstGeom prst="rect">
             <a:avLst>
@@ -25264,14 +25503,14 @@
       </p:sp>
       <p:sp>
         <p:nvSpPr>
-          <p:cNvPr id="26" name="Text 24"/>
-          <p:cNvSpPr/>
-          <p:nvPr/>
-        </p:nvSpPr>
-        <p:spPr>
-          <a:xfrm>
-            <a:off x="2999232" y="3364992"/>
-            <a:ext cx="1645920" cy="475488"/>
+          <p:cNvPr id="29" name="Text 27"/>
+          <p:cNvSpPr/>
+          <p:nvPr/>
+        </p:nvSpPr>
+        <p:spPr>
+          <a:xfrm>
+            <a:off x="1975104" y="3364992"/>
+            <a:ext cx="1554480" cy="475488"/>
           </a:xfrm>
           <a:prstGeom prst="rect">
             <a:avLst/>
@@ -25295,7 +25534,7 @@
                 <a:ea typeface="Trebuchet MS" pitchFamily="34" charset="-122"/>
                 <a:cs typeface="Trebuchet MS" pitchFamily="34" charset="-120"/>
               </a:rPr>
-              <a:t>rest</a:t>
+              <a:t>in</a:t>
             </a:r>
             <a:endParaRPr lang="en-US" sz="1400" dirty="0"/>
           </a:p>
@@ -25303,14 +25542,14 @@
       </p:sp>
       <p:sp>
         <p:nvSpPr>
-          <p:cNvPr id="27" name="Text 25"/>
-          <p:cNvSpPr/>
-          <p:nvPr/>
-        </p:nvSpPr>
-        <p:spPr>
-          <a:xfrm>
-            <a:off x="4645152" y="3364992"/>
-            <a:ext cx="1097280" cy="475488"/>
+          <p:cNvPr id="30" name="Text 28"/>
+          <p:cNvSpPr/>
+          <p:nvPr/>
+        </p:nvSpPr>
+        <p:spPr>
+          <a:xfrm>
+            <a:off x="3529584" y="3364992"/>
+            <a:ext cx="73152" cy="475488"/>
           </a:xfrm>
           <a:prstGeom prst="rect">
             <a:avLst/>
@@ -25342,14 +25581,14 @@
       </p:sp>
       <p:sp>
         <p:nvSpPr>
-          <p:cNvPr id="28" name="Shape 26"/>
-          <p:cNvSpPr/>
-          <p:nvPr/>
-        </p:nvSpPr>
-        <p:spPr>
-          <a:xfrm>
-            <a:off x="5742432" y="3364992"/>
-            <a:ext cx="1645920" cy="475488"/>
+          <p:cNvPr id="31" name="Shape 29"/>
+          <p:cNvSpPr/>
+          <p:nvPr/>
+        </p:nvSpPr>
+        <p:spPr>
+          <a:xfrm>
+            <a:off x="3602736" y="3364992"/>
+            <a:ext cx="1554480" cy="475488"/>
           </a:xfrm>
           <a:prstGeom prst="rect">
             <a:avLst>
@@ -25369,14 +25608,14 @@
       </p:sp>
       <p:sp>
         <p:nvSpPr>
-          <p:cNvPr id="29" name="Text 27"/>
-          <p:cNvSpPr/>
-          <p:nvPr/>
-        </p:nvSpPr>
-        <p:spPr>
-          <a:xfrm>
-            <a:off x="5742432" y="3364992"/>
-            <a:ext cx="1645920" cy="475488"/>
+          <p:cNvPr id="32" name="Text 30"/>
+          <p:cNvSpPr/>
+          <p:nvPr/>
+        </p:nvSpPr>
+        <p:spPr>
+          <a:xfrm>
+            <a:off x="3602736" y="3364992"/>
+            <a:ext cx="1554480" cy="475488"/>
           </a:xfrm>
           <a:prstGeom prst="rect">
             <a:avLst/>
@@ -25400,7 +25639,7 @@
                 <a:ea typeface="Trebuchet MS" pitchFamily="34" charset="-122"/>
                 <a:cs typeface="Trebuchet MS" pitchFamily="34" charset="-120"/>
               </a:rPr>
-              <a:t>less</a:t>
+              <a:t>ter</a:t>
             </a:r>
             <a:endParaRPr lang="en-US" sz="1400" dirty="0"/>
           </a:p>
@@ -25408,7 +25647,217 @@
       </p:sp>
       <p:sp>
         <p:nvSpPr>
-          <p:cNvPr id="30" name="Shape 28"/>
+          <p:cNvPr id="33" name="Text 31"/>
+          <p:cNvSpPr/>
+          <p:nvPr/>
+        </p:nvSpPr>
+        <p:spPr>
+          <a:xfrm>
+            <a:off x="5157216" y="3364992"/>
+            <a:ext cx="73152" cy="475488"/>
+          </a:xfrm>
+          <a:prstGeom prst="rect">
+            <a:avLst/>
+          </a:prstGeom>
+          <a:noFill/>
+          <a:ln/>
+        </p:spPr>
+        <p:txBody>
+          <a:bodyPr wrap="square" lIns="0" tIns="0" rIns="0" bIns="0" rtlCol="0" anchor="ctr"/>
+          <a:lstStyle/>
+          <a:p>
+            <a:pPr algn="ctr" indent="0" marL="0">
+              <a:buNone/>
+            </a:pPr>
+            <a:r>
+              <a:rPr lang="en-US" sz="1600" b="1" dirty="0">
+                <a:solidFill>
+                  <a:srgbClr val="0D9488"/>
+                </a:solidFill>
+                <a:latin typeface="Trebuchet MS" pitchFamily="34" charset="0"/>
+                <a:ea typeface="Trebuchet MS" pitchFamily="34" charset="-122"/>
+                <a:cs typeface="Trebuchet MS" pitchFamily="34" charset="-120"/>
+              </a:rPr>
+              <a:t>·</a:t>
+            </a:r>
+            <a:endParaRPr lang="en-US" sz="1600" dirty="0"/>
+          </a:p>
+        </p:txBody>
+      </p:sp>
+      <p:sp>
+        <p:nvSpPr>
+          <p:cNvPr id="34" name="Shape 32"/>
+          <p:cNvSpPr/>
+          <p:nvPr/>
+        </p:nvSpPr>
+        <p:spPr>
+          <a:xfrm>
+            <a:off x="5230368" y="3364992"/>
+            <a:ext cx="1554480" cy="475488"/>
+          </a:xfrm>
+          <a:prstGeom prst="rect">
+            <a:avLst>
+              <a:gd name="adj" fmla="val 9615"/>
+            </a:avLst>
+          </a:prstGeom>
+          <a:solidFill>
+            <a:srgbClr val="FFFFFF"/>
+          </a:solidFill>
+          <a:ln w="12700">
+            <a:solidFill>
+              <a:srgbClr val="0D9488"/>
+            </a:solidFill>
+            <a:prstDash val="solid"/>
+          </a:ln>
+        </p:spPr>
+      </p:sp>
+      <p:sp>
+        <p:nvSpPr>
+          <p:cNvPr id="35" name="Text 33"/>
+          <p:cNvSpPr/>
+          <p:nvPr/>
+        </p:nvSpPr>
+        <p:spPr>
+          <a:xfrm>
+            <a:off x="5230368" y="3364992"/>
+            <a:ext cx="1554480" cy="475488"/>
+          </a:xfrm>
+          <a:prstGeom prst="rect">
+            <a:avLst/>
+          </a:prstGeom>
+          <a:noFill/>
+          <a:ln/>
+        </p:spPr>
+        <p:txBody>
+          <a:bodyPr wrap="square" lIns="0" tIns="0" rIns="0" bIns="0" rtlCol="0" anchor="ctr"/>
+          <a:lstStyle/>
+          <a:p>
+            <a:pPr algn="ctr" indent="0" marL="0">
+              <a:buNone/>
+            </a:pPr>
+            <a:r>
+              <a:rPr lang="en-US" sz="1400" b="1" dirty="0">
+                <a:solidFill>
+                  <a:srgbClr val="0D9488"/>
+                </a:solidFill>
+                <a:latin typeface="Trebuchet MS" pitchFamily="34" charset="0"/>
+                <a:ea typeface="Trebuchet MS" pitchFamily="34" charset="-122"/>
+                <a:cs typeface="Trebuchet MS" pitchFamily="34" charset="-120"/>
+              </a:rPr>
+              <a:t>est</a:t>
+            </a:r>
+            <a:endParaRPr lang="en-US" sz="1400" dirty="0"/>
+          </a:p>
+        </p:txBody>
+      </p:sp>
+      <p:sp>
+        <p:nvSpPr>
+          <p:cNvPr id="36" name="Text 34"/>
+          <p:cNvSpPr/>
+          <p:nvPr/>
+        </p:nvSpPr>
+        <p:spPr>
+          <a:xfrm>
+            <a:off x="6784848" y="3364992"/>
+            <a:ext cx="73152" cy="475488"/>
+          </a:xfrm>
+          <a:prstGeom prst="rect">
+            <a:avLst/>
+          </a:prstGeom>
+          <a:noFill/>
+          <a:ln/>
+        </p:spPr>
+        <p:txBody>
+          <a:bodyPr wrap="square" lIns="0" tIns="0" rIns="0" bIns="0" rtlCol="0" anchor="ctr"/>
+          <a:lstStyle/>
+          <a:p>
+            <a:pPr algn="ctr" indent="0" marL="0">
+              <a:buNone/>
+            </a:pPr>
+            <a:r>
+              <a:rPr lang="en-US" sz="1600" b="1" dirty="0">
+                <a:solidFill>
+                  <a:srgbClr val="0D9488"/>
+                </a:solidFill>
+                <a:latin typeface="Trebuchet MS" pitchFamily="34" charset="0"/>
+                <a:ea typeface="Trebuchet MS" pitchFamily="34" charset="-122"/>
+                <a:cs typeface="Trebuchet MS" pitchFamily="34" charset="-120"/>
+              </a:rPr>
+              <a:t>·</a:t>
+            </a:r>
+            <a:endParaRPr lang="en-US" sz="1600" dirty="0"/>
+          </a:p>
+        </p:txBody>
+      </p:sp>
+      <p:sp>
+        <p:nvSpPr>
+          <p:cNvPr id="37" name="Shape 35"/>
+          <p:cNvSpPr/>
+          <p:nvPr/>
+        </p:nvSpPr>
+        <p:spPr>
+          <a:xfrm>
+            <a:off x="6858000" y="3364992"/>
+            <a:ext cx="1554480" cy="475488"/>
+          </a:xfrm>
+          <a:prstGeom prst="rect">
+            <a:avLst>
+              <a:gd name="adj" fmla="val 9615"/>
+            </a:avLst>
+          </a:prstGeom>
+          <a:solidFill>
+            <a:srgbClr val="FFFFFF"/>
+          </a:solidFill>
+          <a:ln w="12700">
+            <a:solidFill>
+              <a:srgbClr val="0D9488"/>
+            </a:solidFill>
+            <a:prstDash val="solid"/>
+          </a:ln>
+        </p:spPr>
+      </p:sp>
+      <p:sp>
+        <p:nvSpPr>
+          <p:cNvPr id="38" name="Text 36"/>
+          <p:cNvSpPr/>
+          <p:nvPr/>
+        </p:nvSpPr>
+        <p:spPr>
+          <a:xfrm>
+            <a:off x="6858000" y="3364992"/>
+            <a:ext cx="1554480" cy="475488"/>
+          </a:xfrm>
+          <a:prstGeom prst="rect">
+            <a:avLst/>
+          </a:prstGeom>
+          <a:noFill/>
+          <a:ln/>
+        </p:spPr>
+        <p:txBody>
+          <a:bodyPr wrap="square" lIns="0" tIns="0" rIns="0" bIns="0" rtlCol="0" anchor="ctr"/>
+          <a:lstStyle/>
+          <a:p>
+            <a:pPr algn="ctr" indent="0" marL="0">
+              <a:buNone/>
+            </a:pPr>
+            <a:r>
+              <a:rPr lang="en-US" sz="1400" b="1" dirty="0">
+                <a:solidFill>
+                  <a:srgbClr val="0D9488"/>
+                </a:solidFill>
+                <a:latin typeface="Trebuchet MS" pitchFamily="34" charset="0"/>
+                <a:ea typeface="Trebuchet MS" pitchFamily="34" charset="-122"/>
+                <a:cs typeface="Trebuchet MS" pitchFamily="34" charset="-120"/>
+              </a:rPr>
+              <a:t>ing</a:t>
+            </a:r>
+            <a:endParaRPr lang="en-US" sz="1400" dirty="0"/>
+          </a:p>
+        </p:txBody>
+      </p:sp>
+      <p:sp>
+        <p:nvSpPr>
+          <p:cNvPr id="39" name="Shape 37"/>
           <p:cNvSpPr/>
           <p:nvPr/>
         </p:nvSpPr>
@@ -25435,7 +25884,7 @@
       </p:sp>
       <p:sp>
         <p:nvSpPr>
-          <p:cNvPr id="31" name="Text 29"/>
+          <p:cNvPr id="40" name="Text 38"/>
           <p:cNvSpPr/>
           <p:nvPr/>
         </p:nvSpPr>
@@ -25474,7 +25923,7 @@
       </p:sp>
       <p:sp>
         <p:nvSpPr>
-          <p:cNvPr id="32" name="Shape 30"/>
+          <p:cNvPr id="41" name="Shape 39"/>
           <p:cNvSpPr/>
           <p:nvPr/>
         </p:nvSpPr>
@@ -25501,7 +25950,7 @@
       </p:sp>
       <p:sp>
         <p:nvSpPr>
-          <p:cNvPr id="33" name="Text 31"/>
+          <p:cNvPr id="42" name="Text 40"/>
           <p:cNvSpPr/>
           <p:nvPr/>
         </p:nvSpPr>
@@ -25824,7 +26273,7 @@
                 <a:ea typeface="Calibri" pitchFamily="34" charset="-122"/>
                 <a:cs typeface="Calibri" pitchFamily="34" charset="-120"/>
               </a:rPr>
-              <a:t>Word Labs  •  wordlabs.app  •  Root: 'rest' = stop, pause, remain still</a:t>
+              <a:t>Word Labs  •  wordlabs.app  •  Root: 'rest' = stop, remain, be still</a:t>
             </a:r>
             <a:endParaRPr lang="en-US" sz="800" dirty="0"/>
           </a:p>
@@ -25963,7 +26412,7 @@
                 <a:ea typeface="Trebuchet MS" pitchFamily="34" charset="-122"/>
                 <a:cs typeface="Trebuchet MS" pitchFamily="34" charset="-120"/>
               </a:rPr>
-              <a:t>restless</a:t>
+              <a:t>interesting</a:t>
             </a:r>
             <a:endParaRPr lang="en-US" sz="2800" dirty="0"/>
           </a:p>
@@ -26043,7 +26492,7 @@
         </p:nvSpPr>
         <p:spPr>
           <a:xfrm>
-            <a:off x="2938272" y="2258568"/>
+            <a:off x="2221992" y="2258568"/>
             <a:ext cx="1828800" cy="292608"/>
           </a:xfrm>
           <a:prstGeom prst="rect">
@@ -26052,11 +26501,11 @@
             </a:avLst>
           </a:prstGeom>
           <a:solidFill>
-            <a:srgbClr val="CCFBF1"/>
+            <a:srgbClr val="DDD6FE"/>
           </a:solidFill>
           <a:ln w="19050">
             <a:solidFill>
-              <a:srgbClr val="0D9488"/>
+              <a:srgbClr val="7C3AED"/>
             </a:solidFill>
             <a:prstDash val="solid"/>
           </a:ln>
@@ -26077,7 +26526,7 @@
         </p:nvSpPr>
         <p:spPr>
           <a:xfrm>
-            <a:off x="2938272" y="2258568"/>
+            <a:off x="2221992" y="2258568"/>
             <a:ext cx="1828800" cy="292608"/>
           </a:xfrm>
           <a:prstGeom prst="rect">
@@ -26096,13 +26545,13 @@
             <a:r>
               <a:rPr lang="en-US" sz="1300" b="1" dirty="0">
                 <a:solidFill>
-                  <a:srgbClr val="0F766E"/>
+                  <a:srgbClr val="4C1D95"/>
                 </a:solidFill>
                 <a:latin typeface="Trebuchet MS" pitchFamily="34" charset="0"/>
                 <a:ea typeface="Trebuchet MS" pitchFamily="34" charset="-122"/>
                 <a:cs typeface="Trebuchet MS" pitchFamily="34" charset="-120"/>
               </a:rPr>
-              <a:t>rest</a:t>
+              <a:t>inter</a:t>
             </a:r>
             <a:endParaRPr lang="en-US" sz="1300" dirty="0"/>
           </a:p>
@@ -26116,7 +26565,7 @@
         </p:nvSpPr>
         <p:spPr>
           <a:xfrm>
-            <a:off x="2938272" y="2569464"/>
+            <a:off x="2221992" y="2569464"/>
             <a:ext cx="1828800" cy="201168"/>
           </a:xfrm>
           <a:prstGeom prst="rect">
@@ -26141,7 +26590,7 @@
                 <a:ea typeface="Calibri" pitchFamily="34" charset="-122"/>
                 <a:cs typeface="Calibri" pitchFamily="34" charset="-120"/>
               </a:rPr>
-              <a:t>stop, be still</a:t>
+              <a:t>between, among</a:t>
             </a:r>
             <a:endParaRPr lang="en-US" sz="850" dirty="0"/>
           </a:p>
@@ -26155,7 +26604,7 @@
         </p:nvSpPr>
         <p:spPr>
           <a:xfrm>
-            <a:off x="5803392" y="2258568"/>
+            <a:off x="4370832" y="2258568"/>
             <a:ext cx="1828800" cy="292608"/>
           </a:xfrm>
           <a:prstGeom prst="rect">
@@ -26164,11 +26613,11 @@
             </a:avLst>
           </a:prstGeom>
           <a:solidFill>
-            <a:srgbClr val="DDD6FE"/>
+            <a:srgbClr val="CCFBF1"/>
           </a:solidFill>
           <a:ln w="19050">
             <a:solidFill>
-              <a:srgbClr val="7C3AED"/>
+              <a:srgbClr val="0D9488"/>
             </a:solidFill>
             <a:prstDash val="solid"/>
           </a:ln>
@@ -26189,7 +26638,7 @@
         </p:nvSpPr>
         <p:spPr>
           <a:xfrm>
-            <a:off x="5803392" y="2258568"/>
+            <a:off x="4370832" y="2258568"/>
             <a:ext cx="1828800" cy="292608"/>
           </a:xfrm>
           <a:prstGeom prst="rect">
@@ -26208,13 +26657,13 @@
             <a:r>
               <a:rPr lang="en-US" sz="1300" b="1" dirty="0">
                 <a:solidFill>
-                  <a:srgbClr val="4C1D95"/>
+                  <a:srgbClr val="0F766E"/>
                 </a:solidFill>
                 <a:latin typeface="Trebuchet MS" pitchFamily="34" charset="0"/>
                 <a:ea typeface="Trebuchet MS" pitchFamily="34" charset="-122"/>
                 <a:cs typeface="Trebuchet MS" pitchFamily="34" charset="-120"/>
               </a:rPr>
-              <a:t>less</a:t>
+              <a:t>rest</a:t>
             </a:r>
             <a:endParaRPr lang="en-US" sz="1300" dirty="0"/>
           </a:p>
@@ -26228,7 +26677,7 @@
         </p:nvSpPr>
         <p:spPr>
           <a:xfrm>
-            <a:off x="5803392" y="2569464"/>
+            <a:off x="4370832" y="2569464"/>
             <a:ext cx="1828800" cy="201168"/>
           </a:xfrm>
           <a:prstGeom prst="rect">
@@ -26253,7 +26702,7 @@
                 <a:ea typeface="Calibri" pitchFamily="34" charset="-122"/>
                 <a:cs typeface="Calibri" pitchFamily="34" charset="-120"/>
               </a:rPr>
-              <a:t>without</a:t>
+              <a:t>remain, stop</a:t>
             </a:r>
             <a:endParaRPr lang="en-US" sz="850" dirty="0"/>
           </a:p>
@@ -26262,6 +26711,118 @@
       <p:sp>
         <p:nvSpPr>
           <p:cNvPr id="22" name="Shape 20"/>
+          <p:cNvSpPr/>
+          <p:nvPr/>
+        </p:nvSpPr>
+        <p:spPr>
+          <a:xfrm>
+            <a:off x="6519672" y="2258568"/>
+            <a:ext cx="1828800" cy="292608"/>
+          </a:xfrm>
+          <a:prstGeom prst="rect">
+            <a:avLst>
+              <a:gd name="adj" fmla="val 25000"/>
+            </a:avLst>
+          </a:prstGeom>
+          <a:solidFill>
+            <a:srgbClr val="FCE7F3"/>
+          </a:solidFill>
+          <a:ln w="19050">
+            <a:solidFill>
+              <a:srgbClr val="DB2777"/>
+            </a:solidFill>
+            <a:prstDash val="solid"/>
+          </a:ln>
+          <a:effectLst>
+            <a:outerShdw sx="100000" sy="100000" kx="0" ky="0" algn="bl" rotWithShape="0" blurRad="101600" dist="38100" dir="8100000">
+              <a:srgbClr val="000000">
+                <a:alpha val="12000"/>
+              </a:srgbClr>
+            </a:outerShdw>
+          </a:effectLst>
+        </p:spPr>
+      </p:sp>
+      <p:sp>
+        <p:nvSpPr>
+          <p:cNvPr id="23" name="Text 21"/>
+          <p:cNvSpPr/>
+          <p:nvPr/>
+        </p:nvSpPr>
+        <p:spPr>
+          <a:xfrm>
+            <a:off x="6519672" y="2258568"/>
+            <a:ext cx="1828800" cy="292608"/>
+          </a:xfrm>
+          <a:prstGeom prst="rect">
+            <a:avLst/>
+          </a:prstGeom>
+          <a:noFill/>
+          <a:ln/>
+        </p:spPr>
+        <p:txBody>
+          <a:bodyPr wrap="square" lIns="0" tIns="0" rIns="0" bIns="0" rtlCol="0" anchor="ctr"/>
+          <a:lstStyle/>
+          <a:p>
+            <a:pPr algn="ctr" indent="0" marL="0">
+              <a:buNone/>
+            </a:pPr>
+            <a:r>
+              <a:rPr lang="en-US" sz="1300" b="1" dirty="0">
+                <a:solidFill>
+                  <a:srgbClr val="9D174D"/>
+                </a:solidFill>
+                <a:latin typeface="Trebuchet MS" pitchFamily="34" charset="0"/>
+                <a:ea typeface="Trebuchet MS" pitchFamily="34" charset="-122"/>
+                <a:cs typeface="Trebuchet MS" pitchFamily="34" charset="-120"/>
+              </a:rPr>
+              <a:t>ing</a:t>
+            </a:r>
+            <a:endParaRPr lang="en-US" sz="1300" dirty="0"/>
+          </a:p>
+        </p:txBody>
+      </p:sp>
+      <p:sp>
+        <p:nvSpPr>
+          <p:cNvPr id="24" name="Text 22"/>
+          <p:cNvSpPr/>
+          <p:nvPr/>
+        </p:nvSpPr>
+        <p:spPr>
+          <a:xfrm>
+            <a:off x="6519672" y="2569464"/>
+            <a:ext cx="1828800" cy="201168"/>
+          </a:xfrm>
+          <a:prstGeom prst="rect">
+            <a:avLst/>
+          </a:prstGeom>
+          <a:noFill/>
+          <a:ln/>
+        </p:spPr>
+        <p:txBody>
+          <a:bodyPr wrap="square" lIns="0" tIns="0" rIns="0" bIns="0" rtlCol="0" anchor="t"/>
+          <a:lstStyle/>
+          <a:p>
+            <a:pPr algn="ctr" indent="0" marL="0">
+              <a:buNone/>
+            </a:pPr>
+            <a:r>
+              <a:rPr lang="en-US" sz="850" dirty="0">
+                <a:solidFill>
+                  <a:srgbClr val="475569"/>
+                </a:solidFill>
+                <a:latin typeface="Calibri" pitchFamily="34" charset="0"/>
+                <a:ea typeface="Calibri" pitchFamily="34" charset="-122"/>
+                <a:cs typeface="Calibri" pitchFamily="34" charset="-120"/>
+              </a:rPr>
+              <a:t>action, state of</a:t>
+            </a:r>
+            <a:endParaRPr lang="en-US" sz="850" dirty="0"/>
+          </a:p>
+        </p:txBody>
+      </p:sp>
+      <p:sp>
+        <p:nvSpPr>
+          <p:cNvPr id="25" name="Shape 23"/>
           <p:cNvSpPr/>
           <p:nvPr/>
         </p:nvSpPr>
@@ -26288,7 +26849,7 @@
       </p:sp>
       <p:sp>
         <p:nvSpPr>
-          <p:cNvPr id="23" name="Text 21"/>
+          <p:cNvPr id="26" name="Text 24"/>
           <p:cNvSpPr/>
           <p:nvPr/>
         </p:nvSpPr>
@@ -26327,7 +26888,7 @@
       </p:sp>
       <p:sp>
         <p:nvSpPr>
-          <p:cNvPr id="24" name="Shape 22"/>
+          <p:cNvPr id="27" name="Shape 25"/>
           <p:cNvSpPr/>
           <p:nvPr/>
         </p:nvSpPr>
@@ -26354,14 +26915,14 @@
       </p:sp>
       <p:sp>
         <p:nvSpPr>
-          <p:cNvPr id="25" name="Shape 23"/>
-          <p:cNvSpPr/>
-          <p:nvPr/>
-        </p:nvSpPr>
-        <p:spPr>
-          <a:xfrm>
-            <a:off x="2999232" y="3364992"/>
-            <a:ext cx="1645920" cy="475488"/>
+          <p:cNvPr id="28" name="Shape 26"/>
+          <p:cNvSpPr/>
+          <p:nvPr/>
+        </p:nvSpPr>
+        <p:spPr>
+          <a:xfrm>
+            <a:off x="1975104" y="3364992"/>
+            <a:ext cx="1554480" cy="475488"/>
           </a:xfrm>
           <a:prstGeom prst="rect">
             <a:avLst>
@@ -26381,14 +26942,14 @@
       </p:sp>
       <p:sp>
         <p:nvSpPr>
-          <p:cNvPr id="26" name="Text 24"/>
-          <p:cNvSpPr/>
-          <p:nvPr/>
-        </p:nvSpPr>
-        <p:spPr>
-          <a:xfrm>
-            <a:off x="2999232" y="3364992"/>
-            <a:ext cx="1645920" cy="475488"/>
+          <p:cNvPr id="29" name="Text 27"/>
+          <p:cNvSpPr/>
+          <p:nvPr/>
+        </p:nvSpPr>
+        <p:spPr>
+          <a:xfrm>
+            <a:off x="1975104" y="3364992"/>
+            <a:ext cx="1554480" cy="475488"/>
           </a:xfrm>
           <a:prstGeom prst="rect">
             <a:avLst/>
@@ -26412,7 +26973,7 @@
                 <a:ea typeface="Trebuchet MS" pitchFamily="34" charset="-122"/>
                 <a:cs typeface="Trebuchet MS" pitchFamily="34" charset="-120"/>
               </a:rPr>
-              <a:t>rest</a:t>
+              <a:t>in</a:t>
             </a:r>
             <a:endParaRPr lang="en-US" sz="1400" dirty="0"/>
           </a:p>
@@ -26420,14 +26981,14 @@
       </p:sp>
       <p:sp>
         <p:nvSpPr>
-          <p:cNvPr id="27" name="Text 25"/>
-          <p:cNvSpPr/>
-          <p:nvPr/>
-        </p:nvSpPr>
-        <p:spPr>
-          <a:xfrm>
-            <a:off x="4645152" y="3364992"/>
-            <a:ext cx="1097280" cy="475488"/>
+          <p:cNvPr id="30" name="Text 28"/>
+          <p:cNvSpPr/>
+          <p:nvPr/>
+        </p:nvSpPr>
+        <p:spPr>
+          <a:xfrm>
+            <a:off x="3529584" y="3364992"/>
+            <a:ext cx="73152" cy="475488"/>
           </a:xfrm>
           <a:prstGeom prst="rect">
             <a:avLst/>
@@ -26459,14 +27020,14 @@
       </p:sp>
       <p:sp>
         <p:nvSpPr>
-          <p:cNvPr id="28" name="Shape 26"/>
-          <p:cNvSpPr/>
-          <p:nvPr/>
-        </p:nvSpPr>
-        <p:spPr>
-          <a:xfrm>
-            <a:off x="5742432" y="3364992"/>
-            <a:ext cx="1645920" cy="475488"/>
+          <p:cNvPr id="31" name="Shape 29"/>
+          <p:cNvSpPr/>
+          <p:nvPr/>
+        </p:nvSpPr>
+        <p:spPr>
+          <a:xfrm>
+            <a:off x="3602736" y="3364992"/>
+            <a:ext cx="1554480" cy="475488"/>
           </a:xfrm>
           <a:prstGeom prst="rect">
             <a:avLst>
@@ -26486,14 +27047,14 @@
       </p:sp>
       <p:sp>
         <p:nvSpPr>
-          <p:cNvPr id="29" name="Text 27"/>
-          <p:cNvSpPr/>
-          <p:nvPr/>
-        </p:nvSpPr>
-        <p:spPr>
-          <a:xfrm>
-            <a:off x="5742432" y="3364992"/>
-            <a:ext cx="1645920" cy="475488"/>
+          <p:cNvPr id="32" name="Text 30"/>
+          <p:cNvSpPr/>
+          <p:nvPr/>
+        </p:nvSpPr>
+        <p:spPr>
+          <a:xfrm>
+            <a:off x="3602736" y="3364992"/>
+            <a:ext cx="1554480" cy="475488"/>
           </a:xfrm>
           <a:prstGeom prst="rect">
             <a:avLst/>
@@ -26517,7 +27078,7 @@
                 <a:ea typeface="Trebuchet MS" pitchFamily="34" charset="-122"/>
                 <a:cs typeface="Trebuchet MS" pitchFamily="34" charset="-120"/>
               </a:rPr>
-              <a:t>less</a:t>
+              <a:t>ter</a:t>
             </a:r>
             <a:endParaRPr lang="en-US" sz="1400" dirty="0"/>
           </a:p>
@@ -26525,7 +27086,217 @@
       </p:sp>
       <p:sp>
         <p:nvSpPr>
-          <p:cNvPr id="30" name="Shape 28"/>
+          <p:cNvPr id="33" name="Text 31"/>
+          <p:cNvSpPr/>
+          <p:nvPr/>
+        </p:nvSpPr>
+        <p:spPr>
+          <a:xfrm>
+            <a:off x="5157216" y="3364992"/>
+            <a:ext cx="73152" cy="475488"/>
+          </a:xfrm>
+          <a:prstGeom prst="rect">
+            <a:avLst/>
+          </a:prstGeom>
+          <a:noFill/>
+          <a:ln/>
+        </p:spPr>
+        <p:txBody>
+          <a:bodyPr wrap="square" lIns="0" tIns="0" rIns="0" bIns="0" rtlCol="0" anchor="ctr"/>
+          <a:lstStyle/>
+          <a:p>
+            <a:pPr algn="ctr" indent="0" marL="0">
+              <a:buNone/>
+            </a:pPr>
+            <a:r>
+              <a:rPr lang="en-US" sz="1600" b="1" dirty="0">
+                <a:solidFill>
+                  <a:srgbClr val="0D9488"/>
+                </a:solidFill>
+                <a:latin typeface="Trebuchet MS" pitchFamily="34" charset="0"/>
+                <a:ea typeface="Trebuchet MS" pitchFamily="34" charset="-122"/>
+                <a:cs typeface="Trebuchet MS" pitchFamily="34" charset="-120"/>
+              </a:rPr>
+              <a:t>·</a:t>
+            </a:r>
+            <a:endParaRPr lang="en-US" sz="1600" dirty="0"/>
+          </a:p>
+        </p:txBody>
+      </p:sp>
+      <p:sp>
+        <p:nvSpPr>
+          <p:cNvPr id="34" name="Shape 32"/>
+          <p:cNvSpPr/>
+          <p:nvPr/>
+        </p:nvSpPr>
+        <p:spPr>
+          <a:xfrm>
+            <a:off x="5230368" y="3364992"/>
+            <a:ext cx="1554480" cy="475488"/>
+          </a:xfrm>
+          <a:prstGeom prst="rect">
+            <a:avLst>
+              <a:gd name="adj" fmla="val 9615"/>
+            </a:avLst>
+          </a:prstGeom>
+          <a:solidFill>
+            <a:srgbClr val="FFFFFF"/>
+          </a:solidFill>
+          <a:ln w="12700">
+            <a:solidFill>
+              <a:srgbClr val="0D9488"/>
+            </a:solidFill>
+            <a:prstDash val="solid"/>
+          </a:ln>
+        </p:spPr>
+      </p:sp>
+      <p:sp>
+        <p:nvSpPr>
+          <p:cNvPr id="35" name="Text 33"/>
+          <p:cNvSpPr/>
+          <p:nvPr/>
+        </p:nvSpPr>
+        <p:spPr>
+          <a:xfrm>
+            <a:off x="5230368" y="3364992"/>
+            <a:ext cx="1554480" cy="475488"/>
+          </a:xfrm>
+          <a:prstGeom prst="rect">
+            <a:avLst/>
+          </a:prstGeom>
+          <a:noFill/>
+          <a:ln/>
+        </p:spPr>
+        <p:txBody>
+          <a:bodyPr wrap="square" lIns="0" tIns="0" rIns="0" bIns="0" rtlCol="0" anchor="ctr"/>
+          <a:lstStyle/>
+          <a:p>
+            <a:pPr algn="ctr" indent="0" marL="0">
+              <a:buNone/>
+            </a:pPr>
+            <a:r>
+              <a:rPr lang="en-US" sz="1400" b="1" dirty="0">
+                <a:solidFill>
+                  <a:srgbClr val="0D9488"/>
+                </a:solidFill>
+                <a:latin typeface="Trebuchet MS" pitchFamily="34" charset="0"/>
+                <a:ea typeface="Trebuchet MS" pitchFamily="34" charset="-122"/>
+                <a:cs typeface="Trebuchet MS" pitchFamily="34" charset="-120"/>
+              </a:rPr>
+              <a:t>est</a:t>
+            </a:r>
+            <a:endParaRPr lang="en-US" sz="1400" dirty="0"/>
+          </a:p>
+        </p:txBody>
+      </p:sp>
+      <p:sp>
+        <p:nvSpPr>
+          <p:cNvPr id="36" name="Text 34"/>
+          <p:cNvSpPr/>
+          <p:nvPr/>
+        </p:nvSpPr>
+        <p:spPr>
+          <a:xfrm>
+            <a:off x="6784848" y="3364992"/>
+            <a:ext cx="73152" cy="475488"/>
+          </a:xfrm>
+          <a:prstGeom prst="rect">
+            <a:avLst/>
+          </a:prstGeom>
+          <a:noFill/>
+          <a:ln/>
+        </p:spPr>
+        <p:txBody>
+          <a:bodyPr wrap="square" lIns="0" tIns="0" rIns="0" bIns="0" rtlCol="0" anchor="ctr"/>
+          <a:lstStyle/>
+          <a:p>
+            <a:pPr algn="ctr" indent="0" marL="0">
+              <a:buNone/>
+            </a:pPr>
+            <a:r>
+              <a:rPr lang="en-US" sz="1600" b="1" dirty="0">
+                <a:solidFill>
+                  <a:srgbClr val="0D9488"/>
+                </a:solidFill>
+                <a:latin typeface="Trebuchet MS" pitchFamily="34" charset="0"/>
+                <a:ea typeface="Trebuchet MS" pitchFamily="34" charset="-122"/>
+                <a:cs typeface="Trebuchet MS" pitchFamily="34" charset="-120"/>
+              </a:rPr>
+              <a:t>·</a:t>
+            </a:r>
+            <a:endParaRPr lang="en-US" sz="1600" dirty="0"/>
+          </a:p>
+        </p:txBody>
+      </p:sp>
+      <p:sp>
+        <p:nvSpPr>
+          <p:cNvPr id="37" name="Shape 35"/>
+          <p:cNvSpPr/>
+          <p:nvPr/>
+        </p:nvSpPr>
+        <p:spPr>
+          <a:xfrm>
+            <a:off x="6858000" y="3364992"/>
+            <a:ext cx="1554480" cy="475488"/>
+          </a:xfrm>
+          <a:prstGeom prst="rect">
+            <a:avLst>
+              <a:gd name="adj" fmla="val 9615"/>
+            </a:avLst>
+          </a:prstGeom>
+          <a:solidFill>
+            <a:srgbClr val="FFFFFF"/>
+          </a:solidFill>
+          <a:ln w="12700">
+            <a:solidFill>
+              <a:srgbClr val="0D9488"/>
+            </a:solidFill>
+            <a:prstDash val="solid"/>
+          </a:ln>
+        </p:spPr>
+      </p:sp>
+      <p:sp>
+        <p:nvSpPr>
+          <p:cNvPr id="38" name="Text 36"/>
+          <p:cNvSpPr/>
+          <p:nvPr/>
+        </p:nvSpPr>
+        <p:spPr>
+          <a:xfrm>
+            <a:off x="6858000" y="3364992"/>
+            <a:ext cx="1554480" cy="475488"/>
+          </a:xfrm>
+          <a:prstGeom prst="rect">
+            <a:avLst/>
+          </a:prstGeom>
+          <a:noFill/>
+          <a:ln/>
+        </p:spPr>
+        <p:txBody>
+          <a:bodyPr wrap="square" lIns="0" tIns="0" rIns="0" bIns="0" rtlCol="0" anchor="ctr"/>
+          <a:lstStyle/>
+          <a:p>
+            <a:pPr algn="ctr" indent="0" marL="0">
+              <a:buNone/>
+            </a:pPr>
+            <a:r>
+              <a:rPr lang="en-US" sz="1400" b="1" dirty="0">
+                <a:solidFill>
+                  <a:srgbClr val="0D9488"/>
+                </a:solidFill>
+                <a:latin typeface="Trebuchet MS" pitchFamily="34" charset="0"/>
+                <a:ea typeface="Trebuchet MS" pitchFamily="34" charset="-122"/>
+                <a:cs typeface="Trebuchet MS" pitchFamily="34" charset="-120"/>
+              </a:rPr>
+              <a:t>ing</a:t>
+            </a:r>
+            <a:endParaRPr lang="en-US" sz="1400" dirty="0"/>
+          </a:p>
+        </p:txBody>
+      </p:sp>
+      <p:sp>
+        <p:nvSpPr>
+          <p:cNvPr id="39" name="Shape 37"/>
           <p:cNvSpPr/>
           <p:nvPr/>
         </p:nvSpPr>
@@ -26552,7 +27323,7 @@
       </p:sp>
       <p:sp>
         <p:nvSpPr>
-          <p:cNvPr id="31" name="Text 29"/>
+          <p:cNvPr id="40" name="Text 38"/>
           <p:cNvSpPr/>
           <p:nvPr/>
         </p:nvSpPr>
@@ -26591,7 +27362,7 @@
       </p:sp>
       <p:sp>
         <p:nvSpPr>
-          <p:cNvPr id="32" name="Shape 30"/>
+          <p:cNvPr id="41" name="Shape 39"/>
           <p:cNvSpPr/>
           <p:nvPr/>
         </p:nvSpPr>
@@ -26618,14 +27389,14 @@
       </p:sp>
       <p:sp>
         <p:nvSpPr>
-          <p:cNvPr id="33" name="Shape 31"/>
-          <p:cNvSpPr/>
-          <p:nvPr/>
-        </p:nvSpPr>
-        <p:spPr>
-          <a:xfrm>
-            <a:off x="2124837" y="4169664"/>
-            <a:ext cx="685800" cy="475488"/>
+          <p:cNvPr id="42" name="Shape 40"/>
+          <p:cNvSpPr/>
+          <p:nvPr/>
+        </p:nvSpPr>
+        <p:spPr>
+          <a:xfrm>
+            <a:off x="1951330" y="4169664"/>
+            <a:ext cx="676656" cy="475488"/>
           </a:xfrm>
           <a:prstGeom prst="rect">
             <a:avLst>
@@ -26645,14 +27416,14 @@
       </p:sp>
       <p:sp>
         <p:nvSpPr>
-          <p:cNvPr id="34" name="Text 32"/>
-          <p:cNvSpPr/>
-          <p:nvPr/>
-        </p:nvSpPr>
-        <p:spPr>
-          <a:xfrm>
-            <a:off x="2124837" y="4169664"/>
-            <a:ext cx="685800" cy="475488"/>
+          <p:cNvPr id="43" name="Text 41"/>
+          <p:cNvSpPr/>
+          <p:nvPr/>
+        </p:nvSpPr>
+        <p:spPr>
+          <a:xfrm>
+            <a:off x="1951330" y="4169664"/>
+            <a:ext cx="676656" cy="475488"/>
           </a:xfrm>
           <a:prstGeom prst="rect">
             <a:avLst/>
@@ -26676,7 +27447,7 @@
                 <a:ea typeface="Trebuchet MS" pitchFamily="34" charset="-122"/>
                 <a:cs typeface="Trebuchet MS" pitchFamily="34" charset="-120"/>
               </a:rPr>
-              <a:t>r</a:t>
+              <a:t>i</a:t>
             </a:r>
             <a:endParaRPr lang="en-US" sz="900" dirty="0"/>
           </a:p>
@@ -26684,14 +27455,14 @@
       </p:sp>
       <p:sp>
         <p:nvSpPr>
-          <p:cNvPr id="35" name="Shape 33"/>
-          <p:cNvSpPr/>
-          <p:nvPr/>
-        </p:nvSpPr>
-        <p:spPr>
-          <a:xfrm>
-            <a:off x="3033522" y="4169664"/>
-            <a:ext cx="685800" cy="475488"/>
+          <p:cNvPr id="44" name="Shape 42"/>
+          <p:cNvSpPr/>
+          <p:nvPr/>
+        </p:nvSpPr>
+        <p:spPr>
+          <a:xfrm>
+            <a:off x="2677363" y="4169664"/>
+            <a:ext cx="676656" cy="475488"/>
           </a:xfrm>
           <a:prstGeom prst="rect">
             <a:avLst>
@@ -26711,14 +27482,14 @@
       </p:sp>
       <p:sp>
         <p:nvSpPr>
-          <p:cNvPr id="36" name="Text 34"/>
-          <p:cNvSpPr/>
-          <p:nvPr/>
-        </p:nvSpPr>
-        <p:spPr>
-          <a:xfrm>
-            <a:off x="3033522" y="4169664"/>
-            <a:ext cx="685800" cy="475488"/>
+          <p:cNvPr id="45" name="Text 43"/>
+          <p:cNvSpPr/>
+          <p:nvPr/>
+        </p:nvSpPr>
+        <p:spPr>
+          <a:xfrm>
+            <a:off x="2677363" y="4169664"/>
+            <a:ext cx="676656" cy="475488"/>
           </a:xfrm>
           <a:prstGeom prst="rect">
             <a:avLst/>
@@ -26742,7 +27513,7 @@
                 <a:ea typeface="Trebuchet MS" pitchFamily="34" charset="-122"/>
                 <a:cs typeface="Trebuchet MS" pitchFamily="34" charset="-120"/>
               </a:rPr>
-              <a:t>e</a:t>
+              <a:t>n</a:t>
             </a:r>
             <a:endParaRPr lang="en-US" sz="900" dirty="0"/>
           </a:p>
@@ -26750,14 +27521,14 @@
       </p:sp>
       <p:sp>
         <p:nvSpPr>
-          <p:cNvPr id="37" name="Shape 35"/>
-          <p:cNvSpPr/>
-          <p:nvPr/>
-        </p:nvSpPr>
-        <p:spPr>
-          <a:xfrm>
-            <a:off x="3942207" y="4169664"/>
-            <a:ext cx="685800" cy="475488"/>
+          <p:cNvPr id="46" name="Shape 44"/>
+          <p:cNvSpPr/>
+          <p:nvPr/>
+        </p:nvSpPr>
+        <p:spPr>
+          <a:xfrm>
+            <a:off x="3403397" y="4169664"/>
+            <a:ext cx="676656" cy="475488"/>
           </a:xfrm>
           <a:prstGeom prst="rect">
             <a:avLst>
@@ -26777,14 +27548,14 @@
       </p:sp>
       <p:sp>
         <p:nvSpPr>
-          <p:cNvPr id="38" name="Text 36"/>
-          <p:cNvSpPr/>
-          <p:nvPr/>
-        </p:nvSpPr>
-        <p:spPr>
-          <a:xfrm>
-            <a:off x="3942207" y="4169664"/>
-            <a:ext cx="685800" cy="475488"/>
+          <p:cNvPr id="47" name="Text 45"/>
+          <p:cNvSpPr/>
+          <p:nvPr/>
+        </p:nvSpPr>
+        <p:spPr>
+          <a:xfrm>
+            <a:off x="3403397" y="4169664"/>
+            <a:ext cx="676656" cy="475488"/>
           </a:xfrm>
           <a:prstGeom prst="rect">
             <a:avLst/>
@@ -26808,7 +27579,7 @@
                 <a:ea typeface="Trebuchet MS" pitchFamily="34" charset="-122"/>
                 <a:cs typeface="Trebuchet MS" pitchFamily="34" charset="-120"/>
               </a:rPr>
-              <a:t>s</a:t>
+              <a:t>t</a:t>
             </a:r>
             <a:endParaRPr lang="en-US" sz="900" dirty="0"/>
           </a:p>
@@ -26816,14 +27587,14 @@
       </p:sp>
       <p:sp>
         <p:nvSpPr>
-          <p:cNvPr id="39" name="Shape 37"/>
-          <p:cNvSpPr/>
-          <p:nvPr/>
-        </p:nvSpPr>
-        <p:spPr>
-          <a:xfrm>
-            <a:off x="4850892" y="4169664"/>
-            <a:ext cx="685800" cy="475488"/>
+          <p:cNvPr id="48" name="Shape 46"/>
+          <p:cNvSpPr/>
+          <p:nvPr/>
+        </p:nvSpPr>
+        <p:spPr>
+          <a:xfrm>
+            <a:off x="4129430" y="4169664"/>
+            <a:ext cx="676656" cy="475488"/>
           </a:xfrm>
           <a:prstGeom prst="rect">
             <a:avLst>
@@ -26843,14 +27614,14 @@
       </p:sp>
       <p:sp>
         <p:nvSpPr>
-          <p:cNvPr id="40" name="Text 38"/>
-          <p:cNvSpPr/>
-          <p:nvPr/>
-        </p:nvSpPr>
-        <p:spPr>
-          <a:xfrm>
-            <a:off x="4850892" y="4169664"/>
-            <a:ext cx="685800" cy="475488"/>
+          <p:cNvPr id="49" name="Text 47"/>
+          <p:cNvSpPr/>
+          <p:nvPr/>
+        </p:nvSpPr>
+        <p:spPr>
+          <a:xfrm>
+            <a:off x="4129430" y="4169664"/>
+            <a:ext cx="676656" cy="475488"/>
           </a:xfrm>
           <a:prstGeom prst="rect">
             <a:avLst/>
@@ -26874,7 +27645,7 @@
                 <a:ea typeface="Trebuchet MS" pitchFamily="34" charset="-122"/>
                 <a:cs typeface="Trebuchet MS" pitchFamily="34" charset="-120"/>
               </a:rPr>
-              <a:t>t</a:t>
+              <a:t>er</a:t>
             </a:r>
             <a:endParaRPr lang="en-US" sz="900" dirty="0"/>
           </a:p>
@@ -26882,14 +27653,14 @@
       </p:sp>
       <p:sp>
         <p:nvSpPr>
-          <p:cNvPr id="41" name="Shape 39"/>
-          <p:cNvSpPr/>
-          <p:nvPr/>
-        </p:nvSpPr>
-        <p:spPr>
-          <a:xfrm>
-            <a:off x="5759577" y="4169664"/>
-            <a:ext cx="685800" cy="475488"/>
+          <p:cNvPr id="50" name="Shape 48"/>
+          <p:cNvSpPr/>
+          <p:nvPr/>
+        </p:nvSpPr>
+        <p:spPr>
+          <a:xfrm>
+            <a:off x="4855464" y="4169664"/>
+            <a:ext cx="676656" cy="475488"/>
           </a:xfrm>
           <a:prstGeom prst="rect">
             <a:avLst>
@@ -26909,14 +27680,14 @@
       </p:sp>
       <p:sp>
         <p:nvSpPr>
-          <p:cNvPr id="42" name="Text 40"/>
-          <p:cNvSpPr/>
-          <p:nvPr/>
-        </p:nvSpPr>
-        <p:spPr>
-          <a:xfrm>
-            <a:off x="5759577" y="4169664"/>
-            <a:ext cx="685800" cy="475488"/>
+          <p:cNvPr id="51" name="Text 49"/>
+          <p:cNvSpPr/>
+          <p:nvPr/>
+        </p:nvSpPr>
+        <p:spPr>
+          <a:xfrm>
+            <a:off x="4855464" y="4169664"/>
+            <a:ext cx="676656" cy="475488"/>
           </a:xfrm>
           <a:prstGeom prst="rect">
             <a:avLst/>
@@ -26940,7 +27711,7 @@
                 <a:ea typeface="Trebuchet MS" pitchFamily="34" charset="-122"/>
                 <a:cs typeface="Trebuchet MS" pitchFamily="34" charset="-120"/>
               </a:rPr>
-              <a:t>l</a:t>
+              <a:t>e</a:t>
             </a:r>
             <a:endParaRPr lang="en-US" sz="900" dirty="0"/>
           </a:p>
@@ -26948,14 +27719,14 @@
       </p:sp>
       <p:sp>
         <p:nvSpPr>
-          <p:cNvPr id="43" name="Shape 41"/>
-          <p:cNvSpPr/>
-          <p:nvPr/>
-        </p:nvSpPr>
-        <p:spPr>
-          <a:xfrm>
-            <a:off x="6668262" y="4169664"/>
-            <a:ext cx="685800" cy="475488"/>
+          <p:cNvPr id="52" name="Shape 50"/>
+          <p:cNvSpPr/>
+          <p:nvPr/>
+        </p:nvSpPr>
+        <p:spPr>
+          <a:xfrm>
+            <a:off x="5581498" y="4169664"/>
+            <a:ext cx="676656" cy="475488"/>
           </a:xfrm>
           <a:prstGeom prst="rect">
             <a:avLst>
@@ -26975,14 +27746,14 @@
       </p:sp>
       <p:sp>
         <p:nvSpPr>
-          <p:cNvPr id="44" name="Text 42"/>
-          <p:cNvSpPr/>
-          <p:nvPr/>
-        </p:nvSpPr>
-        <p:spPr>
-          <a:xfrm>
-            <a:off x="6668262" y="4169664"/>
-            <a:ext cx="685800" cy="475488"/>
+          <p:cNvPr id="53" name="Text 51"/>
+          <p:cNvSpPr/>
+          <p:nvPr/>
+        </p:nvSpPr>
+        <p:spPr>
+          <a:xfrm>
+            <a:off x="5581498" y="4169664"/>
+            <a:ext cx="676656" cy="475488"/>
           </a:xfrm>
           <a:prstGeom prst="rect">
             <a:avLst/>
@@ -27006,7 +27777,7 @@
                 <a:ea typeface="Trebuchet MS" pitchFamily="34" charset="-122"/>
                 <a:cs typeface="Trebuchet MS" pitchFamily="34" charset="-120"/>
               </a:rPr>
-              <a:t>e</a:t>
+              <a:t>s</a:t>
             </a:r>
             <a:endParaRPr lang="en-US" sz="900" dirty="0"/>
           </a:p>
@@ -27014,14 +27785,14 @@
       </p:sp>
       <p:sp>
         <p:nvSpPr>
-          <p:cNvPr id="45" name="Shape 43"/>
-          <p:cNvSpPr/>
-          <p:nvPr/>
-        </p:nvSpPr>
-        <p:spPr>
-          <a:xfrm>
-            <a:off x="7576947" y="4169664"/>
-            <a:ext cx="685800" cy="475488"/>
+          <p:cNvPr id="54" name="Shape 52"/>
+          <p:cNvSpPr/>
+          <p:nvPr/>
+        </p:nvSpPr>
+        <p:spPr>
+          <a:xfrm>
+            <a:off x="6307531" y="4169664"/>
+            <a:ext cx="676656" cy="475488"/>
           </a:xfrm>
           <a:prstGeom prst="rect">
             <a:avLst>
@@ -27041,14 +27812,14 @@
       </p:sp>
       <p:sp>
         <p:nvSpPr>
-          <p:cNvPr id="46" name="Text 44"/>
-          <p:cNvSpPr/>
-          <p:nvPr/>
-        </p:nvSpPr>
-        <p:spPr>
-          <a:xfrm>
-            <a:off x="7576947" y="4169664"/>
-            <a:ext cx="685800" cy="475488"/>
+          <p:cNvPr id="55" name="Text 53"/>
+          <p:cNvSpPr/>
+          <p:nvPr/>
+        </p:nvSpPr>
+        <p:spPr>
+          <a:xfrm>
+            <a:off x="6307531" y="4169664"/>
+            <a:ext cx="676656" cy="475488"/>
           </a:xfrm>
           <a:prstGeom prst="rect">
             <a:avLst/>
@@ -27072,7 +27843,139 @@
                 <a:ea typeface="Trebuchet MS" pitchFamily="34" charset="-122"/>
                 <a:cs typeface="Trebuchet MS" pitchFamily="34" charset="-120"/>
               </a:rPr>
-              <a:t>ss</a:t>
+              <a:t>t</a:t>
+            </a:r>
+            <a:endParaRPr lang="en-US" sz="900" dirty="0"/>
+          </a:p>
+        </p:txBody>
+      </p:sp>
+      <p:sp>
+        <p:nvSpPr>
+          <p:cNvPr id="56" name="Shape 54"/>
+          <p:cNvSpPr/>
+          <p:nvPr/>
+        </p:nvSpPr>
+        <p:spPr>
+          <a:xfrm>
+            <a:off x="7033565" y="4169664"/>
+            <a:ext cx="676656" cy="475488"/>
+          </a:xfrm>
+          <a:prstGeom prst="rect">
+            <a:avLst>
+              <a:gd name="adj" fmla="val 7692"/>
+            </a:avLst>
+          </a:prstGeom>
+          <a:solidFill>
+            <a:srgbClr val="FFFFFF"/>
+          </a:solidFill>
+          <a:ln w="12700">
+            <a:solidFill>
+              <a:srgbClr val="DB2777"/>
+            </a:solidFill>
+            <a:prstDash val="solid"/>
+          </a:ln>
+        </p:spPr>
+      </p:sp>
+      <p:sp>
+        <p:nvSpPr>
+          <p:cNvPr id="57" name="Text 55"/>
+          <p:cNvSpPr/>
+          <p:nvPr/>
+        </p:nvSpPr>
+        <p:spPr>
+          <a:xfrm>
+            <a:off x="7033565" y="4169664"/>
+            <a:ext cx="676656" cy="475488"/>
+          </a:xfrm>
+          <a:prstGeom prst="rect">
+            <a:avLst/>
+          </a:prstGeom>
+          <a:noFill/>
+          <a:ln/>
+        </p:spPr>
+        <p:txBody>
+          <a:bodyPr wrap="square" lIns="0" tIns="0" rIns="0" bIns="0" rtlCol="0" anchor="ctr"/>
+          <a:lstStyle/>
+          <a:p>
+            <a:pPr algn="ctr" indent="0" marL="0">
+              <a:buNone/>
+            </a:pPr>
+            <a:r>
+              <a:rPr lang="en-US" sz="900" b="1" dirty="0">
+                <a:solidFill>
+                  <a:srgbClr val="9D174D"/>
+                </a:solidFill>
+                <a:latin typeface="Trebuchet MS" pitchFamily="34" charset="0"/>
+                <a:ea typeface="Trebuchet MS" pitchFamily="34" charset="-122"/>
+                <a:cs typeface="Trebuchet MS" pitchFamily="34" charset="-120"/>
+              </a:rPr>
+              <a:t>i</a:t>
+            </a:r>
+            <a:endParaRPr lang="en-US" sz="900" dirty="0"/>
+          </a:p>
+        </p:txBody>
+      </p:sp>
+      <p:sp>
+        <p:nvSpPr>
+          <p:cNvPr id="58" name="Shape 56"/>
+          <p:cNvSpPr/>
+          <p:nvPr/>
+        </p:nvSpPr>
+        <p:spPr>
+          <a:xfrm>
+            <a:off x="7759598" y="4169664"/>
+            <a:ext cx="676656" cy="475488"/>
+          </a:xfrm>
+          <a:prstGeom prst="rect">
+            <a:avLst>
+              <a:gd name="adj" fmla="val 7692"/>
+            </a:avLst>
+          </a:prstGeom>
+          <a:solidFill>
+            <a:srgbClr val="FFFFFF"/>
+          </a:solidFill>
+          <a:ln w="12700">
+            <a:solidFill>
+              <a:srgbClr val="DB2777"/>
+            </a:solidFill>
+            <a:prstDash val="solid"/>
+          </a:ln>
+        </p:spPr>
+      </p:sp>
+      <p:sp>
+        <p:nvSpPr>
+          <p:cNvPr id="59" name="Text 57"/>
+          <p:cNvSpPr/>
+          <p:nvPr/>
+        </p:nvSpPr>
+        <p:spPr>
+          <a:xfrm>
+            <a:off x="7759598" y="4169664"/>
+            <a:ext cx="676656" cy="475488"/>
+          </a:xfrm>
+          <a:prstGeom prst="rect">
+            <a:avLst/>
+          </a:prstGeom>
+          <a:noFill/>
+          <a:ln/>
+        </p:spPr>
+        <p:txBody>
+          <a:bodyPr wrap="square" lIns="0" tIns="0" rIns="0" bIns="0" rtlCol="0" anchor="ctr"/>
+          <a:lstStyle/>
+          <a:p>
+            <a:pPr algn="ctr" indent="0" marL="0">
+              <a:buNone/>
+            </a:pPr>
+            <a:r>
+              <a:rPr lang="en-US" sz="900" b="1" dirty="0">
+                <a:solidFill>
+                  <a:srgbClr val="9D174D"/>
+                </a:solidFill>
+                <a:latin typeface="Trebuchet MS" pitchFamily="34" charset="0"/>
+                <a:ea typeface="Trebuchet MS" pitchFamily="34" charset="-122"/>
+                <a:cs typeface="Trebuchet MS" pitchFamily="34" charset="-120"/>
+              </a:rPr>
+              <a:t>ng</a:t>
             </a:r>
             <a:endParaRPr lang="en-US" sz="900" dirty="0"/>
           </a:p>
@@ -27364,7 +28267,7 @@
                 <a:ea typeface="Calibri" pitchFamily="34" charset="-122"/>
                 <a:cs typeface="Calibri" pitchFamily="34" charset="-120"/>
               </a:rPr>
-              <a:t>Word Labs  •  wordlabs.app  •  Root: 'rest' = stop, pause, remain still</a:t>
+              <a:t>Word Labs  •  wordlabs.app  •  Root: 'rest' = stop, remain, be still</a:t>
             </a:r>
             <a:endParaRPr lang="en-US" sz="800" dirty="0"/>
           </a:p>
@@ -27503,7 +28406,7 @@
                 <a:ea typeface="Trebuchet MS" pitchFamily="34" charset="-122"/>
                 <a:cs typeface="Trebuchet MS" pitchFamily="34" charset="-120"/>
               </a:rPr>
-              <a:t>unrest</a:t>
+              <a:t>arrest</a:t>
             </a:r>
             <a:endParaRPr lang="en-US" sz="2800" dirty="0"/>
           </a:p>
@@ -28191,7 +29094,7 @@
                 <a:ea typeface="Calibri" pitchFamily="34" charset="-122"/>
                 <a:cs typeface="Calibri" pitchFamily="34" charset="-120"/>
               </a:rPr>
-              <a:t>Word Labs  •  wordlabs.app  •  Root: 'rest' = stop, pause, remain still</a:t>
+              <a:t>Word Labs  •  wordlabs.app  •  Root: 'rest' = stop, remain, be still</a:t>
             </a:r>
             <a:endParaRPr lang="en-US" sz="800" dirty="0"/>
           </a:p>
@@ -28330,7 +29233,7 @@
                 <a:ea typeface="Trebuchet MS" pitchFamily="34" charset="-122"/>
                 <a:cs typeface="Trebuchet MS" pitchFamily="34" charset="-120"/>
               </a:rPr>
-              <a:t>unrest</a:t>
+              <a:t>arrest</a:t>
             </a:r>
             <a:endParaRPr lang="en-US" sz="2800" dirty="0"/>
           </a:p>
@@ -28469,7 +29372,7 @@
                 <a:ea typeface="Trebuchet MS" pitchFamily="34" charset="-122"/>
                 <a:cs typeface="Trebuchet MS" pitchFamily="34" charset="-120"/>
               </a:rPr>
-              <a:t>un</a:t>
+              <a:t>ar</a:t>
             </a:r>
             <a:endParaRPr lang="en-US" sz="1300" dirty="0"/>
           </a:p>
@@ -28508,7 +29411,7 @@
                 <a:ea typeface="Calibri" pitchFamily="34" charset="-122"/>
                 <a:cs typeface="Calibri" pitchFamily="34" charset="-120"/>
               </a:rPr>
-              <a:t>not, opposite of</a:t>
+              <a:t>to, towards</a:t>
             </a:r>
             <a:endParaRPr lang="en-US" sz="850" dirty="0"/>
           </a:p>
@@ -28516,7 +29419,46 @@
       </p:sp>
       <p:sp>
         <p:nvSpPr>
-          <p:cNvPr id="19" name="Shape 17"/>
+          <p:cNvPr id="19" name="Text 17"/>
+          <p:cNvSpPr/>
+          <p:nvPr/>
+        </p:nvSpPr>
+        <p:spPr>
+          <a:xfrm>
+            <a:off x="2938272" y="2752344"/>
+            <a:ext cx="1828800" cy="182880"/>
+          </a:xfrm>
+          <a:prstGeom prst="rect">
+            <a:avLst/>
+          </a:prstGeom>
+          <a:noFill/>
+          <a:ln/>
+        </p:spPr>
+        <p:txBody>
+          <a:bodyPr wrap="square" lIns="0" tIns="0" rIns="0" bIns="0" rtlCol="0" anchor="t"/>
+          <a:lstStyle/>
+          <a:p>
+            <a:pPr algn="ctr" indent="0" marL="0">
+              <a:buNone/>
+            </a:pPr>
+            <a:r>
+              <a:rPr lang="en-US" sz="700" i="1" dirty="0">
+                <a:solidFill>
+                  <a:srgbClr val="94A3B8"/>
+                </a:solidFill>
+                <a:latin typeface="Calibri" pitchFamily="34" charset="0"/>
+                <a:ea typeface="Calibri" pitchFamily="34" charset="-122"/>
+                <a:cs typeface="Calibri" pitchFamily="34" charset="-120"/>
+              </a:rPr>
+              <a:t>ad → ar before 'r'</a:t>
+            </a:r>
+            <a:endParaRPr lang="en-US" sz="700" dirty="0"/>
+          </a:p>
+        </p:txBody>
+      </p:sp>
+      <p:sp>
+        <p:nvSpPr>
+          <p:cNvPr id="20" name="Shape 18"/>
           <p:cNvSpPr/>
           <p:nvPr/>
         </p:nvSpPr>
@@ -28550,7 +29492,7 @@
       </p:sp>
       <p:sp>
         <p:nvSpPr>
-          <p:cNvPr id="20" name="Text 18"/>
+          <p:cNvPr id="21" name="Text 19"/>
           <p:cNvSpPr/>
           <p:nvPr/>
         </p:nvSpPr>
@@ -28589,7 +29531,7 @@
       </p:sp>
       <p:sp>
         <p:nvSpPr>
-          <p:cNvPr id="21" name="Text 19"/>
+          <p:cNvPr id="22" name="Text 20"/>
           <p:cNvSpPr/>
           <p:nvPr/>
         </p:nvSpPr>
@@ -28620,7 +29562,7 @@
                 <a:ea typeface="Calibri" pitchFamily="34" charset="-122"/>
                 <a:cs typeface="Calibri" pitchFamily="34" charset="-120"/>
               </a:rPr>
-              <a:t>stop, be still</a:t>
+              <a:t>stop, remain</a:t>
             </a:r>
             <a:endParaRPr lang="en-US" sz="850" dirty="0"/>
           </a:p>
@@ -28628,7 +29570,7 @@
       </p:sp>
       <p:sp>
         <p:nvSpPr>
-          <p:cNvPr id="22" name="Shape 20"/>
+          <p:cNvPr id="23" name="Shape 21"/>
           <p:cNvSpPr/>
           <p:nvPr/>
         </p:nvSpPr>
@@ -28655,7 +29597,7 @@
       </p:sp>
       <p:sp>
         <p:nvSpPr>
-          <p:cNvPr id="23" name="Text 21"/>
+          <p:cNvPr id="24" name="Text 22"/>
           <p:cNvSpPr/>
           <p:nvPr/>
         </p:nvSpPr>
@@ -28694,7 +29636,7 @@
       </p:sp>
       <p:sp>
         <p:nvSpPr>
-          <p:cNvPr id="24" name="Shape 22"/>
+          <p:cNvPr id="25" name="Shape 23"/>
           <p:cNvSpPr/>
           <p:nvPr/>
         </p:nvSpPr>
@@ -28721,7 +29663,7 @@
       </p:sp>
       <p:sp>
         <p:nvSpPr>
-          <p:cNvPr id="25" name="Text 23"/>
+          <p:cNvPr id="26" name="Text 24"/>
           <p:cNvSpPr/>
           <p:nvPr/>
         </p:nvSpPr>
@@ -28760,7 +29702,7 @@
       </p:sp>
       <p:sp>
         <p:nvSpPr>
-          <p:cNvPr id="26" name="Shape 24"/>
+          <p:cNvPr id="27" name="Shape 25"/>
           <p:cNvSpPr/>
           <p:nvPr/>
         </p:nvSpPr>
@@ -28787,7 +29729,7 @@
       </p:sp>
       <p:sp>
         <p:nvSpPr>
-          <p:cNvPr id="27" name="Text 25"/>
+          <p:cNvPr id="28" name="Text 26"/>
           <p:cNvSpPr/>
           <p:nvPr/>
         </p:nvSpPr>
@@ -28826,7 +29768,7 @@
       </p:sp>
       <p:sp>
         <p:nvSpPr>
-          <p:cNvPr id="28" name="Shape 26"/>
+          <p:cNvPr id="29" name="Shape 27"/>
           <p:cNvSpPr/>
           <p:nvPr/>
         </p:nvSpPr>
@@ -28853,7 +29795,7 @@
       </p:sp>
       <p:sp>
         <p:nvSpPr>
-          <p:cNvPr id="29" name="Text 27"/>
+          <p:cNvPr id="30" name="Text 28"/>
           <p:cNvSpPr/>
           <p:nvPr/>
         </p:nvSpPr>
@@ -29176,7 +30118,7 @@
                 <a:ea typeface="Calibri" pitchFamily="34" charset="-122"/>
                 <a:cs typeface="Calibri" pitchFamily="34" charset="-120"/>
               </a:rPr>
-              <a:t>Word Labs  •  wordlabs.app  •  Root: 'rest' = stop, pause, remain still</a:t>
+              <a:t>Word Labs  •  wordlabs.app  •  Root: 'rest' = stop, remain, be still</a:t>
             </a:r>
             <a:endParaRPr lang="en-US" sz="800" dirty="0"/>
           </a:p>
@@ -29315,7 +30257,7 @@
                 <a:ea typeface="Trebuchet MS" pitchFamily="34" charset="-122"/>
                 <a:cs typeface="Trebuchet MS" pitchFamily="34" charset="-120"/>
               </a:rPr>
-              <a:t>unrest</a:t>
+              <a:t>arrest</a:t>
             </a:r>
             <a:endParaRPr lang="en-US" sz="2800" dirty="0"/>
           </a:p>
@@ -29454,7 +30396,7 @@
                 <a:ea typeface="Trebuchet MS" pitchFamily="34" charset="-122"/>
                 <a:cs typeface="Trebuchet MS" pitchFamily="34" charset="-120"/>
               </a:rPr>
-              <a:t>un</a:t>
+              <a:t>ar</a:t>
             </a:r>
             <a:endParaRPr lang="en-US" sz="1300" dirty="0"/>
           </a:p>
@@ -29493,7 +30435,7 @@
                 <a:ea typeface="Calibri" pitchFamily="34" charset="-122"/>
                 <a:cs typeface="Calibri" pitchFamily="34" charset="-120"/>
               </a:rPr>
-              <a:t>not, opposite of</a:t>
+              <a:t>to, towards</a:t>
             </a:r>
             <a:endParaRPr lang="en-US" sz="850" dirty="0"/>
           </a:p>
@@ -29501,7 +30443,46 @@
       </p:sp>
       <p:sp>
         <p:nvSpPr>
-          <p:cNvPr id="19" name="Shape 17"/>
+          <p:cNvPr id="19" name="Text 17"/>
+          <p:cNvSpPr/>
+          <p:nvPr/>
+        </p:nvSpPr>
+        <p:spPr>
+          <a:xfrm>
+            <a:off x="2938272" y="2752344"/>
+            <a:ext cx="1828800" cy="182880"/>
+          </a:xfrm>
+          <a:prstGeom prst="rect">
+            <a:avLst/>
+          </a:prstGeom>
+          <a:noFill/>
+          <a:ln/>
+        </p:spPr>
+        <p:txBody>
+          <a:bodyPr wrap="square" lIns="0" tIns="0" rIns="0" bIns="0" rtlCol="0" anchor="t"/>
+          <a:lstStyle/>
+          <a:p>
+            <a:pPr algn="ctr" indent="0" marL="0">
+              <a:buNone/>
+            </a:pPr>
+            <a:r>
+              <a:rPr lang="en-US" sz="700" i="1" dirty="0">
+                <a:solidFill>
+                  <a:srgbClr val="94A3B8"/>
+                </a:solidFill>
+                <a:latin typeface="Calibri" pitchFamily="34" charset="0"/>
+                <a:ea typeface="Calibri" pitchFamily="34" charset="-122"/>
+                <a:cs typeface="Calibri" pitchFamily="34" charset="-120"/>
+              </a:rPr>
+              <a:t>ad → ar before 'r'</a:t>
+            </a:r>
+            <a:endParaRPr lang="en-US" sz="700" dirty="0"/>
+          </a:p>
+        </p:txBody>
+      </p:sp>
+      <p:sp>
+        <p:nvSpPr>
+          <p:cNvPr id="20" name="Shape 18"/>
           <p:cNvSpPr/>
           <p:nvPr/>
         </p:nvSpPr>
@@ -29535,7 +30516,7 @@
       </p:sp>
       <p:sp>
         <p:nvSpPr>
-          <p:cNvPr id="20" name="Text 18"/>
+          <p:cNvPr id="21" name="Text 19"/>
           <p:cNvSpPr/>
           <p:nvPr/>
         </p:nvSpPr>
@@ -29574,7 +30555,7 @@
       </p:sp>
       <p:sp>
         <p:nvSpPr>
-          <p:cNvPr id="21" name="Text 19"/>
+          <p:cNvPr id="22" name="Text 20"/>
           <p:cNvSpPr/>
           <p:nvPr/>
         </p:nvSpPr>
@@ -29605,7 +30586,7 @@
                 <a:ea typeface="Calibri" pitchFamily="34" charset="-122"/>
                 <a:cs typeface="Calibri" pitchFamily="34" charset="-120"/>
               </a:rPr>
-              <a:t>stop, be still</a:t>
+              <a:t>stop, remain</a:t>
             </a:r>
             <a:endParaRPr lang="en-US" sz="850" dirty="0"/>
           </a:p>
@@ -29613,7 +30594,7 @@
       </p:sp>
       <p:sp>
         <p:nvSpPr>
-          <p:cNvPr id="22" name="Shape 20"/>
+          <p:cNvPr id="23" name="Shape 21"/>
           <p:cNvSpPr/>
           <p:nvPr/>
         </p:nvSpPr>
@@ -29640,7 +30621,7 @@
       </p:sp>
       <p:sp>
         <p:nvSpPr>
-          <p:cNvPr id="23" name="Text 21"/>
+          <p:cNvPr id="24" name="Text 22"/>
           <p:cNvSpPr/>
           <p:nvPr/>
         </p:nvSpPr>
@@ -29679,7 +30660,7 @@
       </p:sp>
       <p:sp>
         <p:nvSpPr>
-          <p:cNvPr id="24" name="Shape 22"/>
+          <p:cNvPr id="25" name="Shape 23"/>
           <p:cNvSpPr/>
           <p:nvPr/>
         </p:nvSpPr>
@@ -29706,7 +30687,7 @@
       </p:sp>
       <p:sp>
         <p:nvSpPr>
-          <p:cNvPr id="25" name="Shape 23"/>
+          <p:cNvPr id="26" name="Shape 24"/>
           <p:cNvSpPr/>
           <p:nvPr/>
         </p:nvSpPr>
@@ -29733,7 +30714,7 @@
       </p:sp>
       <p:sp>
         <p:nvSpPr>
-          <p:cNvPr id="26" name="Text 24"/>
+          <p:cNvPr id="27" name="Text 25"/>
           <p:cNvSpPr/>
           <p:nvPr/>
         </p:nvSpPr>
@@ -29764,7 +30745,7 @@
                 <a:ea typeface="Trebuchet MS" pitchFamily="34" charset="-122"/>
                 <a:cs typeface="Trebuchet MS" pitchFamily="34" charset="-120"/>
               </a:rPr>
-              <a:t>un</a:t>
+              <a:t>ar</a:t>
             </a:r>
             <a:endParaRPr lang="en-US" sz="1400" dirty="0"/>
           </a:p>
@@ -29772,7 +30753,7 @@
       </p:sp>
       <p:sp>
         <p:nvSpPr>
-          <p:cNvPr id="27" name="Text 25"/>
+          <p:cNvPr id="28" name="Text 26"/>
           <p:cNvSpPr/>
           <p:nvPr/>
         </p:nvSpPr>
@@ -29811,7 +30792,7 @@
       </p:sp>
       <p:sp>
         <p:nvSpPr>
-          <p:cNvPr id="28" name="Shape 26"/>
+          <p:cNvPr id="29" name="Shape 27"/>
           <p:cNvSpPr/>
           <p:nvPr/>
         </p:nvSpPr>
@@ -29838,7 +30819,7 @@
       </p:sp>
       <p:sp>
         <p:nvSpPr>
-          <p:cNvPr id="29" name="Text 27"/>
+          <p:cNvPr id="30" name="Text 28"/>
           <p:cNvSpPr/>
           <p:nvPr/>
         </p:nvSpPr>
@@ -29877,7 +30858,7 @@
       </p:sp>
       <p:sp>
         <p:nvSpPr>
-          <p:cNvPr id="30" name="Shape 28"/>
+          <p:cNvPr id="31" name="Shape 29"/>
           <p:cNvSpPr/>
           <p:nvPr/>
         </p:nvSpPr>
@@ -29904,7 +30885,7 @@
       </p:sp>
       <p:sp>
         <p:nvSpPr>
-          <p:cNvPr id="31" name="Text 29"/>
+          <p:cNvPr id="32" name="Text 30"/>
           <p:cNvSpPr/>
           <p:nvPr/>
         </p:nvSpPr>
@@ -29943,7 +30924,7 @@
       </p:sp>
       <p:sp>
         <p:nvSpPr>
-          <p:cNvPr id="32" name="Shape 30"/>
+          <p:cNvPr id="33" name="Shape 31"/>
           <p:cNvSpPr/>
           <p:nvPr/>
         </p:nvSpPr>
@@ -29970,7 +30951,7 @@
       </p:sp>
       <p:sp>
         <p:nvSpPr>
-          <p:cNvPr id="33" name="Text 31"/>
+          <p:cNvPr id="34" name="Text 32"/>
           <p:cNvSpPr/>
           <p:nvPr/>
         </p:nvSpPr>
@@ -30293,7 +31274,7 @@
                 <a:ea typeface="Calibri" pitchFamily="34" charset="-122"/>
                 <a:cs typeface="Calibri" pitchFamily="34" charset="-120"/>
               </a:rPr>
-              <a:t>Word Labs  •  wordlabs.app  •  Root: 'rest' = stop, pause, remain still</a:t>
+              <a:t>Word Labs  •  wordlabs.app  •  Root: 'rest' = stop, remain, be still</a:t>
             </a:r>
             <a:endParaRPr lang="en-US" sz="800" dirty="0"/>
           </a:p>
@@ -30432,7 +31413,7 @@
                 <a:ea typeface="Trebuchet MS" pitchFamily="34" charset="-122"/>
                 <a:cs typeface="Trebuchet MS" pitchFamily="34" charset="-120"/>
               </a:rPr>
-              <a:t>unrest</a:t>
+              <a:t>arrest</a:t>
             </a:r>
             <a:endParaRPr lang="en-US" sz="2800" dirty="0"/>
           </a:p>
@@ -30571,7 +31552,7 @@
                 <a:ea typeface="Trebuchet MS" pitchFamily="34" charset="-122"/>
                 <a:cs typeface="Trebuchet MS" pitchFamily="34" charset="-120"/>
               </a:rPr>
-              <a:t>un</a:t>
+              <a:t>ar</a:t>
             </a:r>
             <a:endParaRPr lang="en-US" sz="1300" dirty="0"/>
           </a:p>
@@ -30610,7 +31591,7 @@
                 <a:ea typeface="Calibri" pitchFamily="34" charset="-122"/>
                 <a:cs typeface="Calibri" pitchFamily="34" charset="-120"/>
               </a:rPr>
-              <a:t>not, opposite of</a:t>
+              <a:t>to, towards</a:t>
             </a:r>
             <a:endParaRPr lang="en-US" sz="850" dirty="0"/>
           </a:p>
@@ -30618,7 +31599,46 @@
       </p:sp>
       <p:sp>
         <p:nvSpPr>
-          <p:cNvPr id="19" name="Shape 17"/>
+          <p:cNvPr id="19" name="Text 17"/>
+          <p:cNvSpPr/>
+          <p:nvPr/>
+        </p:nvSpPr>
+        <p:spPr>
+          <a:xfrm>
+            <a:off x="2938272" y="2752344"/>
+            <a:ext cx="1828800" cy="182880"/>
+          </a:xfrm>
+          <a:prstGeom prst="rect">
+            <a:avLst/>
+          </a:prstGeom>
+          <a:noFill/>
+          <a:ln/>
+        </p:spPr>
+        <p:txBody>
+          <a:bodyPr wrap="square" lIns="0" tIns="0" rIns="0" bIns="0" rtlCol="0" anchor="t"/>
+          <a:lstStyle/>
+          <a:p>
+            <a:pPr algn="ctr" indent="0" marL="0">
+              <a:buNone/>
+            </a:pPr>
+            <a:r>
+              <a:rPr lang="en-US" sz="700" i="1" dirty="0">
+                <a:solidFill>
+                  <a:srgbClr val="94A3B8"/>
+                </a:solidFill>
+                <a:latin typeface="Calibri" pitchFamily="34" charset="0"/>
+                <a:ea typeface="Calibri" pitchFamily="34" charset="-122"/>
+                <a:cs typeface="Calibri" pitchFamily="34" charset="-120"/>
+              </a:rPr>
+              <a:t>ad → ar before 'r'</a:t>
+            </a:r>
+            <a:endParaRPr lang="en-US" sz="700" dirty="0"/>
+          </a:p>
+        </p:txBody>
+      </p:sp>
+      <p:sp>
+        <p:nvSpPr>
+          <p:cNvPr id="20" name="Shape 18"/>
           <p:cNvSpPr/>
           <p:nvPr/>
         </p:nvSpPr>
@@ -30652,7 +31672,7 @@
       </p:sp>
       <p:sp>
         <p:nvSpPr>
-          <p:cNvPr id="20" name="Text 18"/>
+          <p:cNvPr id="21" name="Text 19"/>
           <p:cNvSpPr/>
           <p:nvPr/>
         </p:nvSpPr>
@@ -30691,7 +31711,7 @@
       </p:sp>
       <p:sp>
         <p:nvSpPr>
-          <p:cNvPr id="21" name="Text 19"/>
+          <p:cNvPr id="22" name="Text 20"/>
           <p:cNvSpPr/>
           <p:nvPr/>
         </p:nvSpPr>
@@ -30722,7 +31742,7 @@
                 <a:ea typeface="Calibri" pitchFamily="34" charset="-122"/>
                 <a:cs typeface="Calibri" pitchFamily="34" charset="-120"/>
               </a:rPr>
-              <a:t>stop, be still</a:t>
+              <a:t>stop, remain</a:t>
             </a:r>
             <a:endParaRPr lang="en-US" sz="850" dirty="0"/>
           </a:p>
@@ -30730,7 +31750,7 @@
       </p:sp>
       <p:sp>
         <p:nvSpPr>
-          <p:cNvPr id="22" name="Shape 20"/>
+          <p:cNvPr id="23" name="Shape 21"/>
           <p:cNvSpPr/>
           <p:nvPr/>
         </p:nvSpPr>
@@ -30757,7 +31777,7 @@
       </p:sp>
       <p:sp>
         <p:nvSpPr>
-          <p:cNvPr id="23" name="Text 21"/>
+          <p:cNvPr id="24" name="Text 22"/>
           <p:cNvSpPr/>
           <p:nvPr/>
         </p:nvSpPr>
@@ -30796,7 +31816,7 @@
       </p:sp>
       <p:sp>
         <p:nvSpPr>
-          <p:cNvPr id="24" name="Shape 22"/>
+          <p:cNvPr id="25" name="Shape 23"/>
           <p:cNvSpPr/>
           <p:nvPr/>
         </p:nvSpPr>
@@ -30823,7 +31843,7 @@
       </p:sp>
       <p:sp>
         <p:nvSpPr>
-          <p:cNvPr id="25" name="Shape 23"/>
+          <p:cNvPr id="26" name="Shape 24"/>
           <p:cNvSpPr/>
           <p:nvPr/>
         </p:nvSpPr>
@@ -30850,7 +31870,7 @@
       </p:sp>
       <p:sp>
         <p:nvSpPr>
-          <p:cNvPr id="26" name="Text 24"/>
+          <p:cNvPr id="27" name="Text 25"/>
           <p:cNvSpPr/>
           <p:nvPr/>
         </p:nvSpPr>
@@ -30881,7 +31901,7 @@
                 <a:ea typeface="Trebuchet MS" pitchFamily="34" charset="-122"/>
                 <a:cs typeface="Trebuchet MS" pitchFamily="34" charset="-120"/>
               </a:rPr>
-              <a:t>un</a:t>
+              <a:t>ar</a:t>
             </a:r>
             <a:endParaRPr lang="en-US" sz="1400" dirty="0"/>
           </a:p>
@@ -30889,7 +31909,7 @@
       </p:sp>
       <p:sp>
         <p:nvSpPr>
-          <p:cNvPr id="27" name="Text 25"/>
+          <p:cNvPr id="28" name="Text 26"/>
           <p:cNvSpPr/>
           <p:nvPr/>
         </p:nvSpPr>
@@ -30928,7 +31948,7 @@
       </p:sp>
       <p:sp>
         <p:nvSpPr>
-          <p:cNvPr id="28" name="Shape 26"/>
+          <p:cNvPr id="29" name="Shape 27"/>
           <p:cNvSpPr/>
           <p:nvPr/>
         </p:nvSpPr>
@@ -30955,7 +31975,7 @@
       </p:sp>
       <p:sp>
         <p:nvSpPr>
-          <p:cNvPr id="29" name="Text 27"/>
+          <p:cNvPr id="30" name="Text 28"/>
           <p:cNvSpPr/>
           <p:nvPr/>
         </p:nvSpPr>
@@ -30994,7 +32014,7 @@
       </p:sp>
       <p:sp>
         <p:nvSpPr>
-          <p:cNvPr id="30" name="Shape 28"/>
+          <p:cNvPr id="31" name="Shape 29"/>
           <p:cNvSpPr/>
           <p:nvPr/>
         </p:nvSpPr>
@@ -31021,7 +32041,7 @@
       </p:sp>
       <p:sp>
         <p:nvSpPr>
-          <p:cNvPr id="31" name="Text 29"/>
+          <p:cNvPr id="32" name="Text 30"/>
           <p:cNvSpPr/>
           <p:nvPr/>
         </p:nvSpPr>
@@ -31060,7 +32080,7 @@
       </p:sp>
       <p:sp>
         <p:nvSpPr>
-          <p:cNvPr id="32" name="Shape 30"/>
+          <p:cNvPr id="33" name="Shape 31"/>
           <p:cNvSpPr/>
           <p:nvPr/>
         </p:nvSpPr>
@@ -31087,13 +32107,13 @@
       </p:sp>
       <p:sp>
         <p:nvSpPr>
-          <p:cNvPr id="33" name="Shape 31"/>
-          <p:cNvSpPr/>
-          <p:nvPr/>
-        </p:nvSpPr>
-        <p:spPr>
-          <a:xfrm>
-            <a:off x="2254649" y="4169664"/>
+          <p:cNvPr id="34" name="Shape 32"/>
+          <p:cNvSpPr/>
+          <p:nvPr/>
+        </p:nvSpPr>
+        <p:spPr>
+          <a:xfrm>
+            <a:off x="2427732" y="4169664"/>
             <a:ext cx="685800" cy="475488"/>
           </a:xfrm>
           <a:prstGeom prst="rect">
@@ -31114,13 +32134,13 @@
       </p:sp>
       <p:sp>
         <p:nvSpPr>
-          <p:cNvPr id="34" name="Text 32"/>
-          <p:cNvSpPr/>
-          <p:nvPr/>
-        </p:nvSpPr>
-        <p:spPr>
-          <a:xfrm>
-            <a:off x="2254649" y="4169664"/>
+          <p:cNvPr id="35" name="Text 33"/>
+          <p:cNvSpPr/>
+          <p:nvPr/>
+        </p:nvSpPr>
+        <p:spPr>
+          <a:xfrm>
+            <a:off x="2427732" y="4169664"/>
             <a:ext cx="685800" cy="475488"/>
           </a:xfrm>
           <a:prstGeom prst="rect">
@@ -31145,7 +32165,7 @@
                 <a:ea typeface="Trebuchet MS" pitchFamily="34" charset="-122"/>
                 <a:cs typeface="Trebuchet MS" pitchFamily="34" charset="-120"/>
               </a:rPr>
-              <a:t>u</a:t>
+              <a:t>ar</a:t>
             </a:r>
             <a:endParaRPr lang="en-US" sz="900" dirty="0"/>
           </a:p>
@@ -31153,13 +32173,13 @@
       </p:sp>
       <p:sp>
         <p:nvSpPr>
-          <p:cNvPr id="35" name="Shape 33"/>
-          <p:cNvSpPr/>
-          <p:nvPr/>
-        </p:nvSpPr>
-        <p:spPr>
-          <a:xfrm>
-            <a:off x="3293146" y="4169664"/>
+          <p:cNvPr id="36" name="Shape 34"/>
+          <p:cNvSpPr/>
+          <p:nvPr/>
+        </p:nvSpPr>
+        <p:spPr>
+          <a:xfrm>
+            <a:off x="3639312" y="4169664"/>
             <a:ext cx="685800" cy="475488"/>
           </a:xfrm>
           <a:prstGeom prst="rect">
@@ -31180,13 +32200,13 @@
       </p:sp>
       <p:sp>
         <p:nvSpPr>
-          <p:cNvPr id="36" name="Text 34"/>
-          <p:cNvSpPr/>
-          <p:nvPr/>
-        </p:nvSpPr>
-        <p:spPr>
-          <a:xfrm>
-            <a:off x="3293146" y="4169664"/>
+          <p:cNvPr id="37" name="Text 35"/>
+          <p:cNvSpPr/>
+          <p:nvPr/>
+        </p:nvSpPr>
+        <p:spPr>
+          <a:xfrm>
+            <a:off x="3639312" y="4169664"/>
             <a:ext cx="685800" cy="475488"/>
           </a:xfrm>
           <a:prstGeom prst="rect">
@@ -31211,7 +32231,7 @@
                 <a:ea typeface="Trebuchet MS" pitchFamily="34" charset="-122"/>
                 <a:cs typeface="Trebuchet MS" pitchFamily="34" charset="-120"/>
               </a:rPr>
-              <a:t>n</a:t>
+              <a:t>r</a:t>
             </a:r>
             <a:endParaRPr lang="en-US" sz="900" dirty="0"/>
           </a:p>
@@ -31219,13 +32239,13 @@
       </p:sp>
       <p:sp>
         <p:nvSpPr>
-          <p:cNvPr id="37" name="Shape 35"/>
-          <p:cNvSpPr/>
-          <p:nvPr/>
-        </p:nvSpPr>
-        <p:spPr>
-          <a:xfrm>
-            <a:off x="4331643" y="4169664"/>
+          <p:cNvPr id="38" name="Shape 36"/>
+          <p:cNvSpPr/>
+          <p:nvPr/>
+        </p:nvSpPr>
+        <p:spPr>
+          <a:xfrm>
+            <a:off x="4850892" y="4169664"/>
             <a:ext cx="685800" cy="475488"/>
           </a:xfrm>
           <a:prstGeom prst="rect">
@@ -31246,13 +32266,13 @@
       </p:sp>
       <p:sp>
         <p:nvSpPr>
-          <p:cNvPr id="38" name="Text 36"/>
-          <p:cNvSpPr/>
-          <p:nvPr/>
-        </p:nvSpPr>
-        <p:spPr>
-          <a:xfrm>
-            <a:off x="4331643" y="4169664"/>
+          <p:cNvPr id="39" name="Text 37"/>
+          <p:cNvSpPr/>
+          <p:nvPr/>
+        </p:nvSpPr>
+        <p:spPr>
+          <a:xfrm>
+            <a:off x="4850892" y="4169664"/>
             <a:ext cx="685800" cy="475488"/>
           </a:xfrm>
           <a:prstGeom prst="rect">
@@ -31277,7 +32297,7 @@
                 <a:ea typeface="Trebuchet MS" pitchFamily="34" charset="-122"/>
                 <a:cs typeface="Trebuchet MS" pitchFamily="34" charset="-120"/>
               </a:rPr>
-              <a:t>r</a:t>
+              <a:t>e</a:t>
             </a:r>
             <a:endParaRPr lang="en-US" sz="900" dirty="0"/>
           </a:p>
@@ -31285,13 +32305,13 @@
       </p:sp>
       <p:sp>
         <p:nvSpPr>
-          <p:cNvPr id="39" name="Shape 37"/>
-          <p:cNvSpPr/>
-          <p:nvPr/>
-        </p:nvSpPr>
-        <p:spPr>
-          <a:xfrm>
-            <a:off x="5370141" y="4169664"/>
+          <p:cNvPr id="40" name="Shape 38"/>
+          <p:cNvSpPr/>
+          <p:nvPr/>
+        </p:nvSpPr>
+        <p:spPr>
+          <a:xfrm>
+            <a:off x="6062472" y="4169664"/>
             <a:ext cx="685800" cy="475488"/>
           </a:xfrm>
           <a:prstGeom prst="rect">
@@ -31312,13 +32332,13 @@
       </p:sp>
       <p:sp>
         <p:nvSpPr>
-          <p:cNvPr id="40" name="Text 38"/>
-          <p:cNvSpPr/>
-          <p:nvPr/>
-        </p:nvSpPr>
-        <p:spPr>
-          <a:xfrm>
-            <a:off x="5370141" y="4169664"/>
+          <p:cNvPr id="41" name="Text 39"/>
+          <p:cNvSpPr/>
+          <p:nvPr/>
+        </p:nvSpPr>
+        <p:spPr>
+          <a:xfrm>
+            <a:off x="6062472" y="4169664"/>
             <a:ext cx="685800" cy="475488"/>
           </a:xfrm>
           <a:prstGeom prst="rect">
@@ -31343,7 +32363,7 @@
                 <a:ea typeface="Trebuchet MS" pitchFamily="34" charset="-122"/>
                 <a:cs typeface="Trebuchet MS" pitchFamily="34" charset="-120"/>
               </a:rPr>
-              <a:t>e</a:t>
+              <a:t>s</a:t>
             </a:r>
             <a:endParaRPr lang="en-US" sz="900" dirty="0"/>
           </a:p>
@@ -31351,13 +32371,13 @@
       </p:sp>
       <p:sp>
         <p:nvSpPr>
-          <p:cNvPr id="41" name="Shape 39"/>
-          <p:cNvSpPr/>
-          <p:nvPr/>
-        </p:nvSpPr>
-        <p:spPr>
-          <a:xfrm>
-            <a:off x="6408638" y="4169664"/>
+          <p:cNvPr id="42" name="Shape 40"/>
+          <p:cNvSpPr/>
+          <p:nvPr/>
+        </p:nvSpPr>
+        <p:spPr>
+          <a:xfrm>
+            <a:off x="7274052" y="4169664"/>
             <a:ext cx="685800" cy="475488"/>
           </a:xfrm>
           <a:prstGeom prst="rect">
@@ -31378,79 +32398,13 @@
       </p:sp>
       <p:sp>
         <p:nvSpPr>
-          <p:cNvPr id="42" name="Text 40"/>
-          <p:cNvSpPr/>
-          <p:nvPr/>
-        </p:nvSpPr>
-        <p:spPr>
-          <a:xfrm>
-            <a:off x="6408638" y="4169664"/>
-            <a:ext cx="685800" cy="475488"/>
-          </a:xfrm>
-          <a:prstGeom prst="rect">
-            <a:avLst/>
-          </a:prstGeom>
-          <a:noFill/>
-          <a:ln/>
-        </p:spPr>
-        <p:txBody>
-          <a:bodyPr wrap="square" lIns="0" tIns="0" rIns="0" bIns="0" rtlCol="0" anchor="ctr"/>
-          <a:lstStyle/>
-          <a:p>
-            <a:pPr algn="ctr" indent="0" marL="0">
-              <a:buNone/>
-            </a:pPr>
-            <a:r>
-              <a:rPr lang="en-US" sz="900" b="1" dirty="0">
-                <a:solidFill>
-                  <a:srgbClr val="9D174D"/>
-                </a:solidFill>
-                <a:latin typeface="Trebuchet MS" pitchFamily="34" charset="0"/>
-                <a:ea typeface="Trebuchet MS" pitchFamily="34" charset="-122"/>
-                <a:cs typeface="Trebuchet MS" pitchFamily="34" charset="-120"/>
-              </a:rPr>
-              <a:t>s</a:t>
-            </a:r>
-            <a:endParaRPr lang="en-US" sz="900" dirty="0"/>
-          </a:p>
-        </p:txBody>
-      </p:sp>
-      <p:sp>
-        <p:nvSpPr>
-          <p:cNvPr id="43" name="Shape 41"/>
-          <p:cNvSpPr/>
-          <p:nvPr/>
-        </p:nvSpPr>
-        <p:spPr>
-          <a:xfrm>
-            <a:off x="7447135" y="4169664"/>
-            <a:ext cx="685800" cy="475488"/>
-          </a:xfrm>
-          <a:prstGeom prst="rect">
-            <a:avLst>
-              <a:gd name="adj" fmla="val 7692"/>
-            </a:avLst>
-          </a:prstGeom>
-          <a:solidFill>
-            <a:srgbClr val="FFFFFF"/>
-          </a:solidFill>
-          <a:ln w="12700">
-            <a:solidFill>
-              <a:srgbClr val="DB2777"/>
-            </a:solidFill>
-            <a:prstDash val="solid"/>
-          </a:ln>
-        </p:spPr>
-      </p:sp>
-      <p:sp>
-        <p:nvSpPr>
-          <p:cNvPr id="44" name="Text 42"/>
-          <p:cNvSpPr/>
-          <p:nvPr/>
-        </p:nvSpPr>
-        <p:spPr>
-          <a:xfrm>
-            <a:off x="7447135" y="4169664"/>
+          <p:cNvPr id="43" name="Text 41"/>
+          <p:cNvSpPr/>
+          <p:nvPr/>
+        </p:nvSpPr>
+        <p:spPr>
+          <a:xfrm>
+            <a:off x="7274052" y="4169664"/>
             <a:ext cx="685800" cy="475488"/>
           </a:xfrm>
           <a:prstGeom prst="rect">
@@ -31767,7 +32721,7 @@
                 <a:ea typeface="Calibri" pitchFamily="34" charset="-122"/>
                 <a:cs typeface="Calibri" pitchFamily="34" charset="-120"/>
               </a:rPr>
-              <a:t>Word Labs  •  wordlabs.app  •  Root: 'rest' = stop, pause, remain still</a:t>
+              <a:t>Word Labs  •  wordlabs.app  •  Root: 'rest' = stop, remain, be still</a:t>
             </a:r>
             <a:endParaRPr lang="en-US" sz="800" dirty="0"/>
           </a:p>
@@ -32936,7 +33890,7 @@
                 <a:ea typeface="Calibri" pitchFamily="34" charset="-122"/>
                 <a:cs typeface="Calibri" pitchFamily="34" charset="-120"/>
               </a:rPr>
-              <a:t>Word Labs  •  wordlabs.app  •  Root: 'rest' = stop, pause, remain still</a:t>
+              <a:t>Word Labs  •  wordlabs.app  •  Root: 'rest' = stop, remain, be still</a:t>
             </a:r>
             <a:endParaRPr lang="en-US" sz="800" dirty="0"/>
           </a:p>
@@ -33237,7 +34191,7 @@
                 <a:ea typeface="Trebuchet MS" pitchFamily="34" charset="-122"/>
                 <a:cs typeface="Trebuchet MS" pitchFamily="34" charset="-120"/>
               </a:rPr>
-              <a:t>un-</a:t>
+              <a:t>ar-</a:t>
             </a:r>
             <a:endParaRPr lang="en-US" sz="1300" dirty="0"/>
           </a:p>
@@ -33365,7 +34319,7 @@
                 <a:ea typeface="Trebuchet MS" pitchFamily="34" charset="-122"/>
                 <a:cs typeface="Trebuchet MS" pitchFamily="34" charset="-120"/>
               </a:rPr>
-              <a:t>-ed</a:t>
+              <a:t>-ful</a:t>
             </a:r>
             <a:endParaRPr lang="en-US" sz="1300" dirty="0"/>
           </a:p>
@@ -33429,7 +34383,7 @@
                 <a:ea typeface="Trebuchet MS" pitchFamily="34" charset="-122"/>
                 <a:cs typeface="Trebuchet MS" pitchFamily="34" charset="-120"/>
               </a:rPr>
-              <a:t>ar-</a:t>
+              <a:t>for-</a:t>
             </a:r>
             <a:endParaRPr lang="en-US" sz="1300" dirty="0"/>
           </a:p>
@@ -33518,7 +34472,7 @@
                 <a:ea typeface="Trebuchet MS" pitchFamily="34" charset="-122"/>
                 <a:cs typeface="Trebuchet MS" pitchFamily="34" charset="-120"/>
               </a:rPr>
-              <a:t>-ing</a:t>
+              <a:t>-less</a:t>
             </a:r>
             <a:endParaRPr lang="en-US" sz="1300" dirty="0"/>
           </a:p>
@@ -33582,7 +34536,7 @@
                 <a:ea typeface="Trebuchet MS" pitchFamily="34" charset="-122"/>
                 <a:cs typeface="Trebuchet MS" pitchFamily="34" charset="-120"/>
               </a:rPr>
-              <a:t>for-</a:t>
+              <a:t>in-</a:t>
             </a:r>
             <a:endParaRPr lang="en-US" sz="1300" dirty="0"/>
           </a:p>
@@ -33671,7 +34625,7 @@
                 <a:ea typeface="Trebuchet MS" pitchFamily="34" charset="-122"/>
                 <a:cs typeface="Trebuchet MS" pitchFamily="34" charset="-120"/>
               </a:rPr>
-              <a:t>-ful</a:t>
+              <a:t>-ing</a:t>
             </a:r>
             <a:endParaRPr lang="en-US" sz="1300" dirty="0"/>
           </a:p>
@@ -33735,7 +34689,7 @@
                 <a:ea typeface="Trebuchet MS" pitchFamily="34" charset="-122"/>
                 <a:cs typeface="Trebuchet MS" pitchFamily="34" charset="-120"/>
               </a:rPr>
-              <a:t>back-</a:t>
+              <a:t>un-</a:t>
             </a:r>
             <a:endParaRPr lang="en-US" sz="1300" dirty="0"/>
           </a:p>
@@ -33824,7 +34778,7 @@
                 <a:ea typeface="Trebuchet MS" pitchFamily="34" charset="-122"/>
                 <a:cs typeface="Trebuchet MS" pitchFamily="34" charset="-120"/>
               </a:rPr>
-              <a:t>-less</a:t>
+              <a:t>-ed</a:t>
             </a:r>
             <a:endParaRPr lang="en-US" sz="1300" dirty="0"/>
           </a:p>
@@ -33888,7 +34842,7 @@
                 <a:ea typeface="Trebuchet MS" pitchFamily="34" charset="-122"/>
                 <a:cs typeface="Trebuchet MS" pitchFamily="34" charset="-120"/>
               </a:rPr>
-              <a:t>head-</a:t>
+              <a:t>re-</a:t>
             </a:r>
             <a:endParaRPr lang="en-US" sz="1300" dirty="0"/>
           </a:p>
@@ -33977,7 +34931,7 @@
                 <a:ea typeface="Trebuchet MS" pitchFamily="34" charset="-122"/>
                 <a:cs typeface="Trebuchet MS" pitchFamily="34" charset="-120"/>
               </a:rPr>
-              <a:t>-ore</a:t>
+              <a:t>-ive</a:t>
             </a:r>
             <a:endParaRPr lang="en-US" sz="1300" dirty="0"/>
           </a:p>
@@ -34280,7 +35234,7 @@
                 <a:ea typeface="Trebuchet MS" pitchFamily="34" charset="-122"/>
                 <a:cs typeface="Trebuchet MS" pitchFamily="34" charset="-120"/>
               </a:rPr>
-              <a:t>resting</a:t>
+              <a:t>forest</a:t>
             </a:r>
             <a:endParaRPr lang="en-US" sz="1200" dirty="0"/>
           </a:p>
@@ -34346,7 +35300,7 @@
                 <a:ea typeface="Trebuchet MS" pitchFamily="34" charset="-122"/>
                 <a:cs typeface="Trebuchet MS" pitchFamily="34" charset="-120"/>
               </a:rPr>
-              <a:t>restore</a:t>
+              <a:t>resting</a:t>
             </a:r>
             <a:endParaRPr lang="en-US" sz="1200" dirty="0"/>
           </a:p>
@@ -34412,7 +35366,7 @@
                 <a:ea typeface="Trebuchet MS" pitchFamily="34" charset="-122"/>
                 <a:cs typeface="Trebuchet MS" pitchFamily="34" charset="-120"/>
               </a:rPr>
-              <a:t>forest</a:t>
+              <a:t>interest</a:t>
             </a:r>
             <a:endParaRPr lang="en-US" sz="1200" dirty="0"/>
           </a:p>
@@ -34478,7 +35432,7 @@
                 <a:ea typeface="Trebuchet MS" pitchFamily="34" charset="-122"/>
                 <a:cs typeface="Trebuchet MS" pitchFamily="34" charset="-120"/>
               </a:rPr>
-              <a:t>arrested</a:t>
+              <a:t>unrest</a:t>
             </a:r>
             <a:endParaRPr lang="en-US" sz="1200" dirty="0"/>
           </a:p>
@@ -34544,7 +35498,7 @@
                 <a:ea typeface="Trebuchet MS" pitchFamily="34" charset="-122"/>
                 <a:cs typeface="Trebuchet MS" pitchFamily="34" charset="-120"/>
               </a:rPr>
-              <a:t>unrest</a:t>
+              <a:t>arest</a:t>
             </a:r>
             <a:endParaRPr lang="en-US" sz="1200" dirty="0"/>
           </a:p>
@@ -34836,7 +35790,7 @@
                 <a:ea typeface="Calibri" pitchFamily="34" charset="-122"/>
                 <a:cs typeface="Calibri" pitchFamily="34" charset="-120"/>
               </a:rPr>
-              <a:t>Word Labs  •  wordlabs.app  •  Root: 'rest' = stop, pause, remain still</a:t>
+              <a:t>Word Labs  •  wordlabs.app  •  Root: 'rest' = stop, remain, be still</a:t>
             </a:r>
             <a:endParaRPr lang="en-US" sz="800" dirty="0"/>
           </a:p>
@@ -35000,7 +35954,7 @@
                 <a:ea typeface="Calibri" pitchFamily="34" charset="-122"/>
                 <a:cs typeface="Calibri" pitchFamily="34" charset="-120"/>
               </a:rPr>
-              <a:t>The core part of a word carrying its basic meaning. For example, 'rest' means 'stop, pause, remain still'.</a:t>
+              <a:t>The core part of a word carrying its basic meaning. For example, 'rest' means 'stop, remain, be still'.</a:t>
             </a:r>
             <a:endParaRPr lang="en-US" sz="1350" dirty="0"/>
           </a:p>
@@ -35620,7 +36574,7 @@
                 <a:ea typeface="Calibri" pitchFamily="34" charset="-122"/>
                 <a:cs typeface="Calibri" pitchFamily="34" charset="-120"/>
               </a:rPr>
-              <a:t>Word Labs  •  wordlabs.app  •  Root: 'rest' = stop, pause, remain still</a:t>
+              <a:t>Word Labs  •  wordlabs.app  •  Root: 'rest' = stop, remain, be still</a:t>
             </a:r>
             <a:endParaRPr lang="en-US" sz="800" dirty="0"/>
           </a:p>
@@ -35732,7 +36686,7 @@
                 <a:ea typeface="Calibri" pitchFamily="34" charset="-122"/>
                 <a:cs typeface="Calibri" pitchFamily="34" charset="-120"/>
               </a:rPr>
-              <a:t>1.  The word 'restless' means unable to relax or keep still.</a:t>
+              <a:t>1.  Adding '-ful' to 'rest' makes the word 'restful', meaning calm and peaceful.</a:t>
             </a:r>
             <a:endParaRPr lang="en-US" sz="1300" dirty="0"/>
           </a:p>
@@ -35871,7 +36825,7 @@
                 <a:ea typeface="Calibri" pitchFamily="34" charset="-122"/>
                 <a:cs typeface="Calibri" pitchFamily="34" charset="-120"/>
               </a:rPr>
-              <a:t>2.  The root 'rest' comes from the ancient Greek language.</a:t>
+              <a:t>2.  The root 'rest' can be found in the word 'restless'.</a:t>
             </a:r>
             <a:endParaRPr lang="en-US" sz="1300" dirty="0"/>
           </a:p>
@@ -35894,11 +36848,11 @@
             </a:avLst>
           </a:prstGeom>
           <a:solidFill>
-            <a:srgbClr val="FEE2E2"/>
-          </a:solidFill>
-          <a:ln w="12700">
-            <a:solidFill>
-              <a:srgbClr val="DC2626"/>
+            <a:srgbClr val="DCFCE7"/>
+          </a:solidFill>
+          <a:ln w="12700">
+            <a:solidFill>
+              <a:srgbClr val="16A34A"/>
             </a:solidFill>
             <a:prstDash val="solid"/>
           </a:ln>
@@ -35931,13 +36885,13 @@
             <a:r>
               <a:rPr lang="en-US" sz="1100" b="1" dirty="0">
                 <a:solidFill>
-                  <a:srgbClr val="DC2626"/>
+                  <a:srgbClr val="16A34A"/>
                 </a:solidFill>
                 <a:latin typeface="Trebuchet MS" pitchFamily="34" charset="0"/>
                 <a:ea typeface="Trebuchet MS" pitchFamily="34" charset="-122"/>
                 <a:cs typeface="Trebuchet MS" pitchFamily="34" charset="-120"/>
               </a:rPr>
-              <a:t>FALSE</a:t>
+              <a:t>TRUE</a:t>
             </a:r>
             <a:endParaRPr lang="en-US" sz="1100" dirty="0"/>
           </a:p>
@@ -36010,7 +36964,7 @@
                 <a:ea typeface="Calibri" pitchFamily="34" charset="-122"/>
                 <a:cs typeface="Calibri" pitchFamily="34" charset="-120"/>
               </a:rPr>
-              <a:t>3.  The word 'unrest' contains the prefix 'un' meaning 'not'.</a:t>
+              <a:t>3.  The word 'interest' has nothing to do with the root 'rest'.</a:t>
             </a:r>
             <a:endParaRPr lang="en-US" sz="1300" dirty="0"/>
           </a:p>
@@ -36033,11 +36987,11 @@
             </a:avLst>
           </a:prstGeom>
           <a:solidFill>
-            <a:srgbClr val="DCFCE7"/>
-          </a:solidFill>
-          <a:ln w="12700">
-            <a:solidFill>
-              <a:srgbClr val="16A34A"/>
+            <a:srgbClr val="FEE2E2"/>
+          </a:solidFill>
+          <a:ln w="12700">
+            <a:solidFill>
+              <a:srgbClr val="DC2626"/>
             </a:solidFill>
             <a:prstDash val="solid"/>
           </a:ln>
@@ -36070,13 +37024,13 @@
             <a:r>
               <a:rPr lang="en-US" sz="1100" b="1" dirty="0">
                 <a:solidFill>
-                  <a:srgbClr val="16A34A"/>
+                  <a:srgbClr val="DC2626"/>
                 </a:solidFill>
                 <a:latin typeface="Trebuchet MS" pitchFamily="34" charset="0"/>
                 <a:ea typeface="Trebuchet MS" pitchFamily="34" charset="-122"/>
                 <a:cs typeface="Trebuchet MS" pitchFamily="34" charset="-120"/>
               </a:rPr>
-              <a:t>TRUE</a:t>
+              <a:t>FALSE</a:t>
             </a:r>
             <a:endParaRPr lang="en-US" sz="1100" dirty="0"/>
           </a:p>
@@ -36149,7 +37103,7 @@
                 <a:ea typeface="Calibri" pitchFamily="34" charset="-122"/>
                 <a:cs typeface="Calibri" pitchFamily="34" charset="-120"/>
               </a:rPr>
-              <a:t>4.  The word 'restore' contains the root 'rest' meaning to stop or pause.</a:t>
+              <a:t>4.  The word 'unrest' uses the prefix 'un-' meaning not or opposite.</a:t>
             </a:r>
             <a:endParaRPr lang="en-US" sz="1300" dirty="0"/>
           </a:p>
@@ -36288,7 +37242,7 @@
                 <a:ea typeface="Calibri" pitchFamily="34" charset="-122"/>
                 <a:cs typeface="Calibri" pitchFamily="34" charset="-120"/>
               </a:rPr>
-              <a:t>5.  The word 'restful' means the same thing as 'restless'.</a:t>
+              <a:t>5.  The root 'rest' comes from a Greek word.</a:t>
             </a:r>
             <a:endParaRPr lang="en-US" sz="1300" dirty="0"/>
           </a:p>
@@ -36646,7 +37600,7 @@
                 <a:ea typeface="Calibri" pitchFamily="34" charset="-122"/>
                 <a:cs typeface="Calibri" pitchFamily="34" charset="-120"/>
               </a:rPr>
-              <a:t>Word Labs  •  wordlabs.app  •  Root: 'rest' = stop, pause, remain still</a:t>
+              <a:t>Word Labs  •  wordlabs.app  •  Root: 'rest' = stop, remain, be still</a:t>
             </a:r>
             <a:endParaRPr lang="en-US" sz="800" dirty="0"/>
           </a:p>
@@ -36783,7 +37737,7 @@
                 <a:ea typeface="Trebuchet MS" pitchFamily="34" charset="-122"/>
                 <a:cs typeface="Trebuchet MS" pitchFamily="34" charset="-120"/>
               </a:rPr>
-              <a:t>stop, pause, remain still</a:t>
+              <a:t>stop, remain, be still</a:t>
             </a:r>
             <a:endParaRPr lang="en-US" sz="2000" dirty="0"/>
           </a:p>
@@ -37125,7 +38079,7 @@
                 <a:ea typeface="Trebuchet MS" pitchFamily="34" charset="-122"/>
                 <a:cs typeface="Trebuchet MS" pitchFamily="34" charset="-120"/>
               </a:rPr>
-              <a:t>resting</a:t>
+              <a:t>forest</a:t>
             </a:r>
             <a:endParaRPr lang="en-US" sz="1300" dirty="0"/>
           </a:p>
@@ -37191,7 +38145,7 @@
                 <a:ea typeface="Trebuchet MS" pitchFamily="34" charset="-122"/>
                 <a:cs typeface="Trebuchet MS" pitchFamily="34" charset="-120"/>
               </a:rPr>
-              <a:t>restore</a:t>
+              <a:t>resting</a:t>
             </a:r>
             <a:endParaRPr lang="en-US" sz="1300" dirty="0"/>
           </a:p>
@@ -37257,7 +38211,7 @@
                 <a:ea typeface="Trebuchet MS" pitchFamily="34" charset="-122"/>
                 <a:cs typeface="Trebuchet MS" pitchFamily="34" charset="-120"/>
               </a:rPr>
-              <a:t>forest</a:t>
+              <a:t>interest</a:t>
             </a:r>
             <a:endParaRPr lang="en-US" sz="1300" dirty="0"/>
           </a:p>
@@ -37323,7 +38277,7 @@
                 <a:ea typeface="Trebuchet MS" pitchFamily="34" charset="-122"/>
                 <a:cs typeface="Trebuchet MS" pitchFamily="34" charset="-120"/>
               </a:rPr>
-              <a:t>arrested</a:t>
+              <a:t>unrest</a:t>
             </a:r>
             <a:endParaRPr lang="en-US" sz="1300" dirty="0"/>
           </a:p>
@@ -37615,7 +38569,7 @@
                 <a:ea typeface="Calibri" pitchFamily="34" charset="-122"/>
                 <a:cs typeface="Calibri" pitchFamily="34" charset="-120"/>
               </a:rPr>
-              <a:t>Word Labs  •  wordlabs.app  •  Root: 'rest' = stop, pause, remain still</a:t>
+              <a:t>Word Labs  •  wordlabs.app  •  Root: 'rest' = stop, remain, be still</a:t>
             </a:r>
             <a:endParaRPr lang="en-US" sz="800" dirty="0"/>
           </a:p>
@@ -37916,7 +38870,7 @@
                 <a:ea typeface="Trebuchet MS" pitchFamily="34" charset="-122"/>
                 <a:cs typeface="Trebuchet MS" pitchFamily="34" charset="-120"/>
               </a:rPr>
-              <a:t>un-</a:t>
+              <a:t>ar-</a:t>
             </a:r>
             <a:endParaRPr lang="en-US" sz="1300" dirty="0"/>
           </a:p>
@@ -38044,7 +38998,7 @@
                 <a:ea typeface="Trebuchet MS" pitchFamily="34" charset="-122"/>
                 <a:cs typeface="Trebuchet MS" pitchFamily="34" charset="-120"/>
               </a:rPr>
-              <a:t>-ed</a:t>
+              <a:t>-ful</a:t>
             </a:r>
             <a:endParaRPr lang="en-US" sz="1300" dirty="0"/>
           </a:p>
@@ -38108,7 +39062,7 @@
                 <a:ea typeface="Trebuchet MS" pitchFamily="34" charset="-122"/>
                 <a:cs typeface="Trebuchet MS" pitchFamily="34" charset="-120"/>
               </a:rPr>
-              <a:t>ar-</a:t>
+              <a:t>for-</a:t>
             </a:r>
             <a:endParaRPr lang="en-US" sz="1300" dirty="0"/>
           </a:p>
@@ -38197,7 +39151,7 @@
                 <a:ea typeface="Trebuchet MS" pitchFamily="34" charset="-122"/>
                 <a:cs typeface="Trebuchet MS" pitchFamily="34" charset="-120"/>
               </a:rPr>
-              <a:t>-ing</a:t>
+              <a:t>-less</a:t>
             </a:r>
             <a:endParaRPr lang="en-US" sz="1300" dirty="0"/>
           </a:p>
@@ -38261,7 +39215,7 @@
                 <a:ea typeface="Trebuchet MS" pitchFamily="34" charset="-122"/>
                 <a:cs typeface="Trebuchet MS" pitchFamily="34" charset="-120"/>
               </a:rPr>
-              <a:t>for-</a:t>
+              <a:t>in-</a:t>
             </a:r>
             <a:endParaRPr lang="en-US" sz="1300" dirty="0"/>
           </a:p>
@@ -38350,7 +39304,7 @@
                 <a:ea typeface="Trebuchet MS" pitchFamily="34" charset="-122"/>
                 <a:cs typeface="Trebuchet MS" pitchFamily="34" charset="-120"/>
               </a:rPr>
-              <a:t>-ful</a:t>
+              <a:t>-ing</a:t>
             </a:r>
             <a:endParaRPr lang="en-US" sz="1300" dirty="0"/>
           </a:p>
@@ -38414,7 +39368,7 @@
                 <a:ea typeface="Trebuchet MS" pitchFamily="34" charset="-122"/>
                 <a:cs typeface="Trebuchet MS" pitchFamily="34" charset="-120"/>
               </a:rPr>
-              <a:t>back-</a:t>
+              <a:t>un-</a:t>
             </a:r>
             <a:endParaRPr lang="en-US" sz="1300" dirty="0"/>
           </a:p>
@@ -38503,7 +39457,7 @@
                 <a:ea typeface="Trebuchet MS" pitchFamily="34" charset="-122"/>
                 <a:cs typeface="Trebuchet MS" pitchFamily="34" charset="-120"/>
               </a:rPr>
-              <a:t>-less</a:t>
+              <a:t>-ed</a:t>
             </a:r>
             <a:endParaRPr lang="en-US" sz="1300" dirty="0"/>
           </a:p>
@@ -38567,7 +39521,7 @@
                 <a:ea typeface="Trebuchet MS" pitchFamily="34" charset="-122"/>
                 <a:cs typeface="Trebuchet MS" pitchFamily="34" charset="-120"/>
               </a:rPr>
-              <a:t>head-</a:t>
+              <a:t>re-</a:t>
             </a:r>
             <a:endParaRPr lang="en-US" sz="1300" dirty="0"/>
           </a:p>
@@ -38656,7 +39610,7 @@
                 <a:ea typeface="Trebuchet MS" pitchFamily="34" charset="-122"/>
                 <a:cs typeface="Trebuchet MS" pitchFamily="34" charset="-120"/>
               </a:rPr>
-              <a:t>-ore</a:t>
+              <a:t>-ive</a:t>
             </a:r>
             <a:endParaRPr lang="en-US" sz="1300" dirty="0"/>
           </a:p>
@@ -38768,7 +39722,7 @@
                 <a:ea typeface="Trebuchet MS" pitchFamily="34" charset="-122"/>
                 <a:cs typeface="Trebuchet MS" pitchFamily="34" charset="-120"/>
               </a:rPr>
-              <a:t>un-</a:t>
+              <a:t>ar-</a:t>
             </a:r>
             <a:endParaRPr lang="en-US" sz="1300" dirty="0"/>
           </a:p>
@@ -38934,7 +39888,7 @@
         <p:spPr>
           <a:xfrm>
             <a:off x="4325112" y="4178808"/>
-            <a:ext cx="822960" cy="420624"/>
+            <a:ext cx="950976" cy="420624"/>
           </a:xfrm>
           <a:prstGeom prst="rect">
             <a:avLst>
@@ -38968,7 +39922,7 @@
         <p:spPr>
           <a:xfrm>
             <a:off x="4325112" y="4178808"/>
-            <a:ext cx="822960" cy="420624"/>
+            <a:ext cx="950976" cy="420624"/>
           </a:xfrm>
           <a:prstGeom prst="rect">
             <a:avLst/>
@@ -38992,7 +39946,7 @@
                 <a:ea typeface="Trebuchet MS" pitchFamily="34" charset="-122"/>
                 <a:cs typeface="Trebuchet MS" pitchFamily="34" charset="-120"/>
               </a:rPr>
-              <a:t>-ed</a:t>
+              <a:t>-ful</a:t>
             </a:r>
             <a:endParaRPr lang="en-US" sz="1300" dirty="0"/>
           </a:p>
@@ -39006,7 +39960,7 @@
         </p:nvSpPr>
         <p:spPr>
           <a:xfrm>
-            <a:off x="5221224" y="4178808"/>
+            <a:off x="5349240" y="4178808"/>
             <a:ext cx="365760" cy="420624"/>
           </a:xfrm>
           <a:prstGeom prst="rect">
@@ -39045,7 +39999,7 @@
         </p:nvSpPr>
         <p:spPr>
           <a:xfrm>
-            <a:off x="5632704" y="4178808"/>
+            <a:off x="5760720" y="4178808"/>
             <a:ext cx="2194560" cy="420624"/>
           </a:xfrm>
           <a:prstGeom prst="rect">
@@ -39072,7 +40026,7 @@
         </p:nvSpPr>
         <p:spPr>
           <a:xfrm>
-            <a:off x="5632704" y="4178808"/>
+            <a:off x="5760720" y="4178808"/>
             <a:ext cx="2194560" cy="420624"/>
           </a:xfrm>
           <a:prstGeom prst="rect">
@@ -39389,7 +40343,7 @@
                 <a:ea typeface="Calibri" pitchFamily="34" charset="-122"/>
                 <a:cs typeface="Calibri" pitchFamily="34" charset="-120"/>
               </a:rPr>
-              <a:t>Word Labs  •  wordlabs.app  •  Root: 'rest' = stop, pause, remain still</a:t>
+              <a:t>Word Labs  •  wordlabs.app  •  Root: 'rest' = stop, remain, be still</a:t>
             </a:r>
             <a:endParaRPr lang="en-US" sz="800" dirty="0"/>
           </a:p>
@@ -39567,7 +40521,7 @@
                 <a:ea typeface="Calibri" pitchFamily="34" charset="-122"/>
                 <a:cs typeface="Calibri" pitchFamily="34" charset="-120"/>
               </a:rPr>
-              <a:t>To bring something back to the way it used to be, like fixing an old painting.</a:t>
+              <a:t>Taking a break and being still to recover energy.</a:t>
             </a:r>
             <a:endParaRPr lang="en-US" sz="1200" dirty="0"/>
           </a:p>
@@ -39706,7 +40660,7 @@
                 <a:ea typeface="Calibri" pitchFamily="34" charset="-122"/>
                 <a:cs typeface="Calibri" pitchFamily="34" charset="-120"/>
               </a:rPr>
-              <a:t>Taking a break and not moving or working for a while.</a:t>
+              <a:t>A large area of land covered with many trees and plants.</a:t>
             </a:r>
             <a:endParaRPr lang="en-US" sz="1200" dirty="0"/>
           </a:p>
@@ -39845,7 +40799,7 @@
                 <a:ea typeface="Calibri" pitchFamily="34" charset="-122"/>
                 <a:cs typeface="Calibri" pitchFamily="34" charset="-120"/>
               </a:rPr>
-              <a:t>Unable to keep still or relax; feeling fidgety and unsettled.</a:t>
+              <a:t>Unable to be still or quiet because you feel nervous or bored.</a:t>
             </a:r>
             <a:endParaRPr lang="en-US" sz="1200" dirty="0"/>
           </a:p>
@@ -39918,7 +40872,7 @@
                 <a:ea typeface="Trebuchet MS" pitchFamily="34" charset="-122"/>
                 <a:cs typeface="Trebuchet MS" pitchFamily="34" charset="-120"/>
               </a:rPr>
-              <a:t>resting</a:t>
+              <a:t>forest</a:t>
             </a:r>
             <a:endParaRPr lang="en-US" sz="1200" dirty="0"/>
           </a:p>
@@ -39984,7 +40938,7 @@
                 <a:ea typeface="Calibri" pitchFamily="34" charset="-122"/>
                 <a:cs typeface="Calibri" pitchFamily="34" charset="-120"/>
               </a:rPr>
-              <a:t>When someone was stopped and taken by police because they broke a law.</a:t>
+              <a:t>A situation where people are unhappy and causing trouble in a place.</a:t>
             </a:r>
             <a:endParaRPr lang="en-US" sz="1200" dirty="0"/>
           </a:p>
@@ -40057,7 +41011,7 @@
                 <a:ea typeface="Trebuchet MS" pitchFamily="34" charset="-122"/>
                 <a:cs typeface="Trebuchet MS" pitchFamily="34" charset="-120"/>
               </a:rPr>
-              <a:t>restore</a:t>
+              <a:t>resting</a:t>
             </a:r>
             <a:endParaRPr lang="en-US" sz="1200" dirty="0"/>
           </a:p>
@@ -40123,7 +41077,7 @@
                 <a:ea typeface="Calibri" pitchFamily="34" charset="-122"/>
                 <a:cs typeface="Calibri" pitchFamily="34" charset="-120"/>
               </a:rPr>
-              <a:t>When police stop and hold someone who has broken the law.</a:t>
+              <a:t>When police officially stop and hold someone who has broken the law.</a:t>
             </a:r>
             <a:endParaRPr lang="en-US" sz="1200" dirty="0"/>
           </a:p>
@@ -40196,7 +41150,7 @@
                 <a:ea typeface="Trebuchet MS" pitchFamily="34" charset="-122"/>
                 <a:cs typeface="Trebuchet MS" pitchFamily="34" charset="-120"/>
               </a:rPr>
-              <a:t>forest</a:t>
+              <a:t>interest</a:t>
             </a:r>
             <a:endParaRPr lang="en-US" sz="1200" dirty="0"/>
           </a:p>
@@ -40262,7 +41216,7 @@
                 <a:ea typeface="Calibri" pitchFamily="34" charset="-122"/>
                 <a:cs typeface="Calibri" pitchFamily="34" charset="-120"/>
               </a:rPr>
-              <a:t>A large area of land covered with many trees and plants.</a:t>
+              <a:t>A feeling of wanting to know more about something.</a:t>
             </a:r>
             <a:endParaRPr lang="en-US" sz="1200" dirty="0"/>
           </a:p>
@@ -40335,7 +41289,7 @@
                 <a:ea typeface="Trebuchet MS" pitchFamily="34" charset="-122"/>
                 <a:cs typeface="Trebuchet MS" pitchFamily="34" charset="-120"/>
               </a:rPr>
-              <a:t>arrested</a:t>
+              <a:t>unrest</a:t>
             </a:r>
             <a:endParaRPr lang="en-US" sz="1200" dirty="0"/>
           </a:p>
@@ -40401,7 +41355,7 @@
                 <a:ea typeface="Calibri" pitchFamily="34" charset="-122"/>
                 <a:cs typeface="Calibri" pitchFamily="34" charset="-120"/>
               </a:rPr>
-              <a:t>Something that is calm and helps you feel relaxed, like a quiet afternoon nap.</a:t>
+              <a:t>Something that is calm and peaceful, helping you to relax.</a:t>
             </a:r>
             <a:endParaRPr lang="en-US" sz="1200" dirty="0"/>
           </a:p>
@@ -40693,7 +41647,7 @@
                 <a:ea typeface="Calibri" pitchFamily="34" charset="-122"/>
                 <a:cs typeface="Calibri" pitchFamily="34" charset="-120"/>
               </a:rPr>
-              <a:t>Word Labs  •  wordlabs.app  •  Root: 'rest' = stop, pause, remain still</a:t>
+              <a:t>Word Labs  •  wordlabs.app  •  Root: 'rest' = stop, remain, be still</a:t>
             </a:r>
             <a:endParaRPr lang="en-US" sz="800" dirty="0"/>
           </a:p>
@@ -40896,7 +41850,7 @@
                 <a:ea typeface="Calibri" pitchFamily="34" charset="-122"/>
                 <a:cs typeface="Calibri" pitchFamily="34" charset="-120"/>
               </a:rPr>
-              <a:t>After the long bushwalk, the children found a shady spot and spent a restful hour by the creek.</a:t>
+              <a:t>After the long hike, the children needed a restful sleep to recover their energy.</a:t>
             </a:r>
             <a:endParaRPr lang="en-US" sz="1500" dirty="0"/>
           </a:p>
@@ -41060,7 +42014,7 @@
                 <a:ea typeface="Calibri" pitchFamily="34" charset="-122"/>
                 <a:cs typeface="Calibri" pitchFamily="34" charset="-120"/>
               </a:rPr>
-              <a:t>The teacher asked the restless students to take a deep breath and sit quietly for a moment.</a:t>
+              <a:t>The teacher noticed the students were restless after sitting inside all afternoon.</a:t>
             </a:r>
             <a:endParaRPr lang="en-US" sz="1500" dirty="0"/>
           </a:p>
@@ -41224,7 +42178,7 @@
                 <a:ea typeface="Calibri" pitchFamily="34" charset="-122"/>
                 <a:cs typeface="Calibri" pitchFamily="34" charset="-120"/>
               </a:rPr>
-              <a:t>The museum workers worked hard to restore the ancient Aboriginal artefact to its original condition.</a:t>
+              <a:t>The police officer made an arrest after seeing the man take the bicycle.</a:t>
             </a:r>
             <a:endParaRPr lang="en-US" sz="1500" dirty="0"/>
           </a:p>
